--- a/docs/product-guide/self-study-studio-product-guide-a4.pptx
+++ b/docs/product-guide/self-study-studio-product-guide-a4.pptx
@@ -2,138 +2,43 @@
 <file path=ppt/presentation.xml><?xml version="1.0" encoding="utf-8"?>
 <p:presentation xmlns:p="http://schemas.openxmlformats.org/presentationml/2006/main">
   <p:sldMasterIdLst>
-    <p:sldMasterId xmlns:r="http://schemas.openxmlformats.org/officeDocument/2006/relationships" id="2147483648" r:id="Re97b66949cdd43b4"/>
+    <p:sldMasterId xmlns:r="http://schemas.openxmlformats.org/officeDocument/2006/relationships" id="2147483648" r:id="Rc00d7d29e69947c8"/>
   </p:sldMasterIdLst>
   <p:notesMasterIdLst>
-    <p:notesMasterId xmlns:r="http://schemas.openxmlformats.org/officeDocument/2006/relationships" r:id="R7c484c9bed504d84"/>
+    <p:notesMasterId xmlns:r="http://schemas.openxmlformats.org/officeDocument/2006/relationships" r:id="R471efe58893849a0"/>
   </p:notesMasterIdLst>
   <p:sldIdLst>
-    <p:sldId xmlns:r="http://schemas.openxmlformats.org/officeDocument/2006/relationships" id="256" r:id="R38d358c5954e4bff"/>
-    <p:sldId xmlns:r="http://schemas.openxmlformats.org/officeDocument/2006/relationships" id="257" r:id="R1a9bc8b3a0b64e8e"/>
-    <p:sldId xmlns:r="http://schemas.openxmlformats.org/officeDocument/2006/relationships" id="258" r:id="R3e5b4ec290b94348"/>
-    <p:sldId xmlns:r="http://schemas.openxmlformats.org/officeDocument/2006/relationships" id="259" r:id="Rdf55d37f374c4bb9"/>
-    <p:sldId xmlns:r="http://schemas.openxmlformats.org/officeDocument/2006/relationships" id="260" r:id="R59af33efd0654d41"/>
-    <p:sldId xmlns:r="http://schemas.openxmlformats.org/officeDocument/2006/relationships" id="261" r:id="R61581313c8854d2a"/>
-    <p:sldId xmlns:r="http://schemas.openxmlformats.org/officeDocument/2006/relationships" id="262" r:id="Rfc1863e548ab4397"/>
-    <p:sldId xmlns:r="http://schemas.openxmlformats.org/officeDocument/2006/relationships" id="263" r:id="R962ce922715c447a"/>
-    <p:sldId xmlns:r="http://schemas.openxmlformats.org/officeDocument/2006/relationships" id="264" r:id="R12797ca953c1456d"/>
-    <p:sldId xmlns:r="http://schemas.openxmlformats.org/officeDocument/2006/relationships" id="265" r:id="Rf35558ca33d049c6"/>
-    <p:sldId xmlns:r="http://schemas.openxmlformats.org/officeDocument/2006/relationships" id="266" r:id="Rf3f92dcd81c9440a"/>
-    <p:sldId xmlns:r="http://schemas.openxmlformats.org/officeDocument/2006/relationships" id="267" r:id="R4527b827b6484094"/>
-    <p:sldId xmlns:r="http://schemas.openxmlformats.org/officeDocument/2006/relationships" id="268" r:id="Rd6a80060e1fd4783"/>
-    <p:sldId xmlns:r="http://schemas.openxmlformats.org/officeDocument/2006/relationships" id="269" r:id="R02e153d34093416f"/>
-    <p:sldId xmlns:r="http://schemas.openxmlformats.org/officeDocument/2006/relationships" id="270" r:id="R3e46304d84204bfe"/>
-    <p:sldId xmlns:r="http://schemas.openxmlformats.org/officeDocument/2006/relationships" id="271" r:id="R1ba91c09968a48b9"/>
-    <p:sldId xmlns:r="http://schemas.openxmlformats.org/officeDocument/2006/relationships" id="272" r:id="Ref88d4494c3a490d"/>
-    <p:sldId xmlns:r="http://schemas.openxmlformats.org/officeDocument/2006/relationships" id="273" r:id="R6111773fbd8d443f"/>
-    <p:sldId xmlns:r="http://schemas.openxmlformats.org/officeDocument/2006/relationships" id="274" r:id="R786aab24400a480f"/>
-    <p:sldId xmlns:r="http://schemas.openxmlformats.org/officeDocument/2006/relationships" id="275" r:id="R3c6fccf454cd46e1"/>
-    <p:sldId xmlns:r="http://schemas.openxmlformats.org/officeDocument/2006/relationships" id="276" r:id="R0e64208136424248"/>
-    <p:sldId xmlns:r="http://schemas.openxmlformats.org/officeDocument/2006/relationships" id="277" r:id="Rb2980077b9414e57"/>
-    <p:sldId xmlns:r="http://schemas.openxmlformats.org/officeDocument/2006/relationships" id="278" r:id="Rc13fadb7d8534bc8"/>
-    <p:sldId xmlns:r="http://schemas.openxmlformats.org/officeDocument/2006/relationships" id="279" r:id="R477ecc515f844944"/>
-    <p:sldId xmlns:r="http://schemas.openxmlformats.org/officeDocument/2006/relationships" id="280" r:id="R1514ac2163e04072"/>
-    <p:sldId xmlns:r="http://schemas.openxmlformats.org/officeDocument/2006/relationships" id="281" r:id="R2d1c56e8456848cb"/>
-    <p:sldId xmlns:r="http://schemas.openxmlformats.org/officeDocument/2006/relationships" id="282" r:id="R1d9ce0b4bab849f8"/>
-    <p:sldId xmlns:r="http://schemas.openxmlformats.org/officeDocument/2006/relationships" id="283" r:id="R01833f425377452a"/>
+    <p:sldId xmlns:r="http://schemas.openxmlformats.org/officeDocument/2006/relationships" id="256" r:id="Ra09b90ef27b84a3e"/>
+    <p:sldId xmlns:r="http://schemas.openxmlformats.org/officeDocument/2006/relationships" id="257" r:id="R11b5544f7e364a9d"/>
+    <p:sldId xmlns:r="http://schemas.openxmlformats.org/officeDocument/2006/relationships" id="258" r:id="Rcbdee1f93b0b42cf"/>
+    <p:sldId xmlns:r="http://schemas.openxmlformats.org/officeDocument/2006/relationships" id="259" r:id="Reac2ddfeeaaa4833"/>
+    <p:sldId xmlns:r="http://schemas.openxmlformats.org/officeDocument/2006/relationships" id="260" r:id="R4964e734e28d4c33"/>
+    <p:sldId xmlns:r="http://schemas.openxmlformats.org/officeDocument/2006/relationships" id="261" r:id="R45a5dc7ca00f4f64"/>
+    <p:sldId xmlns:r="http://schemas.openxmlformats.org/officeDocument/2006/relationships" id="262" r:id="Rf7abfb9091a14d31"/>
+    <p:sldId xmlns:r="http://schemas.openxmlformats.org/officeDocument/2006/relationships" id="263" r:id="R52c6b855720e43fe"/>
+    <p:sldId xmlns:r="http://schemas.openxmlformats.org/officeDocument/2006/relationships" id="264" r:id="R630da7e1caca4005"/>
+    <p:sldId xmlns:r="http://schemas.openxmlformats.org/officeDocument/2006/relationships" id="265" r:id="Rbf9a0dc5d13b4437"/>
+    <p:sldId xmlns:r="http://schemas.openxmlformats.org/officeDocument/2006/relationships" id="266" r:id="R1a5a46f1ca3b4de4"/>
+    <p:sldId xmlns:r="http://schemas.openxmlformats.org/officeDocument/2006/relationships" id="267" r:id="Red6b3c5f07484f05"/>
+    <p:sldId xmlns:r="http://schemas.openxmlformats.org/officeDocument/2006/relationships" id="268" r:id="R7e9f0b42422540fd"/>
+    <p:sldId xmlns:r="http://schemas.openxmlformats.org/officeDocument/2006/relationships" id="269" r:id="Rc488258e45184241"/>
+    <p:sldId xmlns:r="http://schemas.openxmlformats.org/officeDocument/2006/relationships" id="270" r:id="R2e935426f72148a8"/>
+    <p:sldId xmlns:r="http://schemas.openxmlformats.org/officeDocument/2006/relationships" id="271" r:id="R47a9039b69024a1e"/>
+    <p:sldId xmlns:r="http://schemas.openxmlformats.org/officeDocument/2006/relationships" id="272" r:id="R0c9fa426a98b418f"/>
+    <p:sldId xmlns:r="http://schemas.openxmlformats.org/officeDocument/2006/relationships" id="273" r:id="Rc2d15108c9db4d11"/>
+    <p:sldId xmlns:r="http://schemas.openxmlformats.org/officeDocument/2006/relationships" id="274" r:id="R4562ad1df3fa4de0"/>
+    <p:sldId xmlns:r="http://schemas.openxmlformats.org/officeDocument/2006/relationships" id="275" r:id="R941602842a4449cb"/>
+    <p:sldId xmlns:r="http://schemas.openxmlformats.org/officeDocument/2006/relationships" id="276" r:id="Rd46a74bc7afd41f3"/>
+    <p:sldId xmlns:r="http://schemas.openxmlformats.org/officeDocument/2006/relationships" id="277" r:id="Rc9f57844ca8c4c22"/>
+    <p:sldId xmlns:r="http://schemas.openxmlformats.org/officeDocument/2006/relationships" id="278" r:id="Rfa612a6f0bc04de1"/>
+    <p:sldId xmlns:r="http://schemas.openxmlformats.org/officeDocument/2006/relationships" id="279" r:id="R6e28b925866b4bd1"/>
+    <p:sldId xmlns:r="http://schemas.openxmlformats.org/officeDocument/2006/relationships" id="280" r:id="Redc9ac3245a14367"/>
+    <p:sldId xmlns:r="http://schemas.openxmlformats.org/officeDocument/2006/relationships" id="281" r:id="R37718310d80e4219"/>
+    <p:sldId xmlns:r="http://schemas.openxmlformats.org/officeDocument/2006/relationships" id="282" r:id="R9f14f11f4b164d2c"/>
+    <p:sldId xmlns:r="http://schemas.openxmlformats.org/officeDocument/2006/relationships" id="283" r:id="R8887dc50d5e8472f"/>
   </p:sldIdLst>
   <p:sldSz cx="7562850" cy="10696575"/>
   <p:notesSz cx="6858000" cy="9144000"/>
-  <p:defaultTextStyle>
-    <a:defPPr xmlns:a="http://schemas.openxmlformats.org/drawingml/2006/main">
-      <a:defRPr lang="en-US"/>
-    </a:defPPr>
-    <a:lvl1pPr xmlns:a="http://schemas.openxmlformats.org/drawingml/2006/main" marL="0" indent="0" algn="l" defTabSz="914400">
-      <a:defRPr sz="1800" kern="1200">
-        <a:solidFill>
-          <a:schemeClr val="tx1"/>
-        </a:solidFill>
-        <a:latin typeface="+mn-lt"/>
-        <a:ea typeface="+mn-ea"/>
-        <a:cs typeface="+mn-cs"/>
-      </a:defRPr>
-    </a:lvl1pPr>
-    <a:lvl2pPr xmlns:a="http://schemas.openxmlformats.org/drawingml/2006/main" marL="457200" indent="0" algn="l" defTabSz="914400">
-      <a:defRPr sz="1800" kern="1200">
-        <a:solidFill>
-          <a:schemeClr val="tx1"/>
-        </a:solidFill>
-        <a:latin typeface="+mn-lt"/>
-        <a:ea typeface="+mn-ea"/>
-        <a:cs typeface="+mn-cs"/>
-      </a:defRPr>
-    </a:lvl2pPr>
-    <a:lvl3pPr xmlns:a="http://schemas.openxmlformats.org/drawingml/2006/main" marL="914400" indent="0" algn="l" defTabSz="914400">
-      <a:defRPr sz="1800" kern="1200">
-        <a:solidFill>
-          <a:schemeClr val="tx1"/>
-        </a:solidFill>
-        <a:latin typeface="+mn-lt"/>
-        <a:ea typeface="+mn-ea"/>
-        <a:cs typeface="+mn-cs"/>
-      </a:defRPr>
-    </a:lvl3pPr>
-    <a:lvl4pPr xmlns:a="http://schemas.openxmlformats.org/drawingml/2006/main" marL="1371600" indent="0" algn="l" defTabSz="914400">
-      <a:defRPr sz="1800" kern="1200">
-        <a:solidFill>
-          <a:schemeClr val="tx1"/>
-        </a:solidFill>
-        <a:latin typeface="+mn-lt"/>
-        <a:ea typeface="+mn-ea"/>
-        <a:cs typeface="+mn-cs"/>
-      </a:defRPr>
-    </a:lvl4pPr>
-    <a:lvl5pPr xmlns:a="http://schemas.openxmlformats.org/drawingml/2006/main" marL="1828800" indent="0" algn="l" defTabSz="914400">
-      <a:defRPr sz="1800" kern="1200">
-        <a:solidFill>
-          <a:schemeClr val="tx1"/>
-        </a:solidFill>
-        <a:latin typeface="+mn-lt"/>
-        <a:ea typeface="+mn-ea"/>
-        <a:cs typeface="+mn-cs"/>
-      </a:defRPr>
-    </a:lvl5pPr>
-    <a:lvl6pPr xmlns:a="http://schemas.openxmlformats.org/drawingml/2006/main" marL="2286000" indent="0" algn="l" defTabSz="914400">
-      <a:defRPr sz="1800" kern="1200">
-        <a:solidFill>
-          <a:schemeClr val="tx1"/>
-        </a:solidFill>
-        <a:latin typeface="+mn-lt"/>
-        <a:ea typeface="+mn-ea"/>
-        <a:cs typeface="+mn-cs"/>
-      </a:defRPr>
-    </a:lvl6pPr>
-    <a:lvl7pPr xmlns:a="http://schemas.openxmlformats.org/drawingml/2006/main" marL="2743200" indent="0" algn="l" defTabSz="914400">
-      <a:defRPr sz="1800" kern="1200">
-        <a:solidFill>
-          <a:schemeClr val="tx1"/>
-        </a:solidFill>
-        <a:latin typeface="+mn-lt"/>
-        <a:ea typeface="+mn-ea"/>
-        <a:cs typeface="+mn-cs"/>
-      </a:defRPr>
-    </a:lvl7pPr>
-    <a:lvl8pPr xmlns:a="http://schemas.openxmlformats.org/drawingml/2006/main" marL="3200400" indent="0" algn="l" defTabSz="914400">
-      <a:defRPr sz="1800" kern="1200">
-        <a:solidFill>
-          <a:schemeClr val="tx1"/>
-        </a:solidFill>
-        <a:latin typeface="+mn-lt"/>
-        <a:ea typeface="+mn-ea"/>
-        <a:cs typeface="+mn-cs"/>
-      </a:defRPr>
-    </a:lvl8pPr>
-    <a:lvl9pPr xmlns:a="http://schemas.openxmlformats.org/drawingml/2006/main" marL="3657600" indent="0" algn="l" defTabSz="914400">
-      <a:defRPr sz="1800" kern="1200">
-        <a:solidFill>
-          <a:schemeClr val="tx1"/>
-        </a:solidFill>
-        <a:latin typeface="+mn-lt"/>
-        <a:ea typeface="+mn-ea"/>
-        <a:cs typeface="+mn-cs"/>
-      </a:defRPr>
-    </a:lvl9pPr>
-  </p:defaultTextStyle>
 </p:presentation>
 </file>
 
@@ -2410,7 +2315,7 @@
   </p:cSld>
   <p:clrMap bg1="lt1" tx1="dk1" bg2="lt2" tx2="dk2" accent1="accent1" accent2="accent2" accent3="accent3" accent4="accent4" accent5="accent5" accent6="accent6" hlink="hlink" folHlink="folHlink"/>
   <p:sldLayoutIdLst>
-    <p:sldLayoutId xmlns:r="http://schemas.openxmlformats.org/officeDocument/2006/relationships" id="2147483649" r:id="Rebc24b8d4dc54789"/>
+    <p:sldLayoutId xmlns:r="http://schemas.openxmlformats.org/officeDocument/2006/relationships" id="2147483649" r:id="Rde2b0d8377a94aef"/>
   </p:sldLayoutIdLst>
   <p:txStyles>
     <p:titleStyle>
@@ -2958,10 +2863,10 @@
       </p:grpSpPr>
       <p:sp>
         <p:nvSpPr>
-          <p:cNvPr id="1" name="">
-            <a:extLst xmlns:a="http://schemas.openxmlformats.org/drawingml/2006/main">
-              <a:ext uri="{FF2B5EF4-FFF2-40B4-BE49-F238E27FC236}">
-                <a16:creationId xmlns:a16="http://schemas.microsoft.com/office/drawing/2014/main" id="{240161B3-8070-4051-AAC0-3AE5D2F816BD}"/>
+          <p:cNvPr id="7" name="">
+            <a:extLst xmlns:a="http://schemas.openxmlformats.org/drawingml/2006/main">
+              <a:ext uri="{FF2B5EF4-FFF2-40B4-BE49-F238E27FC236}">
+                <a16:creationId xmlns:a16="http://schemas.microsoft.com/office/drawing/2014/main" id="{87FA27FD-D1E1-4E46-8713-7502BA4CC6C2}"/>
               </a:ext>
             </a:extLst>
           </p:cNvPr>
@@ -3011,7 +2916,7 @@
           <p:cNvPr id="2" name="">
             <a:extLst xmlns:a="http://schemas.openxmlformats.org/drawingml/2006/main">
               <a:ext uri="{FF2B5EF4-FFF2-40B4-BE49-F238E27FC236}">
-                <a16:creationId xmlns:a16="http://schemas.microsoft.com/office/drawing/2014/main" id="{16CF078C-F3D9-4FA9-95B9-C658FF067907}"/>
+                <a16:creationId xmlns:a16="http://schemas.microsoft.com/office/drawing/2014/main" id="{353EA831-67BB-4836-A61C-4048B90F481A}"/>
               </a:ext>
             </a:extLst>
           </p:cNvPr>
@@ -3061,7 +2966,7 @@
           <p:cNvPr id="3" name="">
             <a:extLst xmlns:a="http://schemas.openxmlformats.org/drawingml/2006/main">
               <a:ext uri="{FF2B5EF4-FFF2-40B4-BE49-F238E27FC236}">
-                <a16:creationId xmlns:a16="http://schemas.microsoft.com/office/drawing/2014/main" id="{8FA7A126-FA57-4097-B137-EE240BB01DA7}"/>
+                <a16:creationId xmlns:a16="http://schemas.microsoft.com/office/drawing/2014/main" id="{F2F2337C-9F4E-422F-80F5-3B26F5369E74}"/>
               </a:ext>
             </a:extLst>
           </p:cNvPr>
@@ -3111,7 +3016,7 @@
           <p:cNvPr id="4" name="">
             <a:extLst xmlns:a="http://schemas.openxmlformats.org/drawingml/2006/main">
               <a:ext uri="{FF2B5EF4-FFF2-40B4-BE49-F238E27FC236}">
-                <a16:creationId xmlns:a16="http://schemas.microsoft.com/office/drawing/2014/main" id="{3C4E81E1-6E16-4513-9437-A6D088F1AB81}"/>
+                <a16:creationId xmlns:a16="http://schemas.microsoft.com/office/drawing/2014/main" id="{A4AD493D-7ADC-4050-B9D8-BB37EE1DAE02}"/>
               </a:ext>
             </a:extLst>
           </p:cNvPr>
@@ -3144,7 +3049,7 @@
           <p:cNvPr id="5" name="">
             <a:extLst xmlns:a="http://schemas.openxmlformats.org/drawingml/2006/main">
               <a:ext uri="{FF2B5EF4-FFF2-40B4-BE49-F238E27FC236}">
-                <a16:creationId xmlns:a16="http://schemas.microsoft.com/office/drawing/2014/main" id="{CB093AFC-A36C-46A0-A17E-CC396E819482}"/>
+                <a16:creationId xmlns:a16="http://schemas.microsoft.com/office/drawing/2014/main" id="{58E055A2-FB79-465C-9B31-C90362654ED9}"/>
               </a:ext>
             </a:extLst>
           </p:cNvPr>
@@ -3330,7 +3235,7 @@
           <p:cNvPr id="6" name="">
             <a:extLst xmlns:a="http://schemas.openxmlformats.org/drawingml/2006/main">
               <a:ext uri="{FF2B5EF4-FFF2-40B4-BE49-F238E27FC236}">
-                <a16:creationId xmlns:a16="http://schemas.microsoft.com/office/drawing/2014/main" id="{AC2F8BC9-B4A0-4A5C-8E83-E0EAA583FAB1}"/>
+                <a16:creationId xmlns:a16="http://schemas.microsoft.com/office/drawing/2014/main" id="{948F718D-84A8-4E35-9B8B-81750D1671DC}"/>
               </a:ext>
             </a:extLst>
           </p:cNvPr>
@@ -3370,7 +3275,7 @@
                   <a:srgbClr val="6F6C76"/>
                 </a:solidFill>
               </a:rPr>
-              <a:t>文档版本 1.0</a:t>
+              <a:t>文档版本 1.3</a:t>
             </a:r>
           </a:p>
           <a:p xmlns:a="http://schemas.openxmlformats.org/drawingml/2006/main">
@@ -3387,7 +3292,7 @@
                   <a:srgbClr val="6F6C76"/>
                 </a:solidFill>
               </a:rPr>
-              <a:t>最近核对 2026-07-13</a:t>
+              <a:t>最近核对 2026-08-09</a:t>
             </a:r>
           </a:p>
           <a:p xmlns:a="http://schemas.openxmlformats.org/drawingml/2006/main">
@@ -3404,7 +3309,7 @@
                   <a:srgbClr val="6F6C76"/>
                 </a:solidFill>
               </a:rPr>
-              <a:t>commit a6c707e</a:t>
+              <a:t>commit d476f32</a:t>
             </a:r>
           </a:p>
         </p:txBody>
@@ -3412,7 +3317,7 @@
     </p:spTree>
     <p:extLst>
       <p:ext uri="{BB962C8B-B14F-4D97-AF65-F5344CB8AC3E}">
-        <p14:creationId xmlns:p14="http://schemas.microsoft.com/office/powerpoint/2010/main" val="993026406"/>
+        <p14:creationId xmlns:p14="http://schemas.microsoft.com/office/powerpoint/2010/main" val="1004913805"/>
       </p:ext>
     </p:extLst>
   </p:cSld>
@@ -3440,10 +3345,10 @@
       </p:grpSpPr>
       <p:sp>
         <p:nvSpPr>
-          <p:cNvPr id="1" name="">
-            <a:extLst xmlns:a="http://schemas.openxmlformats.org/drawingml/2006/main">
-              <a:ext uri="{FF2B5EF4-FFF2-40B4-BE49-F238E27FC236}">
-                <a16:creationId xmlns:a16="http://schemas.microsoft.com/office/drawing/2014/main" id="{690CDCAE-24DC-4F6C-9F05-8CF1AC72DD86}"/>
+          <p:cNvPr id="15" name="">
+            <a:extLst xmlns:a="http://schemas.openxmlformats.org/drawingml/2006/main">
+              <a:ext uri="{FF2B5EF4-FFF2-40B4-BE49-F238E27FC236}">
+                <a16:creationId xmlns:a16="http://schemas.microsoft.com/office/drawing/2014/main" id="{A8C879E6-F163-4650-9A81-C25599151090}"/>
               </a:ext>
             </a:extLst>
           </p:cNvPr>
@@ -3493,7 +3398,7 @@
           <p:cNvPr id="2" name="a4-title-10">
             <a:extLst xmlns:a="http://schemas.openxmlformats.org/drawingml/2006/main">
               <a:ext uri="{FF2B5EF4-FFF2-40B4-BE49-F238E27FC236}">
-                <a16:creationId xmlns:a16="http://schemas.microsoft.com/office/drawing/2014/main" id="{251B22B1-68F7-481E-999E-F23F1224DE2E}"/>
+                <a16:creationId xmlns:a16="http://schemas.microsoft.com/office/drawing/2014/main" id="{CEC33479-A97F-4596-96EF-017685C17300}"/>
               </a:ext>
             </a:extLst>
           </p:cNvPr>
@@ -3543,7 +3448,7 @@
           <p:cNvPr id="3" name="">
             <a:extLst xmlns:a="http://schemas.openxmlformats.org/drawingml/2006/main">
               <a:ext uri="{FF2B5EF4-FFF2-40B4-BE49-F238E27FC236}">
-                <a16:creationId xmlns:a16="http://schemas.microsoft.com/office/drawing/2014/main" id="{AEB684C5-2097-43E4-AD4A-1F99CEBBB433}"/>
+                <a16:creationId xmlns:a16="http://schemas.microsoft.com/office/drawing/2014/main" id="{E1C82435-7773-44EF-83F9-0DC72802DD38}"/>
               </a:ext>
             </a:extLst>
           </p:cNvPr>
@@ -3574,7 +3479,7 @@
           <p:cNvPr id="4" name="">
             <a:extLst xmlns:a="http://schemas.openxmlformats.org/drawingml/2006/main">
               <a:ext uri="{FF2B5EF4-FFF2-40B4-BE49-F238E27FC236}">
-                <a16:creationId xmlns:a16="http://schemas.microsoft.com/office/drawing/2014/main" id="{CE8B7794-6B8C-4715-AB11-085CD70FED15}"/>
+                <a16:creationId xmlns:a16="http://schemas.microsoft.com/office/drawing/2014/main" id="{1E0BAB58-4276-4783-8C09-5857E18EDD36}"/>
               </a:ext>
             </a:extLst>
           </p:cNvPr>
@@ -3624,7 +3529,7 @@
           <p:cNvPr id="5" name="">
             <a:extLst xmlns:a="http://schemas.openxmlformats.org/drawingml/2006/main">
               <a:ext uri="{FF2B5EF4-FFF2-40B4-BE49-F238E27FC236}">
-                <a16:creationId xmlns:a16="http://schemas.microsoft.com/office/drawing/2014/main" id="{77157F75-62DB-4046-A7B1-58EA50DDCFDE}"/>
+                <a16:creationId xmlns:a16="http://schemas.microsoft.com/office/drawing/2014/main" id="{770BC2BF-077B-4BB2-81CD-72F45D9C47EB}"/>
               </a:ext>
             </a:extLst>
           </p:cNvPr>
@@ -3663,7 +3568,7 @@
           <p:nvPr/>
         </p:nvPicPr>
         <p:blipFill>
-          <a:blip xmlns:r="http://schemas.openxmlformats.org/officeDocument/2006/relationships" xmlns:a="http://schemas.openxmlformats.org/drawingml/2006/main" r:embed="Rfff6ab42539a40a3"/>
+          <a:blip xmlns:r="http://schemas.openxmlformats.org/officeDocument/2006/relationships" xmlns:a="http://schemas.openxmlformats.org/drawingml/2006/main" r:embed="Rcedd4c21aee341b7"/>
           <a:stretch xmlns:a="http://schemas.openxmlformats.org/drawingml/2006/main"/>
         </p:blipFill>
         <p:spPr>
@@ -3683,7 +3588,7 @@
           <p:cNvPr id="7" name="">
             <a:extLst xmlns:a="http://schemas.openxmlformats.org/drawingml/2006/main">
               <a:ext uri="{FF2B5EF4-FFF2-40B4-BE49-F238E27FC236}">
-                <a16:creationId xmlns:a16="http://schemas.microsoft.com/office/drawing/2014/main" id="{751C622F-5168-47F0-BEF9-174AEDE36C87}"/>
+                <a16:creationId xmlns:a16="http://schemas.microsoft.com/office/drawing/2014/main" id="{0D0F7D47-B09F-476D-9193-2C0CE1A73931}"/>
               </a:ext>
             </a:extLst>
           </p:cNvPr>
@@ -3714,7 +3619,7 @@
           <p:cNvPr id="8" name="">
             <a:extLst xmlns:a="http://schemas.openxmlformats.org/drawingml/2006/main">
               <a:ext uri="{FF2B5EF4-FFF2-40B4-BE49-F238E27FC236}">
-                <a16:creationId xmlns:a16="http://schemas.microsoft.com/office/drawing/2014/main" id="{A7808057-7EB0-40E6-B160-19370FF7FED4}"/>
+                <a16:creationId xmlns:a16="http://schemas.microsoft.com/office/drawing/2014/main" id="{3D107120-6F31-4B46-99BF-D72901AE56E2}"/>
               </a:ext>
             </a:extLst>
           </p:cNvPr>
@@ -3764,7 +3669,7 @@
           <p:cNvPr id="9" name="">
             <a:extLst xmlns:a="http://schemas.openxmlformats.org/drawingml/2006/main">
               <a:ext uri="{FF2B5EF4-FFF2-40B4-BE49-F238E27FC236}">
-                <a16:creationId xmlns:a16="http://schemas.microsoft.com/office/drawing/2014/main" id="{0EF10684-D6CD-4040-A6E1-54928B57AA8F}"/>
+                <a16:creationId xmlns:a16="http://schemas.microsoft.com/office/drawing/2014/main" id="{BCFF473D-3E06-4AE8-B0AC-12D85ECCC315}"/>
               </a:ext>
             </a:extLst>
           </p:cNvPr>
@@ -3797,7 +3702,7 @@
           <p:cNvPr id="10" name="">
             <a:extLst xmlns:a="http://schemas.openxmlformats.org/drawingml/2006/main">
               <a:ext uri="{FF2B5EF4-FFF2-40B4-BE49-F238E27FC236}">
-                <a16:creationId xmlns:a16="http://schemas.microsoft.com/office/drawing/2014/main" id="{CB3F59E5-2FC6-4A6E-BC61-C936B1FC33CE}"/>
+                <a16:creationId xmlns:a16="http://schemas.microsoft.com/office/drawing/2014/main" id="{97166687-E2CF-467D-A4F7-CF2255436DD3}"/>
               </a:ext>
             </a:extLst>
           </p:cNvPr>
@@ -3847,7 +3752,7 @@
           <p:cNvPr id="11" name="">
             <a:extLst xmlns:a="http://schemas.openxmlformats.org/drawingml/2006/main">
               <a:ext uri="{FF2B5EF4-FFF2-40B4-BE49-F238E27FC236}">
-                <a16:creationId xmlns:a16="http://schemas.microsoft.com/office/drawing/2014/main" id="{7ACC3BF8-B04D-4581-8204-088EF32752B2}"/>
+                <a16:creationId xmlns:a16="http://schemas.microsoft.com/office/drawing/2014/main" id="{B4871D17-83D2-4C5F-AA07-FEB51D8A6F56}"/>
               </a:ext>
             </a:extLst>
           </p:cNvPr>
@@ -3880,7 +3785,7 @@
           <p:cNvPr id="12" name="">
             <a:extLst xmlns:a="http://schemas.openxmlformats.org/drawingml/2006/main">
               <a:ext uri="{FF2B5EF4-FFF2-40B4-BE49-F238E27FC236}">
-                <a16:creationId xmlns:a16="http://schemas.microsoft.com/office/drawing/2014/main" id="{29253353-6D0A-4779-92C2-D417156F43AE}"/>
+                <a16:creationId xmlns:a16="http://schemas.microsoft.com/office/drawing/2014/main" id="{8A878E77-E493-42DD-A25E-EC4B862A357B}"/>
               </a:ext>
             </a:extLst>
           </p:cNvPr>
@@ -3930,7 +3835,7 @@
           <p:cNvPr id="13" name="">
             <a:extLst xmlns:a="http://schemas.openxmlformats.org/drawingml/2006/main">
               <a:ext uri="{FF2B5EF4-FFF2-40B4-BE49-F238E27FC236}">
-                <a16:creationId xmlns:a16="http://schemas.microsoft.com/office/drawing/2014/main" id="{B413022A-8356-4BD6-9F5D-CDCE22F8210E}"/>
+                <a16:creationId xmlns:a16="http://schemas.microsoft.com/office/drawing/2014/main" id="{1721889E-0802-4F93-8766-D75E34C04024}"/>
               </a:ext>
             </a:extLst>
           </p:cNvPr>
@@ -3963,7 +3868,7 @@
           <p:cNvPr id="14" name="">
             <a:extLst xmlns:a="http://schemas.openxmlformats.org/drawingml/2006/main">
               <a:ext uri="{FF2B5EF4-FFF2-40B4-BE49-F238E27FC236}">
-                <a16:creationId xmlns:a16="http://schemas.microsoft.com/office/drawing/2014/main" id="{365AE45A-D71E-4FF7-9C3C-7DD3195EFFF8}"/>
+                <a16:creationId xmlns:a16="http://schemas.microsoft.com/office/drawing/2014/main" id="{B96076B1-BE8F-4F95-ADB1-6EEE8F8BEFDA}"/>
               </a:ext>
             </a:extLst>
           </p:cNvPr>
@@ -4011,7 +3916,7 @@
     </p:spTree>
     <p:extLst>
       <p:ext uri="{BB962C8B-B14F-4D97-AF65-F5344CB8AC3E}">
-        <p14:creationId xmlns:p14="http://schemas.microsoft.com/office/powerpoint/2010/main" val="2065578518"/>
+        <p14:creationId xmlns:p14="http://schemas.microsoft.com/office/powerpoint/2010/main" val="1956840922"/>
       </p:ext>
     </p:extLst>
   </p:cSld>
@@ -4039,10 +3944,10 @@
       </p:grpSpPr>
       <p:sp>
         <p:nvSpPr>
-          <p:cNvPr id="1" name="">
-            <a:extLst xmlns:a="http://schemas.openxmlformats.org/drawingml/2006/main">
-              <a:ext uri="{FF2B5EF4-FFF2-40B4-BE49-F238E27FC236}">
-                <a16:creationId xmlns:a16="http://schemas.microsoft.com/office/drawing/2014/main" id="{5D509C6E-75E1-4580-A4AD-FDE2CEFD0162}"/>
+          <p:cNvPr id="15" name="">
+            <a:extLst xmlns:a="http://schemas.openxmlformats.org/drawingml/2006/main">
+              <a:ext uri="{FF2B5EF4-FFF2-40B4-BE49-F238E27FC236}">
+                <a16:creationId xmlns:a16="http://schemas.microsoft.com/office/drawing/2014/main" id="{16007D4C-92F6-4F27-AAB1-E01D5878445E}"/>
               </a:ext>
             </a:extLst>
           </p:cNvPr>
@@ -4092,7 +3997,7 @@
           <p:cNvPr id="2" name="a4-title-11">
             <a:extLst xmlns:a="http://schemas.openxmlformats.org/drawingml/2006/main">
               <a:ext uri="{FF2B5EF4-FFF2-40B4-BE49-F238E27FC236}">
-                <a16:creationId xmlns:a16="http://schemas.microsoft.com/office/drawing/2014/main" id="{E0FA18FC-029F-42B2-9479-8BB2599E690F}"/>
+                <a16:creationId xmlns:a16="http://schemas.microsoft.com/office/drawing/2014/main" id="{25F08997-7496-4ED9-808D-6F29C61C69BA}"/>
               </a:ext>
             </a:extLst>
           </p:cNvPr>
@@ -4142,7 +4047,7 @@
           <p:cNvPr id="3" name="">
             <a:extLst xmlns:a="http://schemas.openxmlformats.org/drawingml/2006/main">
               <a:ext uri="{FF2B5EF4-FFF2-40B4-BE49-F238E27FC236}">
-                <a16:creationId xmlns:a16="http://schemas.microsoft.com/office/drawing/2014/main" id="{5FFAD093-A13F-4DC9-9A28-63C842D1271D}"/>
+                <a16:creationId xmlns:a16="http://schemas.microsoft.com/office/drawing/2014/main" id="{CF9EEC7E-D8A8-43E4-9A27-3C629E6AA124}"/>
               </a:ext>
             </a:extLst>
           </p:cNvPr>
@@ -4173,7 +4078,7 @@
           <p:cNvPr id="4" name="">
             <a:extLst xmlns:a="http://schemas.openxmlformats.org/drawingml/2006/main">
               <a:ext uri="{FF2B5EF4-FFF2-40B4-BE49-F238E27FC236}">
-                <a16:creationId xmlns:a16="http://schemas.microsoft.com/office/drawing/2014/main" id="{F1E98D93-DE86-4E93-8AFD-FA37766794CD}"/>
+                <a16:creationId xmlns:a16="http://schemas.microsoft.com/office/drawing/2014/main" id="{4775B7CD-0749-46F9-B520-93ABAD152A9D}"/>
               </a:ext>
             </a:extLst>
           </p:cNvPr>
@@ -4223,7 +4128,7 @@
           <p:cNvPr id="5" name="">
             <a:extLst xmlns:a="http://schemas.openxmlformats.org/drawingml/2006/main">
               <a:ext uri="{FF2B5EF4-FFF2-40B4-BE49-F238E27FC236}">
-                <a16:creationId xmlns:a16="http://schemas.microsoft.com/office/drawing/2014/main" id="{9688CF36-CDAB-4FB5-B7E4-C665B683A5C5}"/>
+                <a16:creationId xmlns:a16="http://schemas.microsoft.com/office/drawing/2014/main" id="{0573FD84-34E0-4F8D-9D7B-F63BAAFEEA4E}"/>
               </a:ext>
             </a:extLst>
           </p:cNvPr>
@@ -4254,7 +4159,7 @@
           <p:cNvPr id="6" name="">
             <a:extLst xmlns:a="http://schemas.openxmlformats.org/drawingml/2006/main">
               <a:ext uri="{FF2B5EF4-FFF2-40B4-BE49-F238E27FC236}">
-                <a16:creationId xmlns:a16="http://schemas.microsoft.com/office/drawing/2014/main" id="{BA27C437-6775-4742-AD20-ADF02E122EDD}"/>
+                <a16:creationId xmlns:a16="http://schemas.microsoft.com/office/drawing/2014/main" id="{1B7BEBE0-DC50-4A3B-80C9-3C088D3D626F}"/>
               </a:ext>
             </a:extLst>
           </p:cNvPr>
@@ -4304,7 +4209,7 @@
           <p:cNvPr id="7" name="">
             <a:extLst xmlns:a="http://schemas.openxmlformats.org/drawingml/2006/main">
               <a:ext uri="{FF2B5EF4-FFF2-40B4-BE49-F238E27FC236}">
-                <a16:creationId xmlns:a16="http://schemas.microsoft.com/office/drawing/2014/main" id="{BE298B9D-2CCF-4EDF-929A-FE6E561FAE5A}"/>
+                <a16:creationId xmlns:a16="http://schemas.microsoft.com/office/drawing/2014/main" id="{2A9C8B16-7193-44F6-A774-F9D85D136340}"/>
               </a:ext>
             </a:extLst>
           </p:cNvPr>
@@ -4354,7 +4259,7 @@
           <p:cNvPr id="8" name="">
             <a:extLst xmlns:a="http://schemas.openxmlformats.org/drawingml/2006/main">
               <a:ext uri="{FF2B5EF4-FFF2-40B4-BE49-F238E27FC236}">
-                <a16:creationId xmlns:a16="http://schemas.microsoft.com/office/drawing/2014/main" id="{B455DFA9-7AD8-44BB-83F3-EDBE7302CBF6}"/>
+                <a16:creationId xmlns:a16="http://schemas.microsoft.com/office/drawing/2014/main" id="{60439F77-199D-4AD0-AA0F-0FDFA5EE9E46}"/>
               </a:ext>
             </a:extLst>
           </p:cNvPr>
@@ -4404,7 +4309,7 @@
           <p:cNvPr id="9" name="">
             <a:extLst xmlns:a="http://schemas.openxmlformats.org/drawingml/2006/main">
               <a:ext uri="{FF2B5EF4-FFF2-40B4-BE49-F238E27FC236}">
-                <a16:creationId xmlns:a16="http://schemas.microsoft.com/office/drawing/2014/main" id="{0BF4875D-1CB7-4507-9C20-1C2F30F96666}"/>
+                <a16:creationId xmlns:a16="http://schemas.microsoft.com/office/drawing/2014/main" id="{5B9A806B-5D5F-46D6-AE35-F6A6DB4DCD88}"/>
               </a:ext>
             </a:extLst>
           </p:cNvPr>
@@ -4454,7 +4359,7 @@
           <p:cNvPr id="10" name="">
             <a:extLst xmlns:a="http://schemas.openxmlformats.org/drawingml/2006/main">
               <a:ext uri="{FF2B5EF4-FFF2-40B4-BE49-F238E27FC236}">
-                <a16:creationId xmlns:a16="http://schemas.microsoft.com/office/drawing/2014/main" id="{36D258CE-044B-4821-8AAB-A0ED08BD66C4}"/>
+                <a16:creationId xmlns:a16="http://schemas.microsoft.com/office/drawing/2014/main" id="{CC97230A-DD89-4C62-93BF-69BC2D9C71F0}"/>
               </a:ext>
             </a:extLst>
           </p:cNvPr>
@@ -4494,7 +4399,7 @@
                   <a:srgbClr val="25242B"/>
                 </a:solidFill>
               </a:rPr>
-              <a:t>active、low-frequency、paused、archived。归档项目不进入 Today Continue。</a:t>
+              <a:t>Idea、Active、Paused、Completed、Abandoned；Archive 与 Permanent Deletion 分离，旧值迁移需要显式选择。</a:t>
             </a:r>
           </a:p>
         </p:txBody>
@@ -4504,7 +4409,7 @@
           <p:cNvPr id="11" name="">
             <a:extLst xmlns:a="http://schemas.openxmlformats.org/drawingml/2006/main">
               <a:ext uri="{FF2B5EF4-FFF2-40B4-BE49-F238E27FC236}">
-                <a16:creationId xmlns:a16="http://schemas.microsoft.com/office/drawing/2014/main" id="{80C58BCE-651B-47EB-996A-F50EB8F0949C}"/>
+                <a16:creationId xmlns:a16="http://schemas.microsoft.com/office/drawing/2014/main" id="{E48416B0-F6FC-463C-81FF-E6113E471638}"/>
               </a:ext>
             </a:extLst>
           </p:cNvPr>
@@ -4554,7 +4459,7 @@
           <p:cNvPr id="12" name="">
             <a:extLst xmlns:a="http://schemas.openxmlformats.org/drawingml/2006/main">
               <a:ext uri="{FF2B5EF4-FFF2-40B4-BE49-F238E27FC236}">
-                <a16:creationId xmlns:a16="http://schemas.microsoft.com/office/drawing/2014/main" id="{AD394D40-45F6-4700-938E-EC74103BB19B}"/>
+                <a16:creationId xmlns:a16="http://schemas.microsoft.com/office/drawing/2014/main" id="{3BCBB086-E462-4FD9-8AD9-27F8C7F3602F}"/>
               </a:ext>
             </a:extLst>
           </p:cNvPr>
@@ -4604,7 +4509,7 @@
           <p:cNvPr id="13" name="">
             <a:extLst xmlns:a="http://schemas.openxmlformats.org/drawingml/2006/main">
               <a:ext uri="{FF2B5EF4-FFF2-40B4-BE49-F238E27FC236}">
-                <a16:creationId xmlns:a16="http://schemas.microsoft.com/office/drawing/2014/main" id="{5E16ED2D-0043-44A1-ABA4-636D56449BAC}"/>
+                <a16:creationId xmlns:a16="http://schemas.microsoft.com/office/drawing/2014/main" id="{A316B5B7-AAAA-4424-8BFA-D5073C4B38A1}"/>
               </a:ext>
             </a:extLst>
           </p:cNvPr>
@@ -4654,7 +4559,7 @@
           <p:cNvPr id="14" name="">
             <a:extLst xmlns:a="http://schemas.openxmlformats.org/drawingml/2006/main">
               <a:ext uri="{FF2B5EF4-FFF2-40B4-BE49-F238E27FC236}">
-                <a16:creationId xmlns:a16="http://schemas.microsoft.com/office/drawing/2014/main" id="{A532F0DF-C3DE-43C4-803C-FF637C5354DB}"/>
+                <a16:creationId xmlns:a16="http://schemas.microsoft.com/office/drawing/2014/main" id="{A09E4818-48FF-416D-8F30-5C5785279A1A}"/>
               </a:ext>
             </a:extLst>
           </p:cNvPr>
@@ -4702,7 +4607,7 @@
     </p:spTree>
     <p:extLst>
       <p:ext uri="{BB962C8B-B14F-4D97-AF65-F5344CB8AC3E}">
-        <p14:creationId xmlns:p14="http://schemas.microsoft.com/office/powerpoint/2010/main" val="1867638562"/>
+        <p14:creationId xmlns:p14="http://schemas.microsoft.com/office/powerpoint/2010/main" val="1590154910"/>
       </p:ext>
     </p:extLst>
   </p:cSld>
@@ -4730,10 +4635,10 @@
       </p:grpSpPr>
       <p:sp>
         <p:nvSpPr>
-          <p:cNvPr id="1" name="">
-            <a:extLst xmlns:a="http://schemas.openxmlformats.org/drawingml/2006/main">
-              <a:ext uri="{FF2B5EF4-FFF2-40B4-BE49-F238E27FC236}">
-                <a16:creationId xmlns:a16="http://schemas.microsoft.com/office/drawing/2014/main" id="{9793FF38-42E6-4C72-909C-0900B4EFC1FB}"/>
+          <p:cNvPr id="15" name="">
+            <a:extLst xmlns:a="http://schemas.openxmlformats.org/drawingml/2006/main">
+              <a:ext uri="{FF2B5EF4-FFF2-40B4-BE49-F238E27FC236}">
+                <a16:creationId xmlns:a16="http://schemas.microsoft.com/office/drawing/2014/main" id="{9F321B05-782C-413B-99F3-D92D334828BC}"/>
               </a:ext>
             </a:extLst>
           </p:cNvPr>
@@ -4783,7 +4688,7 @@
           <p:cNvPr id="2" name="a4-title-12">
             <a:extLst xmlns:a="http://schemas.openxmlformats.org/drawingml/2006/main">
               <a:ext uri="{FF2B5EF4-FFF2-40B4-BE49-F238E27FC236}">
-                <a16:creationId xmlns:a16="http://schemas.microsoft.com/office/drawing/2014/main" id="{C73CFE7A-9715-4927-92A5-48FB7EF9339F}"/>
+                <a16:creationId xmlns:a16="http://schemas.microsoft.com/office/drawing/2014/main" id="{C6F67C3A-0451-4F1B-B92D-FD334A638650}"/>
               </a:ext>
             </a:extLst>
           </p:cNvPr>
@@ -4833,7 +4738,7 @@
           <p:cNvPr id="3" name="">
             <a:extLst xmlns:a="http://schemas.openxmlformats.org/drawingml/2006/main">
               <a:ext uri="{FF2B5EF4-FFF2-40B4-BE49-F238E27FC236}">
-                <a16:creationId xmlns:a16="http://schemas.microsoft.com/office/drawing/2014/main" id="{FBA4A807-5CAD-4384-89B7-40CD8371EC86}"/>
+                <a16:creationId xmlns:a16="http://schemas.microsoft.com/office/drawing/2014/main" id="{CFE2E3DA-0C14-4925-83AA-A86312EAD689}"/>
               </a:ext>
             </a:extLst>
           </p:cNvPr>
@@ -4864,7 +4769,7 @@
           <p:cNvPr id="4" name="">
             <a:extLst xmlns:a="http://schemas.openxmlformats.org/drawingml/2006/main">
               <a:ext uri="{FF2B5EF4-FFF2-40B4-BE49-F238E27FC236}">
-                <a16:creationId xmlns:a16="http://schemas.microsoft.com/office/drawing/2014/main" id="{CF98F978-C123-4879-92ED-6E7EF24FF5E8}"/>
+                <a16:creationId xmlns:a16="http://schemas.microsoft.com/office/drawing/2014/main" id="{13C29EE1-7F09-43C5-B3A1-5F2FFEDC4B80}"/>
               </a:ext>
             </a:extLst>
           </p:cNvPr>
@@ -4914,7 +4819,7 @@
           <p:cNvPr id="5" name="">
             <a:extLst xmlns:a="http://schemas.openxmlformats.org/drawingml/2006/main">
               <a:ext uri="{FF2B5EF4-FFF2-40B4-BE49-F238E27FC236}">
-                <a16:creationId xmlns:a16="http://schemas.microsoft.com/office/drawing/2014/main" id="{9E1DE161-8F46-4214-85E7-CD04492E4FEF}"/>
+                <a16:creationId xmlns:a16="http://schemas.microsoft.com/office/drawing/2014/main" id="{E092E4FD-08D6-43E9-91E6-DC9BF38A3321}"/>
               </a:ext>
             </a:extLst>
           </p:cNvPr>
@@ -4953,7 +4858,7 @@
           <p:nvPr/>
         </p:nvPicPr>
         <p:blipFill>
-          <a:blip xmlns:r="http://schemas.openxmlformats.org/officeDocument/2006/relationships" xmlns:a="http://schemas.openxmlformats.org/drawingml/2006/main" r:embed="R48bc4f09758e4467"/>
+          <a:blip xmlns:r="http://schemas.openxmlformats.org/officeDocument/2006/relationships" xmlns:a="http://schemas.openxmlformats.org/drawingml/2006/main" r:embed="R788fa37c96764674"/>
           <a:stretch xmlns:a="http://schemas.openxmlformats.org/drawingml/2006/main"/>
         </p:blipFill>
         <p:spPr>
@@ -4973,7 +4878,7 @@
           <p:cNvPr id="7" name="">
             <a:extLst xmlns:a="http://schemas.openxmlformats.org/drawingml/2006/main">
               <a:ext uri="{FF2B5EF4-FFF2-40B4-BE49-F238E27FC236}">
-                <a16:creationId xmlns:a16="http://schemas.microsoft.com/office/drawing/2014/main" id="{327D95CA-98AC-471C-85E1-FDBFF906DAEA}"/>
+                <a16:creationId xmlns:a16="http://schemas.microsoft.com/office/drawing/2014/main" id="{E4FC8AB6-A55D-443D-9A23-4065BE1D26CD}"/>
               </a:ext>
             </a:extLst>
           </p:cNvPr>
@@ -5004,7 +4909,7 @@
           <p:cNvPr id="8" name="">
             <a:extLst xmlns:a="http://schemas.openxmlformats.org/drawingml/2006/main">
               <a:ext uri="{FF2B5EF4-FFF2-40B4-BE49-F238E27FC236}">
-                <a16:creationId xmlns:a16="http://schemas.microsoft.com/office/drawing/2014/main" id="{C9AC5DE5-F963-419B-8C20-C8455539165E}"/>
+                <a16:creationId xmlns:a16="http://schemas.microsoft.com/office/drawing/2014/main" id="{C55FDD7A-D2E9-4354-BE13-83C05D3822F3}"/>
               </a:ext>
             </a:extLst>
           </p:cNvPr>
@@ -5054,7 +4959,7 @@
           <p:cNvPr id="9" name="">
             <a:extLst xmlns:a="http://schemas.openxmlformats.org/drawingml/2006/main">
               <a:ext uri="{FF2B5EF4-FFF2-40B4-BE49-F238E27FC236}">
-                <a16:creationId xmlns:a16="http://schemas.microsoft.com/office/drawing/2014/main" id="{B09B4D92-AB42-42E9-935B-E36083779377}"/>
+                <a16:creationId xmlns:a16="http://schemas.microsoft.com/office/drawing/2014/main" id="{EA9352A5-33F4-48BA-A6F5-19DF449FDCF2}"/>
               </a:ext>
             </a:extLst>
           </p:cNvPr>
@@ -5087,7 +4992,7 @@
           <p:cNvPr id="10" name="">
             <a:extLst xmlns:a="http://schemas.openxmlformats.org/drawingml/2006/main">
               <a:ext uri="{FF2B5EF4-FFF2-40B4-BE49-F238E27FC236}">
-                <a16:creationId xmlns:a16="http://schemas.microsoft.com/office/drawing/2014/main" id="{152448CA-F82F-4AE5-8615-5BBBF7B0D192}"/>
+                <a16:creationId xmlns:a16="http://schemas.microsoft.com/office/drawing/2014/main" id="{B07B3ADE-4AC1-405F-8A8F-FA21942B7FD0}"/>
               </a:ext>
             </a:extLst>
           </p:cNvPr>
@@ -5137,7 +5042,7 @@
           <p:cNvPr id="11" name="">
             <a:extLst xmlns:a="http://schemas.openxmlformats.org/drawingml/2006/main">
               <a:ext uri="{FF2B5EF4-FFF2-40B4-BE49-F238E27FC236}">
-                <a16:creationId xmlns:a16="http://schemas.microsoft.com/office/drawing/2014/main" id="{2969B74A-6AE6-4A7E-A819-0657B1FC3EA3}"/>
+                <a16:creationId xmlns:a16="http://schemas.microsoft.com/office/drawing/2014/main" id="{8AA8EF34-27BC-4B3C-A5BA-09AF3067D6BF}"/>
               </a:ext>
             </a:extLst>
           </p:cNvPr>
@@ -5170,7 +5075,7 @@
           <p:cNvPr id="12" name="">
             <a:extLst xmlns:a="http://schemas.openxmlformats.org/drawingml/2006/main">
               <a:ext uri="{FF2B5EF4-FFF2-40B4-BE49-F238E27FC236}">
-                <a16:creationId xmlns:a16="http://schemas.microsoft.com/office/drawing/2014/main" id="{CCA3909F-CCF2-48B7-B5BB-DEF96F0A2949}"/>
+                <a16:creationId xmlns:a16="http://schemas.microsoft.com/office/drawing/2014/main" id="{9478AADA-C8B0-4F55-8A0C-04E6C33F0D80}"/>
               </a:ext>
             </a:extLst>
           </p:cNvPr>
@@ -5220,7 +5125,7 @@
           <p:cNvPr id="13" name="">
             <a:extLst xmlns:a="http://schemas.openxmlformats.org/drawingml/2006/main">
               <a:ext uri="{FF2B5EF4-FFF2-40B4-BE49-F238E27FC236}">
-                <a16:creationId xmlns:a16="http://schemas.microsoft.com/office/drawing/2014/main" id="{93387CDA-0051-4183-8AF9-D30A11308DD0}"/>
+                <a16:creationId xmlns:a16="http://schemas.microsoft.com/office/drawing/2014/main" id="{E6C033AA-550E-4B65-BFE4-EB36F762E7C4}"/>
               </a:ext>
             </a:extLst>
           </p:cNvPr>
@@ -5253,7 +5158,7 @@
           <p:cNvPr id="14" name="">
             <a:extLst xmlns:a="http://schemas.openxmlformats.org/drawingml/2006/main">
               <a:ext uri="{FF2B5EF4-FFF2-40B4-BE49-F238E27FC236}">
-                <a16:creationId xmlns:a16="http://schemas.microsoft.com/office/drawing/2014/main" id="{36F4C70B-AE42-4654-9FD0-47DB2EBEE857}"/>
+                <a16:creationId xmlns:a16="http://schemas.microsoft.com/office/drawing/2014/main" id="{3DF84EBA-E0A9-43E8-9D84-4FCD58374880}"/>
               </a:ext>
             </a:extLst>
           </p:cNvPr>
@@ -5301,7 +5206,7 @@
     </p:spTree>
     <p:extLst>
       <p:ext uri="{BB962C8B-B14F-4D97-AF65-F5344CB8AC3E}">
-        <p14:creationId xmlns:p14="http://schemas.microsoft.com/office/powerpoint/2010/main" val="1876108534"/>
+        <p14:creationId xmlns:p14="http://schemas.microsoft.com/office/powerpoint/2010/main" val="847326513"/>
       </p:ext>
     </p:extLst>
   </p:cSld>
@@ -5329,10 +5234,10 @@
       </p:grpSpPr>
       <p:sp>
         <p:nvSpPr>
-          <p:cNvPr id="1" name="">
-            <a:extLst xmlns:a="http://schemas.openxmlformats.org/drawingml/2006/main">
-              <a:ext uri="{FF2B5EF4-FFF2-40B4-BE49-F238E27FC236}">
-                <a16:creationId xmlns:a16="http://schemas.microsoft.com/office/drawing/2014/main" id="{C456C3AD-823C-494D-A50C-7F6A831FDAF2}"/>
+          <p:cNvPr id="15" name="">
+            <a:extLst xmlns:a="http://schemas.openxmlformats.org/drawingml/2006/main">
+              <a:ext uri="{FF2B5EF4-FFF2-40B4-BE49-F238E27FC236}">
+                <a16:creationId xmlns:a16="http://schemas.microsoft.com/office/drawing/2014/main" id="{E8DED11E-14C0-4265-86D8-095A1D1C622A}"/>
               </a:ext>
             </a:extLst>
           </p:cNvPr>
@@ -5382,7 +5287,7 @@
           <p:cNvPr id="2" name="a4-title-13">
             <a:extLst xmlns:a="http://schemas.openxmlformats.org/drawingml/2006/main">
               <a:ext uri="{FF2B5EF4-FFF2-40B4-BE49-F238E27FC236}">
-                <a16:creationId xmlns:a16="http://schemas.microsoft.com/office/drawing/2014/main" id="{AE811E07-CB6E-400A-8A87-29ADA94AFE24}"/>
+                <a16:creationId xmlns:a16="http://schemas.microsoft.com/office/drawing/2014/main" id="{F2A5B816-0029-4E8B-955F-F8E3E9D0BC5A}"/>
               </a:ext>
             </a:extLst>
           </p:cNvPr>
@@ -5432,7 +5337,7 @@
           <p:cNvPr id="3" name="">
             <a:extLst xmlns:a="http://schemas.openxmlformats.org/drawingml/2006/main">
               <a:ext uri="{FF2B5EF4-FFF2-40B4-BE49-F238E27FC236}">
-                <a16:creationId xmlns:a16="http://schemas.microsoft.com/office/drawing/2014/main" id="{399A7844-5863-45E2-ABAE-1EAF8BE485A3}"/>
+                <a16:creationId xmlns:a16="http://schemas.microsoft.com/office/drawing/2014/main" id="{FB406D56-7E87-4249-BBE2-3BEBDD573B14}"/>
               </a:ext>
             </a:extLst>
           </p:cNvPr>
@@ -5463,7 +5368,7 @@
           <p:cNvPr id="4" name="">
             <a:extLst xmlns:a="http://schemas.openxmlformats.org/drawingml/2006/main">
               <a:ext uri="{FF2B5EF4-FFF2-40B4-BE49-F238E27FC236}">
-                <a16:creationId xmlns:a16="http://schemas.microsoft.com/office/drawing/2014/main" id="{04A081AD-7CF4-4546-B31F-CFD3B434E336}"/>
+                <a16:creationId xmlns:a16="http://schemas.microsoft.com/office/drawing/2014/main" id="{69DEF3AD-1A78-4F16-BE5D-BC3BE4780B5D}"/>
               </a:ext>
             </a:extLst>
           </p:cNvPr>
@@ -5513,7 +5418,7 @@
           <p:cNvPr id="5" name="">
             <a:extLst xmlns:a="http://schemas.openxmlformats.org/drawingml/2006/main">
               <a:ext uri="{FF2B5EF4-FFF2-40B4-BE49-F238E27FC236}">
-                <a16:creationId xmlns:a16="http://schemas.microsoft.com/office/drawing/2014/main" id="{0827119F-DCDB-4F4E-BF36-5C567C7C779A}"/>
+                <a16:creationId xmlns:a16="http://schemas.microsoft.com/office/drawing/2014/main" id="{EB9B239B-7FDB-4A42-A6D0-9027945E1865}"/>
               </a:ext>
             </a:extLst>
           </p:cNvPr>
@@ -5552,7 +5457,7 @@
           <p:nvPr/>
         </p:nvPicPr>
         <p:blipFill>
-          <a:blip xmlns:r="http://schemas.openxmlformats.org/officeDocument/2006/relationships" xmlns:a="http://schemas.openxmlformats.org/drawingml/2006/main" r:embed="Rc76642c9e9564558"/>
+          <a:blip xmlns:r="http://schemas.openxmlformats.org/officeDocument/2006/relationships" xmlns:a="http://schemas.openxmlformats.org/drawingml/2006/main" r:embed="R2769a0fd09dc4918"/>
           <a:stretch xmlns:a="http://schemas.openxmlformats.org/drawingml/2006/main"/>
         </p:blipFill>
         <p:spPr>
@@ -5572,7 +5477,7 @@
           <p:cNvPr id="7" name="">
             <a:extLst xmlns:a="http://schemas.openxmlformats.org/drawingml/2006/main">
               <a:ext uri="{FF2B5EF4-FFF2-40B4-BE49-F238E27FC236}">
-                <a16:creationId xmlns:a16="http://schemas.microsoft.com/office/drawing/2014/main" id="{1EEC9ACA-9140-4D49-A198-96AECC3E8E7C}"/>
+                <a16:creationId xmlns:a16="http://schemas.microsoft.com/office/drawing/2014/main" id="{73D2B68B-784D-48AA-9834-57FABA77771E}"/>
               </a:ext>
             </a:extLst>
           </p:cNvPr>
@@ -5603,7 +5508,7 @@
           <p:cNvPr id="8" name="">
             <a:extLst xmlns:a="http://schemas.openxmlformats.org/drawingml/2006/main">
               <a:ext uri="{FF2B5EF4-FFF2-40B4-BE49-F238E27FC236}">
-                <a16:creationId xmlns:a16="http://schemas.microsoft.com/office/drawing/2014/main" id="{FF4CBE99-A8C6-4E95-8FDD-07F720CA213E}"/>
+                <a16:creationId xmlns:a16="http://schemas.microsoft.com/office/drawing/2014/main" id="{FAA11FB6-960D-49FE-9F2E-B85B84134384}"/>
               </a:ext>
             </a:extLst>
           </p:cNvPr>
@@ -5653,7 +5558,7 @@
           <p:cNvPr id="9" name="">
             <a:extLst xmlns:a="http://schemas.openxmlformats.org/drawingml/2006/main">
               <a:ext uri="{FF2B5EF4-FFF2-40B4-BE49-F238E27FC236}">
-                <a16:creationId xmlns:a16="http://schemas.microsoft.com/office/drawing/2014/main" id="{5851E7C1-D34F-4AF2-83BE-D158113A335F}"/>
+                <a16:creationId xmlns:a16="http://schemas.microsoft.com/office/drawing/2014/main" id="{51DB7496-6CCC-4C4D-B705-75F92DF2D769}"/>
               </a:ext>
             </a:extLst>
           </p:cNvPr>
@@ -5686,7 +5591,7 @@
           <p:cNvPr id="10" name="">
             <a:extLst xmlns:a="http://schemas.openxmlformats.org/drawingml/2006/main">
               <a:ext uri="{FF2B5EF4-FFF2-40B4-BE49-F238E27FC236}">
-                <a16:creationId xmlns:a16="http://schemas.microsoft.com/office/drawing/2014/main" id="{0047E40B-91D9-4DC6-91AB-296449BA40C0}"/>
+                <a16:creationId xmlns:a16="http://schemas.microsoft.com/office/drawing/2014/main" id="{D64B3060-3903-4CAE-BEA0-04C3ECC1087A}"/>
               </a:ext>
             </a:extLst>
           </p:cNvPr>
@@ -5736,7 +5641,7 @@
           <p:cNvPr id="11" name="">
             <a:extLst xmlns:a="http://schemas.openxmlformats.org/drawingml/2006/main">
               <a:ext uri="{FF2B5EF4-FFF2-40B4-BE49-F238E27FC236}">
-                <a16:creationId xmlns:a16="http://schemas.microsoft.com/office/drawing/2014/main" id="{DB51E2D8-3911-4AE1-BBDD-DF902AA5A3F1}"/>
+                <a16:creationId xmlns:a16="http://schemas.microsoft.com/office/drawing/2014/main" id="{1CA30E2F-B230-4F45-BD88-4699887A5F1B}"/>
               </a:ext>
             </a:extLst>
           </p:cNvPr>
@@ -5769,7 +5674,7 @@
           <p:cNvPr id="12" name="">
             <a:extLst xmlns:a="http://schemas.openxmlformats.org/drawingml/2006/main">
               <a:ext uri="{FF2B5EF4-FFF2-40B4-BE49-F238E27FC236}">
-                <a16:creationId xmlns:a16="http://schemas.microsoft.com/office/drawing/2014/main" id="{CA296453-C168-4A30-947F-7B659E5FA8A1}"/>
+                <a16:creationId xmlns:a16="http://schemas.microsoft.com/office/drawing/2014/main" id="{1422FB2C-EE5E-469D-A310-F2874E6C9B87}"/>
               </a:ext>
             </a:extLst>
           </p:cNvPr>
@@ -5819,7 +5724,7 @@
           <p:cNvPr id="13" name="">
             <a:extLst xmlns:a="http://schemas.openxmlformats.org/drawingml/2006/main">
               <a:ext uri="{FF2B5EF4-FFF2-40B4-BE49-F238E27FC236}">
-                <a16:creationId xmlns:a16="http://schemas.microsoft.com/office/drawing/2014/main" id="{D147A194-0897-4D25-9045-738CBE4602A7}"/>
+                <a16:creationId xmlns:a16="http://schemas.microsoft.com/office/drawing/2014/main" id="{8D845A8F-1A04-411A-8D30-B3C12E4A3972}"/>
               </a:ext>
             </a:extLst>
           </p:cNvPr>
@@ -5852,7 +5757,7 @@
           <p:cNvPr id="14" name="">
             <a:extLst xmlns:a="http://schemas.openxmlformats.org/drawingml/2006/main">
               <a:ext uri="{FF2B5EF4-FFF2-40B4-BE49-F238E27FC236}">
-                <a16:creationId xmlns:a16="http://schemas.microsoft.com/office/drawing/2014/main" id="{C25A5323-361D-4AC6-9972-912388DF26E4}"/>
+                <a16:creationId xmlns:a16="http://schemas.microsoft.com/office/drawing/2014/main" id="{95E8F3C8-C95D-49BA-8B61-917662BC9E40}"/>
               </a:ext>
             </a:extLst>
           </p:cNvPr>
@@ -5900,7 +5805,7 @@
     </p:spTree>
     <p:extLst>
       <p:ext uri="{BB962C8B-B14F-4D97-AF65-F5344CB8AC3E}">
-        <p14:creationId xmlns:p14="http://schemas.microsoft.com/office/powerpoint/2010/main" val="167320082"/>
+        <p14:creationId xmlns:p14="http://schemas.microsoft.com/office/powerpoint/2010/main" val="1222186568"/>
       </p:ext>
     </p:extLst>
   </p:cSld>
@@ -5928,10 +5833,10 @@
       </p:grpSpPr>
       <p:sp>
         <p:nvSpPr>
-          <p:cNvPr id="1" name="">
-            <a:extLst xmlns:a="http://schemas.openxmlformats.org/drawingml/2006/main">
-              <a:ext uri="{FF2B5EF4-FFF2-40B4-BE49-F238E27FC236}">
-                <a16:creationId xmlns:a16="http://schemas.microsoft.com/office/drawing/2014/main" id="{F6C2A9A4-1D54-4E50-9205-B6758866C3BE}"/>
+          <p:cNvPr id="15" name="">
+            <a:extLst xmlns:a="http://schemas.openxmlformats.org/drawingml/2006/main">
+              <a:ext uri="{FF2B5EF4-FFF2-40B4-BE49-F238E27FC236}">
+                <a16:creationId xmlns:a16="http://schemas.microsoft.com/office/drawing/2014/main" id="{39E11424-EC89-4CC5-BFAE-9580068C5075}"/>
               </a:ext>
             </a:extLst>
           </p:cNvPr>
@@ -5981,7 +5886,7 @@
           <p:cNvPr id="2" name="a4-title-14">
             <a:extLst xmlns:a="http://schemas.openxmlformats.org/drawingml/2006/main">
               <a:ext uri="{FF2B5EF4-FFF2-40B4-BE49-F238E27FC236}">
-                <a16:creationId xmlns:a16="http://schemas.microsoft.com/office/drawing/2014/main" id="{2E952D9A-2911-4EAD-B100-22B9FABDEC03}"/>
+                <a16:creationId xmlns:a16="http://schemas.microsoft.com/office/drawing/2014/main" id="{F1EDB8DA-1F04-4F3A-BCD4-CE5DCAFF36B5}"/>
               </a:ext>
             </a:extLst>
           </p:cNvPr>
@@ -6031,7 +5936,7 @@
           <p:cNvPr id="3" name="">
             <a:extLst xmlns:a="http://schemas.openxmlformats.org/drawingml/2006/main">
               <a:ext uri="{FF2B5EF4-FFF2-40B4-BE49-F238E27FC236}">
-                <a16:creationId xmlns:a16="http://schemas.microsoft.com/office/drawing/2014/main" id="{BBA6E05D-7C3F-433A-B835-02A6DD4B8D09}"/>
+                <a16:creationId xmlns:a16="http://schemas.microsoft.com/office/drawing/2014/main" id="{8FA41655-F448-4153-B0DD-2B18F29ECF31}"/>
               </a:ext>
             </a:extLst>
           </p:cNvPr>
@@ -6062,7 +5967,7 @@
           <p:cNvPr id="4" name="">
             <a:extLst xmlns:a="http://schemas.openxmlformats.org/drawingml/2006/main">
               <a:ext uri="{FF2B5EF4-FFF2-40B4-BE49-F238E27FC236}">
-                <a16:creationId xmlns:a16="http://schemas.microsoft.com/office/drawing/2014/main" id="{DC5D418A-6954-44CE-8119-3FC4A0CAAD4C}"/>
+                <a16:creationId xmlns:a16="http://schemas.microsoft.com/office/drawing/2014/main" id="{DBCE5975-8EAC-4543-89BB-B3A4C22583F9}"/>
               </a:ext>
             </a:extLst>
           </p:cNvPr>
@@ -6112,7 +6017,7 @@
           <p:cNvPr id="5" name="">
             <a:extLst xmlns:a="http://schemas.openxmlformats.org/drawingml/2006/main">
               <a:ext uri="{FF2B5EF4-FFF2-40B4-BE49-F238E27FC236}">
-                <a16:creationId xmlns:a16="http://schemas.microsoft.com/office/drawing/2014/main" id="{D0195A44-CA71-48F1-B36E-E869AD9C163A}"/>
+                <a16:creationId xmlns:a16="http://schemas.microsoft.com/office/drawing/2014/main" id="{79002B67-E308-4103-9D94-CBB38AACB3C4}"/>
               </a:ext>
             </a:extLst>
           </p:cNvPr>
@@ -6151,7 +6056,7 @@
           <p:nvPr/>
         </p:nvPicPr>
         <p:blipFill>
-          <a:blip xmlns:r="http://schemas.openxmlformats.org/officeDocument/2006/relationships" xmlns:a="http://schemas.openxmlformats.org/drawingml/2006/main" r:embed="Re4ebbb41b056491f"/>
+          <a:blip xmlns:r="http://schemas.openxmlformats.org/officeDocument/2006/relationships" xmlns:a="http://schemas.openxmlformats.org/drawingml/2006/main" r:embed="Rf7dc7cf4ef984596"/>
           <a:stretch xmlns:a="http://schemas.openxmlformats.org/drawingml/2006/main"/>
         </p:blipFill>
         <p:spPr>
@@ -6171,7 +6076,7 @@
           <p:cNvPr id="7" name="">
             <a:extLst xmlns:a="http://schemas.openxmlformats.org/drawingml/2006/main">
               <a:ext uri="{FF2B5EF4-FFF2-40B4-BE49-F238E27FC236}">
-                <a16:creationId xmlns:a16="http://schemas.microsoft.com/office/drawing/2014/main" id="{78BAD291-9473-4CEE-A3F9-704801BCA27B}"/>
+                <a16:creationId xmlns:a16="http://schemas.microsoft.com/office/drawing/2014/main" id="{41BD8AE7-5C16-44E0-A888-59F0C2F05D6C}"/>
               </a:ext>
             </a:extLst>
           </p:cNvPr>
@@ -6202,7 +6107,7 @@
           <p:cNvPr id="8" name="">
             <a:extLst xmlns:a="http://schemas.openxmlformats.org/drawingml/2006/main">
               <a:ext uri="{FF2B5EF4-FFF2-40B4-BE49-F238E27FC236}">
-                <a16:creationId xmlns:a16="http://schemas.microsoft.com/office/drawing/2014/main" id="{6290F8E0-FC80-420E-BF4C-1520B7B264CA}"/>
+                <a16:creationId xmlns:a16="http://schemas.microsoft.com/office/drawing/2014/main" id="{A0F0D2BE-617E-4C39-881C-5ED793717FB5}"/>
               </a:ext>
             </a:extLst>
           </p:cNvPr>
@@ -6252,7 +6157,7 @@
           <p:cNvPr id="9" name="">
             <a:extLst xmlns:a="http://schemas.openxmlformats.org/drawingml/2006/main">
               <a:ext uri="{FF2B5EF4-FFF2-40B4-BE49-F238E27FC236}">
-                <a16:creationId xmlns:a16="http://schemas.microsoft.com/office/drawing/2014/main" id="{E0C69FF3-B228-4A05-850A-214673141CB0}"/>
+                <a16:creationId xmlns:a16="http://schemas.microsoft.com/office/drawing/2014/main" id="{EFA6FEF8-DA2E-4431-A492-4ADCBE1DAF10}"/>
               </a:ext>
             </a:extLst>
           </p:cNvPr>
@@ -6285,7 +6190,7 @@
           <p:cNvPr id="10" name="">
             <a:extLst xmlns:a="http://schemas.openxmlformats.org/drawingml/2006/main">
               <a:ext uri="{FF2B5EF4-FFF2-40B4-BE49-F238E27FC236}">
-                <a16:creationId xmlns:a16="http://schemas.microsoft.com/office/drawing/2014/main" id="{7A260CD6-1A0B-4B18-B9A2-57C9EAC09525}"/>
+                <a16:creationId xmlns:a16="http://schemas.microsoft.com/office/drawing/2014/main" id="{0701E7F5-D344-476D-850E-ECF8244392FF}"/>
               </a:ext>
             </a:extLst>
           </p:cNvPr>
@@ -6335,7 +6240,7 @@
           <p:cNvPr id="11" name="">
             <a:extLst xmlns:a="http://schemas.openxmlformats.org/drawingml/2006/main">
               <a:ext uri="{FF2B5EF4-FFF2-40B4-BE49-F238E27FC236}">
-                <a16:creationId xmlns:a16="http://schemas.microsoft.com/office/drawing/2014/main" id="{92600045-D9F1-496E-AFF4-7A922B121626}"/>
+                <a16:creationId xmlns:a16="http://schemas.microsoft.com/office/drawing/2014/main" id="{C96C3D91-B2EB-4A56-945B-842DE1C70DB8}"/>
               </a:ext>
             </a:extLst>
           </p:cNvPr>
@@ -6368,7 +6273,7 @@
           <p:cNvPr id="12" name="">
             <a:extLst xmlns:a="http://schemas.openxmlformats.org/drawingml/2006/main">
               <a:ext uri="{FF2B5EF4-FFF2-40B4-BE49-F238E27FC236}">
-                <a16:creationId xmlns:a16="http://schemas.microsoft.com/office/drawing/2014/main" id="{71EFB5D1-11AF-4C3A-BDC4-3727BA475FD4}"/>
+                <a16:creationId xmlns:a16="http://schemas.microsoft.com/office/drawing/2014/main" id="{BDAA3606-6661-4D12-9CC5-B1A305879593}"/>
               </a:ext>
             </a:extLst>
           </p:cNvPr>
@@ -6418,7 +6323,7 @@
           <p:cNvPr id="13" name="">
             <a:extLst xmlns:a="http://schemas.openxmlformats.org/drawingml/2006/main">
               <a:ext uri="{FF2B5EF4-FFF2-40B4-BE49-F238E27FC236}">
-                <a16:creationId xmlns:a16="http://schemas.microsoft.com/office/drawing/2014/main" id="{73A9418E-7C7B-4663-9E86-992526DC7DB5}"/>
+                <a16:creationId xmlns:a16="http://schemas.microsoft.com/office/drawing/2014/main" id="{40DC35F3-8F50-4DCC-A4A7-113888EA6C9F}"/>
               </a:ext>
             </a:extLst>
           </p:cNvPr>
@@ -6451,7 +6356,7 @@
           <p:cNvPr id="14" name="">
             <a:extLst xmlns:a="http://schemas.openxmlformats.org/drawingml/2006/main">
               <a:ext uri="{FF2B5EF4-FFF2-40B4-BE49-F238E27FC236}">
-                <a16:creationId xmlns:a16="http://schemas.microsoft.com/office/drawing/2014/main" id="{59F32F3F-6F4A-4EF4-BAB9-719EC989A60C}"/>
+                <a16:creationId xmlns:a16="http://schemas.microsoft.com/office/drawing/2014/main" id="{FA84330D-677B-4EC8-8CBC-5F6899CEE217}"/>
               </a:ext>
             </a:extLst>
           </p:cNvPr>
@@ -6499,7 +6404,7 @@
     </p:spTree>
     <p:extLst>
       <p:ext uri="{BB962C8B-B14F-4D97-AF65-F5344CB8AC3E}">
-        <p14:creationId xmlns:p14="http://schemas.microsoft.com/office/powerpoint/2010/main" val="1501501565"/>
+        <p14:creationId xmlns:p14="http://schemas.microsoft.com/office/powerpoint/2010/main" val="702334374"/>
       </p:ext>
     </p:extLst>
   </p:cSld>
@@ -6527,10 +6432,10 @@
       </p:grpSpPr>
       <p:sp>
         <p:nvSpPr>
-          <p:cNvPr id="1" name="">
-            <a:extLst xmlns:a="http://schemas.openxmlformats.org/drawingml/2006/main">
-              <a:ext uri="{FF2B5EF4-FFF2-40B4-BE49-F238E27FC236}">
-                <a16:creationId xmlns:a16="http://schemas.microsoft.com/office/drawing/2014/main" id="{20C0860D-0E87-47F0-A2C4-359C9A3BBBB7}"/>
+          <p:cNvPr id="8" name="">
+            <a:extLst xmlns:a="http://schemas.openxmlformats.org/drawingml/2006/main">
+              <a:ext uri="{FF2B5EF4-FFF2-40B4-BE49-F238E27FC236}">
+                <a16:creationId xmlns:a16="http://schemas.microsoft.com/office/drawing/2014/main" id="{F050751D-7D71-433A-B6CD-42F79022E4EC}"/>
               </a:ext>
             </a:extLst>
           </p:cNvPr>
@@ -6580,7 +6485,7 @@
           <p:cNvPr id="2" name="a4-title-15">
             <a:extLst xmlns:a="http://schemas.openxmlformats.org/drawingml/2006/main">
               <a:ext uri="{FF2B5EF4-FFF2-40B4-BE49-F238E27FC236}">
-                <a16:creationId xmlns:a16="http://schemas.microsoft.com/office/drawing/2014/main" id="{F8FA8C22-27BA-49D6-81D6-C810F98F48FD}"/>
+                <a16:creationId xmlns:a16="http://schemas.microsoft.com/office/drawing/2014/main" id="{7936CBDF-7E7B-450F-A69E-436CE8E93D54}"/>
               </a:ext>
             </a:extLst>
           </p:cNvPr>
@@ -6630,7 +6535,7 @@
           <p:cNvPr id="3" name="">
             <a:extLst xmlns:a="http://schemas.openxmlformats.org/drawingml/2006/main">
               <a:ext uri="{FF2B5EF4-FFF2-40B4-BE49-F238E27FC236}">
-                <a16:creationId xmlns:a16="http://schemas.microsoft.com/office/drawing/2014/main" id="{86161FBA-307A-43F9-96DB-A690575ED25E}"/>
+                <a16:creationId xmlns:a16="http://schemas.microsoft.com/office/drawing/2014/main" id="{9356A271-A88D-4DDA-A5E5-E6F6590BBB7A}"/>
               </a:ext>
             </a:extLst>
           </p:cNvPr>
@@ -6661,7 +6566,7 @@
           <p:cNvPr id="4" name="">
             <a:extLst xmlns:a="http://schemas.openxmlformats.org/drawingml/2006/main">
               <a:ext uri="{FF2B5EF4-FFF2-40B4-BE49-F238E27FC236}">
-                <a16:creationId xmlns:a16="http://schemas.microsoft.com/office/drawing/2014/main" id="{C732F057-617A-4BBA-89C9-145171C69831}"/>
+                <a16:creationId xmlns:a16="http://schemas.microsoft.com/office/drawing/2014/main" id="{024DDD25-0CA0-4578-A995-355AB48FC0B8}"/>
               </a:ext>
             </a:extLst>
           </p:cNvPr>
@@ -6711,7 +6616,7 @@
           <p:cNvPr id="5" name="">
             <a:extLst xmlns:a="http://schemas.openxmlformats.org/drawingml/2006/main">
               <a:ext uri="{FF2B5EF4-FFF2-40B4-BE49-F238E27FC236}">
-                <a16:creationId xmlns:a16="http://schemas.microsoft.com/office/drawing/2014/main" id="{3AB7697B-BF40-4C81-AA7F-5C2198736D34}"/>
+                <a16:creationId xmlns:a16="http://schemas.microsoft.com/office/drawing/2014/main" id="{B825A0F4-9F2D-4B2E-BDD7-82EC12F66F3F}"/>
               </a:ext>
             </a:extLst>
           </p:cNvPr>
@@ -6750,13 +6655,13 @@
           <p:nvPr/>
         </p:nvPicPr>
         <p:blipFill>
-          <a:blip xmlns:r="http://schemas.openxmlformats.org/officeDocument/2006/relationships" xmlns:a="http://schemas.openxmlformats.org/drawingml/2006/main" r:embed="Rbc397149633241b0"/>
+          <a:blip xmlns:r="http://schemas.openxmlformats.org/officeDocument/2006/relationships" xmlns:a="http://schemas.openxmlformats.org/drawingml/2006/main" r:embed="Rfc6e3fe989c14615"/>
           <a:stretch xmlns:a="http://schemas.openxmlformats.org/drawingml/2006/main"/>
         </p:blipFill>
         <p:spPr>
           <a:xfrm xmlns:a="http://schemas.openxmlformats.org/drawingml/2006/main">
-            <a:off x="1867224" y="1847850"/>
-            <a:ext cx="3828402" cy="6667500"/>
+            <a:off x="2546641" y="1847850"/>
+            <a:ext cx="2469568" cy="6667500"/>
           </a:xfrm>
           <a:prstGeom xmlns:a="http://schemas.openxmlformats.org/drawingml/2006/main" prst="rect">
             <a:avLst/>
@@ -6768,7 +6673,7 @@
           <p:cNvPr id="7" name="">
             <a:extLst xmlns:a="http://schemas.openxmlformats.org/drawingml/2006/main">
               <a:ext uri="{FF2B5EF4-FFF2-40B4-BE49-F238E27FC236}">
-                <a16:creationId xmlns:a16="http://schemas.microsoft.com/office/drawing/2014/main" id="{BB70318A-7F9B-4D96-977C-A7D0514A9BB1}"/>
+                <a16:creationId xmlns:a16="http://schemas.microsoft.com/office/drawing/2014/main" id="{3C5CA6D9-423E-4EB5-811F-3FAD3A0B78DA}"/>
               </a:ext>
             </a:extLst>
           </p:cNvPr>
@@ -6816,7 +6721,7 @@
     </p:spTree>
     <p:extLst>
       <p:ext uri="{BB962C8B-B14F-4D97-AF65-F5344CB8AC3E}">
-        <p14:creationId xmlns:p14="http://schemas.microsoft.com/office/powerpoint/2010/main" val="1628253026"/>
+        <p14:creationId xmlns:p14="http://schemas.microsoft.com/office/powerpoint/2010/main" val="1255373399"/>
       </p:ext>
     </p:extLst>
   </p:cSld>
@@ -6844,10 +6749,10 @@
       </p:grpSpPr>
       <p:sp>
         <p:nvSpPr>
-          <p:cNvPr id="1" name="">
-            <a:extLst xmlns:a="http://schemas.openxmlformats.org/drawingml/2006/main">
-              <a:ext uri="{FF2B5EF4-FFF2-40B4-BE49-F238E27FC236}">
-                <a16:creationId xmlns:a16="http://schemas.microsoft.com/office/drawing/2014/main" id="{60E2D75F-9853-4A4D-878A-FA36F2FA69E6}"/>
+          <p:cNvPr id="17" name="">
+            <a:extLst xmlns:a="http://schemas.openxmlformats.org/drawingml/2006/main">
+              <a:ext uri="{FF2B5EF4-FFF2-40B4-BE49-F238E27FC236}">
+                <a16:creationId xmlns:a16="http://schemas.microsoft.com/office/drawing/2014/main" id="{AF4FED43-246D-4B16-9981-CDA391DCC464}"/>
               </a:ext>
             </a:extLst>
           </p:cNvPr>
@@ -6897,7 +6802,7 @@
           <p:cNvPr id="2" name="a4-title-16">
             <a:extLst xmlns:a="http://schemas.openxmlformats.org/drawingml/2006/main">
               <a:ext uri="{FF2B5EF4-FFF2-40B4-BE49-F238E27FC236}">
-                <a16:creationId xmlns:a16="http://schemas.microsoft.com/office/drawing/2014/main" id="{AB3B8E97-94C7-4526-8747-B2D4773FAE06}"/>
+                <a16:creationId xmlns:a16="http://schemas.microsoft.com/office/drawing/2014/main" id="{3AD6A777-F1BE-4E2F-9302-B61987C2618E}"/>
               </a:ext>
             </a:extLst>
           </p:cNvPr>
@@ -6947,7 +6852,7 @@
           <p:cNvPr id="3" name="">
             <a:extLst xmlns:a="http://schemas.openxmlformats.org/drawingml/2006/main">
               <a:ext uri="{FF2B5EF4-FFF2-40B4-BE49-F238E27FC236}">
-                <a16:creationId xmlns:a16="http://schemas.microsoft.com/office/drawing/2014/main" id="{FA93C3DA-E99B-4AA7-9E3C-4B1683BEDB76}"/>
+                <a16:creationId xmlns:a16="http://schemas.microsoft.com/office/drawing/2014/main" id="{B4202F76-8521-4EF9-9EA7-A983101C52F8}"/>
               </a:ext>
             </a:extLst>
           </p:cNvPr>
@@ -6978,7 +6883,7 @@
           <p:cNvPr id="4" name="">
             <a:extLst xmlns:a="http://schemas.openxmlformats.org/drawingml/2006/main">
               <a:ext uri="{FF2B5EF4-FFF2-40B4-BE49-F238E27FC236}">
-                <a16:creationId xmlns:a16="http://schemas.microsoft.com/office/drawing/2014/main" id="{BDA087DB-953F-4E6C-9403-3F5C18E74380}"/>
+                <a16:creationId xmlns:a16="http://schemas.microsoft.com/office/drawing/2014/main" id="{3079CC41-1BDF-49E4-B978-099C5B98250E}"/>
               </a:ext>
             </a:extLst>
           </p:cNvPr>
@@ -7028,7 +6933,7 @@
           <p:cNvPr id="5" name="">
             <a:extLst xmlns:a="http://schemas.openxmlformats.org/drawingml/2006/main">
               <a:ext uri="{FF2B5EF4-FFF2-40B4-BE49-F238E27FC236}">
-                <a16:creationId xmlns:a16="http://schemas.microsoft.com/office/drawing/2014/main" id="{FA4BD6D8-DAFA-4BF5-88B7-915FF1B5BE58}"/>
+                <a16:creationId xmlns:a16="http://schemas.microsoft.com/office/drawing/2014/main" id="{082CA0FD-D5E9-4DF1-9971-0E6AED8BDB9E}"/>
               </a:ext>
             </a:extLst>
           </p:cNvPr>
@@ -7067,7 +6972,7 @@
           <p:nvPr/>
         </p:nvPicPr>
         <p:blipFill>
-          <a:blip xmlns:r="http://schemas.openxmlformats.org/officeDocument/2006/relationships" xmlns:a="http://schemas.openxmlformats.org/drawingml/2006/main" r:embed="R260b184f9a6f4573"/>
+          <a:blip xmlns:r="http://schemas.openxmlformats.org/officeDocument/2006/relationships" xmlns:a="http://schemas.openxmlformats.org/drawingml/2006/main" r:embed="R2a134ff5e7cc4df8"/>
           <a:stretch xmlns:a="http://schemas.openxmlformats.org/drawingml/2006/main"/>
         </p:blipFill>
         <p:spPr>
@@ -7087,7 +6992,7 @@
           <p:cNvPr id="7" name="">
             <a:extLst xmlns:a="http://schemas.openxmlformats.org/drawingml/2006/main">
               <a:ext uri="{FF2B5EF4-FFF2-40B4-BE49-F238E27FC236}">
-                <a16:creationId xmlns:a16="http://schemas.microsoft.com/office/drawing/2014/main" id="{4480CF0D-07C6-43E2-9D84-D60F14781CD8}"/>
+                <a16:creationId xmlns:a16="http://schemas.microsoft.com/office/drawing/2014/main" id="{623750D7-A89F-4553-94E7-40CE146ED611}"/>
               </a:ext>
             </a:extLst>
           </p:cNvPr>
@@ -7118,7 +7023,7 @@
           <p:cNvPr id="8" name="">
             <a:extLst xmlns:a="http://schemas.openxmlformats.org/drawingml/2006/main">
               <a:ext uri="{FF2B5EF4-FFF2-40B4-BE49-F238E27FC236}">
-                <a16:creationId xmlns:a16="http://schemas.microsoft.com/office/drawing/2014/main" id="{A3593F67-3F94-4D96-8D43-8DFC593F72FB}"/>
+                <a16:creationId xmlns:a16="http://schemas.microsoft.com/office/drawing/2014/main" id="{F1432C31-C6C7-4B49-A5E3-5ED2EF257511}"/>
               </a:ext>
             </a:extLst>
           </p:cNvPr>
@@ -7168,7 +7073,7 @@
           <p:cNvPr id="9" name="">
             <a:extLst xmlns:a="http://schemas.openxmlformats.org/drawingml/2006/main">
               <a:ext uri="{FF2B5EF4-FFF2-40B4-BE49-F238E27FC236}">
-                <a16:creationId xmlns:a16="http://schemas.microsoft.com/office/drawing/2014/main" id="{D7C0FDED-D4F1-42B5-BA25-2411C43F689C}"/>
+                <a16:creationId xmlns:a16="http://schemas.microsoft.com/office/drawing/2014/main" id="{56EFFF99-DDF1-4462-A32F-09595BEC11E5}"/>
               </a:ext>
             </a:extLst>
           </p:cNvPr>
@@ -7201,7 +7106,7 @@
           <p:cNvPr id="10" name="">
             <a:extLst xmlns:a="http://schemas.openxmlformats.org/drawingml/2006/main">
               <a:ext uri="{FF2B5EF4-FFF2-40B4-BE49-F238E27FC236}">
-                <a16:creationId xmlns:a16="http://schemas.microsoft.com/office/drawing/2014/main" id="{5BE7A00C-8132-4044-B197-4ABA696D22D9}"/>
+                <a16:creationId xmlns:a16="http://schemas.microsoft.com/office/drawing/2014/main" id="{3840FE58-F0F6-4EF4-BDD4-89D99EE06D49}"/>
               </a:ext>
             </a:extLst>
           </p:cNvPr>
@@ -7251,7 +7156,7 @@
           <p:cNvPr id="11" name="">
             <a:extLst xmlns:a="http://schemas.openxmlformats.org/drawingml/2006/main">
               <a:ext uri="{FF2B5EF4-FFF2-40B4-BE49-F238E27FC236}">
-                <a16:creationId xmlns:a16="http://schemas.microsoft.com/office/drawing/2014/main" id="{49C14E8A-D9B7-417D-9621-D62D17D04664}"/>
+                <a16:creationId xmlns:a16="http://schemas.microsoft.com/office/drawing/2014/main" id="{8510F96F-6F4A-4C30-8C7D-19C2F4FB610C}"/>
               </a:ext>
             </a:extLst>
           </p:cNvPr>
@@ -7284,7 +7189,7 @@
           <p:cNvPr id="12" name="">
             <a:extLst xmlns:a="http://schemas.openxmlformats.org/drawingml/2006/main">
               <a:ext uri="{FF2B5EF4-FFF2-40B4-BE49-F238E27FC236}">
-                <a16:creationId xmlns:a16="http://schemas.microsoft.com/office/drawing/2014/main" id="{64A22E2C-1939-4FB3-AD82-406EB9357E68}"/>
+                <a16:creationId xmlns:a16="http://schemas.microsoft.com/office/drawing/2014/main" id="{5D53FAC1-D1DB-4C30-A5F7-F41EDA59AD16}"/>
               </a:ext>
             </a:extLst>
           </p:cNvPr>
@@ -7334,7 +7239,7 @@
           <p:cNvPr id="13" name="">
             <a:extLst xmlns:a="http://schemas.openxmlformats.org/drawingml/2006/main">
               <a:ext uri="{FF2B5EF4-FFF2-40B4-BE49-F238E27FC236}">
-                <a16:creationId xmlns:a16="http://schemas.microsoft.com/office/drawing/2014/main" id="{E221CCC2-0E58-48A7-AB57-3616B14FF868}"/>
+                <a16:creationId xmlns:a16="http://schemas.microsoft.com/office/drawing/2014/main" id="{F0E6EA0A-0875-4117-9E99-69AA906B6FFA}"/>
               </a:ext>
             </a:extLst>
           </p:cNvPr>
@@ -7367,7 +7272,7 @@
           <p:cNvPr id="14" name="">
             <a:extLst xmlns:a="http://schemas.openxmlformats.org/drawingml/2006/main">
               <a:ext uri="{FF2B5EF4-FFF2-40B4-BE49-F238E27FC236}">
-                <a16:creationId xmlns:a16="http://schemas.microsoft.com/office/drawing/2014/main" id="{824CB58C-FAED-4F9E-9859-5F8FF7986D39}"/>
+                <a16:creationId xmlns:a16="http://schemas.microsoft.com/office/drawing/2014/main" id="{329F9F0F-C32B-44D1-9A6F-689F08B94771}"/>
               </a:ext>
             </a:extLst>
           </p:cNvPr>
@@ -7417,7 +7322,7 @@
           <p:cNvPr id="15" name="">
             <a:extLst xmlns:a="http://schemas.openxmlformats.org/drawingml/2006/main">
               <a:ext uri="{FF2B5EF4-FFF2-40B4-BE49-F238E27FC236}">
-                <a16:creationId xmlns:a16="http://schemas.microsoft.com/office/drawing/2014/main" id="{4E686B09-7252-4DEF-9A9D-8AC19342870B}"/>
+                <a16:creationId xmlns:a16="http://schemas.microsoft.com/office/drawing/2014/main" id="{26D41993-CED5-4E55-917A-A4000C1F8808}"/>
               </a:ext>
             </a:extLst>
           </p:cNvPr>
@@ -7450,7 +7355,7 @@
           <p:cNvPr id="16" name="">
             <a:extLst xmlns:a="http://schemas.openxmlformats.org/drawingml/2006/main">
               <a:ext uri="{FF2B5EF4-FFF2-40B4-BE49-F238E27FC236}">
-                <a16:creationId xmlns:a16="http://schemas.microsoft.com/office/drawing/2014/main" id="{64476742-1563-4487-8324-89CF915AB885}"/>
+                <a16:creationId xmlns:a16="http://schemas.microsoft.com/office/drawing/2014/main" id="{0F02171E-4D4C-4C89-951C-D6A306BEEE00}"/>
               </a:ext>
             </a:extLst>
           </p:cNvPr>
@@ -7498,7 +7403,7 @@
     </p:spTree>
     <p:extLst>
       <p:ext uri="{BB962C8B-B14F-4D97-AF65-F5344CB8AC3E}">
-        <p14:creationId xmlns:p14="http://schemas.microsoft.com/office/powerpoint/2010/main" val="1713787323"/>
+        <p14:creationId xmlns:p14="http://schemas.microsoft.com/office/powerpoint/2010/main" val="639582857"/>
       </p:ext>
     </p:extLst>
   </p:cSld>
@@ -7526,10 +7431,10 @@
       </p:grpSpPr>
       <p:sp>
         <p:nvSpPr>
-          <p:cNvPr id="1" name="">
-            <a:extLst xmlns:a="http://schemas.openxmlformats.org/drawingml/2006/main">
-              <a:ext uri="{FF2B5EF4-FFF2-40B4-BE49-F238E27FC236}">
-                <a16:creationId xmlns:a16="http://schemas.microsoft.com/office/drawing/2014/main" id="{66A4EAF0-5F55-42CC-85FF-A955898DAEAD}"/>
+          <p:cNvPr id="15" name="">
+            <a:extLst xmlns:a="http://schemas.openxmlformats.org/drawingml/2006/main">
+              <a:ext uri="{FF2B5EF4-FFF2-40B4-BE49-F238E27FC236}">
+                <a16:creationId xmlns:a16="http://schemas.microsoft.com/office/drawing/2014/main" id="{CB0E0E07-9B81-4218-AF03-6313846C682C}"/>
               </a:ext>
             </a:extLst>
           </p:cNvPr>
@@ -7579,7 +7484,7 @@
           <p:cNvPr id="2" name="a4-title-17">
             <a:extLst xmlns:a="http://schemas.openxmlformats.org/drawingml/2006/main">
               <a:ext uri="{FF2B5EF4-FFF2-40B4-BE49-F238E27FC236}">
-                <a16:creationId xmlns:a16="http://schemas.microsoft.com/office/drawing/2014/main" id="{EDD09C05-13EC-4617-96AE-3CF3509E8D99}"/>
+                <a16:creationId xmlns:a16="http://schemas.microsoft.com/office/drawing/2014/main" id="{922A9F30-FFC9-4689-A1DD-D3A295EEA087}"/>
               </a:ext>
             </a:extLst>
           </p:cNvPr>
@@ -7629,7 +7534,7 @@
           <p:cNvPr id="3" name="">
             <a:extLst xmlns:a="http://schemas.openxmlformats.org/drawingml/2006/main">
               <a:ext uri="{FF2B5EF4-FFF2-40B4-BE49-F238E27FC236}">
-                <a16:creationId xmlns:a16="http://schemas.microsoft.com/office/drawing/2014/main" id="{E8BFA080-6123-49FB-B4FB-DDB3A4C8EFA1}"/>
+                <a16:creationId xmlns:a16="http://schemas.microsoft.com/office/drawing/2014/main" id="{DA3C6466-FF12-4B84-9D4C-0115ABFDF8A9}"/>
               </a:ext>
             </a:extLst>
           </p:cNvPr>
@@ -7660,7 +7565,7 @@
           <p:cNvPr id="4" name="">
             <a:extLst xmlns:a="http://schemas.openxmlformats.org/drawingml/2006/main">
               <a:ext uri="{FF2B5EF4-FFF2-40B4-BE49-F238E27FC236}">
-                <a16:creationId xmlns:a16="http://schemas.microsoft.com/office/drawing/2014/main" id="{5E93B3E2-7BF8-4A8E-8E7D-2851C178AA44}"/>
+                <a16:creationId xmlns:a16="http://schemas.microsoft.com/office/drawing/2014/main" id="{14A2471E-F9CB-438B-885F-C12C3081E0FE}"/>
               </a:ext>
             </a:extLst>
           </p:cNvPr>
@@ -7710,7 +7615,7 @@
           <p:cNvPr id="5" name="">
             <a:extLst xmlns:a="http://schemas.openxmlformats.org/drawingml/2006/main">
               <a:ext uri="{FF2B5EF4-FFF2-40B4-BE49-F238E27FC236}">
-                <a16:creationId xmlns:a16="http://schemas.microsoft.com/office/drawing/2014/main" id="{9EB00621-2D31-4F76-A1E6-D53F11969BE6}"/>
+                <a16:creationId xmlns:a16="http://schemas.microsoft.com/office/drawing/2014/main" id="{556FD372-61AA-4B22-A352-CCE795301962}"/>
               </a:ext>
             </a:extLst>
           </p:cNvPr>
@@ -7749,7 +7654,7 @@
           <p:nvPr/>
         </p:nvPicPr>
         <p:blipFill>
-          <a:blip xmlns:r="http://schemas.openxmlformats.org/officeDocument/2006/relationships" xmlns:a="http://schemas.openxmlformats.org/drawingml/2006/main" r:embed="R691e1d3bd49a48ce"/>
+          <a:blip xmlns:r="http://schemas.openxmlformats.org/officeDocument/2006/relationships" xmlns:a="http://schemas.openxmlformats.org/drawingml/2006/main" r:embed="Ra36a8c677a6f43e8"/>
           <a:stretch xmlns:a="http://schemas.openxmlformats.org/drawingml/2006/main"/>
         </p:blipFill>
         <p:spPr>
@@ -7769,7 +7674,7 @@
           <p:cNvPr id="7" name="">
             <a:extLst xmlns:a="http://schemas.openxmlformats.org/drawingml/2006/main">
               <a:ext uri="{FF2B5EF4-FFF2-40B4-BE49-F238E27FC236}">
-                <a16:creationId xmlns:a16="http://schemas.microsoft.com/office/drawing/2014/main" id="{2578B35B-5B36-4603-8601-16F4AFCF7D13}"/>
+                <a16:creationId xmlns:a16="http://schemas.microsoft.com/office/drawing/2014/main" id="{9CA2106B-3F2A-4B76-8DDE-E83A84575534}"/>
               </a:ext>
             </a:extLst>
           </p:cNvPr>
@@ -7800,7 +7705,7 @@
           <p:cNvPr id="8" name="">
             <a:extLst xmlns:a="http://schemas.openxmlformats.org/drawingml/2006/main">
               <a:ext uri="{FF2B5EF4-FFF2-40B4-BE49-F238E27FC236}">
-                <a16:creationId xmlns:a16="http://schemas.microsoft.com/office/drawing/2014/main" id="{5F6BF4E9-71C3-4D75-955F-5EDFD05F7FC0}"/>
+                <a16:creationId xmlns:a16="http://schemas.microsoft.com/office/drawing/2014/main" id="{D30CEAE4-DD21-4354-9217-DDD0B0334E1F}"/>
               </a:ext>
             </a:extLst>
           </p:cNvPr>
@@ -7850,7 +7755,7 @@
           <p:cNvPr id="9" name="">
             <a:extLst xmlns:a="http://schemas.openxmlformats.org/drawingml/2006/main">
               <a:ext uri="{FF2B5EF4-FFF2-40B4-BE49-F238E27FC236}">
-                <a16:creationId xmlns:a16="http://schemas.microsoft.com/office/drawing/2014/main" id="{D3478865-07F4-4387-854D-39452A214EE9}"/>
+                <a16:creationId xmlns:a16="http://schemas.microsoft.com/office/drawing/2014/main" id="{3389C74F-557B-41BE-A9CD-7A421D5AAB61}"/>
               </a:ext>
             </a:extLst>
           </p:cNvPr>
@@ -7883,7 +7788,7 @@
           <p:cNvPr id="10" name="">
             <a:extLst xmlns:a="http://schemas.openxmlformats.org/drawingml/2006/main">
               <a:ext uri="{FF2B5EF4-FFF2-40B4-BE49-F238E27FC236}">
-                <a16:creationId xmlns:a16="http://schemas.microsoft.com/office/drawing/2014/main" id="{D6FF0C25-23E6-49E7-8DA2-7DDC2E51E274}"/>
+                <a16:creationId xmlns:a16="http://schemas.microsoft.com/office/drawing/2014/main" id="{574AFAF4-F6A7-4AF6-A99B-27079BF7F405}"/>
               </a:ext>
             </a:extLst>
           </p:cNvPr>
@@ -7933,7 +7838,7 @@
           <p:cNvPr id="11" name="">
             <a:extLst xmlns:a="http://schemas.openxmlformats.org/drawingml/2006/main">
               <a:ext uri="{FF2B5EF4-FFF2-40B4-BE49-F238E27FC236}">
-                <a16:creationId xmlns:a16="http://schemas.microsoft.com/office/drawing/2014/main" id="{44805724-4EBC-4918-8B4B-571DD8FC3958}"/>
+                <a16:creationId xmlns:a16="http://schemas.microsoft.com/office/drawing/2014/main" id="{66ABFC99-640C-415F-A1BB-951BB39715BF}"/>
               </a:ext>
             </a:extLst>
           </p:cNvPr>
@@ -7966,7 +7871,7 @@
           <p:cNvPr id="12" name="">
             <a:extLst xmlns:a="http://schemas.openxmlformats.org/drawingml/2006/main">
               <a:ext uri="{FF2B5EF4-FFF2-40B4-BE49-F238E27FC236}">
-                <a16:creationId xmlns:a16="http://schemas.microsoft.com/office/drawing/2014/main" id="{F88FA298-2E80-46E2-A5AD-1850D2FD431E}"/>
+                <a16:creationId xmlns:a16="http://schemas.microsoft.com/office/drawing/2014/main" id="{34EEF618-6F6B-4E4B-9745-14F06DD7904A}"/>
               </a:ext>
             </a:extLst>
           </p:cNvPr>
@@ -8016,7 +7921,7 @@
           <p:cNvPr id="13" name="">
             <a:extLst xmlns:a="http://schemas.openxmlformats.org/drawingml/2006/main">
               <a:ext uri="{FF2B5EF4-FFF2-40B4-BE49-F238E27FC236}">
-                <a16:creationId xmlns:a16="http://schemas.microsoft.com/office/drawing/2014/main" id="{CAD93797-7DB5-4C5D-A22D-FEB5720A6285}"/>
+                <a16:creationId xmlns:a16="http://schemas.microsoft.com/office/drawing/2014/main" id="{BE5C9B08-F65E-48B2-8727-57613DF91096}"/>
               </a:ext>
             </a:extLst>
           </p:cNvPr>
@@ -8049,7 +7954,7 @@
           <p:cNvPr id="14" name="">
             <a:extLst xmlns:a="http://schemas.openxmlformats.org/drawingml/2006/main">
               <a:ext uri="{FF2B5EF4-FFF2-40B4-BE49-F238E27FC236}">
-                <a16:creationId xmlns:a16="http://schemas.microsoft.com/office/drawing/2014/main" id="{3D30AD20-5875-4972-A4AA-213849656161}"/>
+                <a16:creationId xmlns:a16="http://schemas.microsoft.com/office/drawing/2014/main" id="{C7E8A61A-F42D-430D-BB13-D57262A46D85}"/>
               </a:ext>
             </a:extLst>
           </p:cNvPr>
@@ -8097,7 +8002,7 @@
     </p:spTree>
     <p:extLst>
       <p:ext uri="{BB962C8B-B14F-4D97-AF65-F5344CB8AC3E}">
-        <p14:creationId xmlns:p14="http://schemas.microsoft.com/office/powerpoint/2010/main" val="696055900"/>
+        <p14:creationId xmlns:p14="http://schemas.microsoft.com/office/powerpoint/2010/main" val="865730494"/>
       </p:ext>
     </p:extLst>
   </p:cSld>
@@ -8125,10 +8030,10 @@
       </p:grpSpPr>
       <p:sp>
         <p:nvSpPr>
-          <p:cNvPr id="1" name="">
-            <a:extLst xmlns:a="http://schemas.openxmlformats.org/drawingml/2006/main">
-              <a:ext uri="{FF2B5EF4-FFF2-40B4-BE49-F238E27FC236}">
-                <a16:creationId xmlns:a16="http://schemas.microsoft.com/office/drawing/2014/main" id="{14310AFE-180C-4F9E-8C65-315BF85DA534}"/>
+          <p:cNvPr id="15" name="">
+            <a:extLst xmlns:a="http://schemas.openxmlformats.org/drawingml/2006/main">
+              <a:ext uri="{FF2B5EF4-FFF2-40B4-BE49-F238E27FC236}">
+                <a16:creationId xmlns:a16="http://schemas.microsoft.com/office/drawing/2014/main" id="{9B50D6DA-3529-464E-ADC5-CFA36506CF84}"/>
               </a:ext>
             </a:extLst>
           </p:cNvPr>
@@ -8178,7 +8083,7 @@
           <p:cNvPr id="2" name="a4-title-18">
             <a:extLst xmlns:a="http://schemas.openxmlformats.org/drawingml/2006/main">
               <a:ext uri="{FF2B5EF4-FFF2-40B4-BE49-F238E27FC236}">
-                <a16:creationId xmlns:a16="http://schemas.microsoft.com/office/drawing/2014/main" id="{66BD9BC2-2E11-4CB1-9839-ACA422E5D77F}"/>
+                <a16:creationId xmlns:a16="http://schemas.microsoft.com/office/drawing/2014/main" id="{C7A8CF52-9231-4362-B591-645B3F346F0D}"/>
               </a:ext>
             </a:extLst>
           </p:cNvPr>
@@ -8228,7 +8133,7 @@
           <p:cNvPr id="3" name="">
             <a:extLst xmlns:a="http://schemas.openxmlformats.org/drawingml/2006/main">
               <a:ext uri="{FF2B5EF4-FFF2-40B4-BE49-F238E27FC236}">
-                <a16:creationId xmlns:a16="http://schemas.microsoft.com/office/drawing/2014/main" id="{BFFC8EE2-7252-49C2-8038-D66F26AE420E}"/>
+                <a16:creationId xmlns:a16="http://schemas.microsoft.com/office/drawing/2014/main" id="{E8963F40-1CAF-4516-87FF-DC619C055E7E}"/>
               </a:ext>
             </a:extLst>
           </p:cNvPr>
@@ -8259,7 +8164,7 @@
           <p:cNvPr id="4" name="">
             <a:extLst xmlns:a="http://schemas.openxmlformats.org/drawingml/2006/main">
               <a:ext uri="{FF2B5EF4-FFF2-40B4-BE49-F238E27FC236}">
-                <a16:creationId xmlns:a16="http://schemas.microsoft.com/office/drawing/2014/main" id="{9FCDB3C1-AD41-4819-AA9F-4EA53FC1C324}"/>
+                <a16:creationId xmlns:a16="http://schemas.microsoft.com/office/drawing/2014/main" id="{D39FE71A-B1D4-4D4E-8A77-57A2C6D5DC4A}"/>
               </a:ext>
             </a:extLst>
           </p:cNvPr>
@@ -8309,7 +8214,7 @@
           <p:cNvPr id="5" name="">
             <a:extLst xmlns:a="http://schemas.openxmlformats.org/drawingml/2006/main">
               <a:ext uri="{FF2B5EF4-FFF2-40B4-BE49-F238E27FC236}">
-                <a16:creationId xmlns:a16="http://schemas.microsoft.com/office/drawing/2014/main" id="{72A32B39-6360-4C4F-B330-B40237808E65}"/>
+                <a16:creationId xmlns:a16="http://schemas.microsoft.com/office/drawing/2014/main" id="{B4FFB06D-F5CC-4905-A449-7614F7F4FCCB}"/>
               </a:ext>
             </a:extLst>
           </p:cNvPr>
@@ -8348,7 +8253,7 @@
           <p:nvPr/>
         </p:nvPicPr>
         <p:blipFill>
-          <a:blip xmlns:r="http://schemas.openxmlformats.org/officeDocument/2006/relationships" xmlns:a="http://schemas.openxmlformats.org/drawingml/2006/main" r:embed="Raae4128d5b3f4c48"/>
+          <a:blip xmlns:r="http://schemas.openxmlformats.org/officeDocument/2006/relationships" xmlns:a="http://schemas.openxmlformats.org/drawingml/2006/main" r:embed="Rfb9850aaf4874ace"/>
           <a:stretch xmlns:a="http://schemas.openxmlformats.org/drawingml/2006/main"/>
         </p:blipFill>
         <p:spPr>
@@ -8368,7 +8273,7 @@
           <p:cNvPr id="7" name="">
             <a:extLst xmlns:a="http://schemas.openxmlformats.org/drawingml/2006/main">
               <a:ext uri="{FF2B5EF4-FFF2-40B4-BE49-F238E27FC236}">
-                <a16:creationId xmlns:a16="http://schemas.microsoft.com/office/drawing/2014/main" id="{8831FBEC-53C7-4305-8460-026F5F67A146}"/>
+                <a16:creationId xmlns:a16="http://schemas.microsoft.com/office/drawing/2014/main" id="{3EB40D64-A73D-432A-B2E3-E1C1769076D1}"/>
               </a:ext>
             </a:extLst>
           </p:cNvPr>
@@ -8399,7 +8304,7 @@
           <p:cNvPr id="8" name="">
             <a:extLst xmlns:a="http://schemas.openxmlformats.org/drawingml/2006/main">
               <a:ext uri="{FF2B5EF4-FFF2-40B4-BE49-F238E27FC236}">
-                <a16:creationId xmlns:a16="http://schemas.microsoft.com/office/drawing/2014/main" id="{F415B270-764F-4AA8-9802-B44B50785730}"/>
+                <a16:creationId xmlns:a16="http://schemas.microsoft.com/office/drawing/2014/main" id="{B190574E-6749-46CB-A337-AD6C6DA53C4B}"/>
               </a:ext>
             </a:extLst>
           </p:cNvPr>
@@ -8449,7 +8354,7 @@
           <p:cNvPr id="9" name="">
             <a:extLst xmlns:a="http://schemas.openxmlformats.org/drawingml/2006/main">
               <a:ext uri="{FF2B5EF4-FFF2-40B4-BE49-F238E27FC236}">
-                <a16:creationId xmlns:a16="http://schemas.microsoft.com/office/drawing/2014/main" id="{ADC99A91-8C18-4696-A035-ACF63D0C03AE}"/>
+                <a16:creationId xmlns:a16="http://schemas.microsoft.com/office/drawing/2014/main" id="{502D1B3B-A427-4B8C-8415-C8741187FCF4}"/>
               </a:ext>
             </a:extLst>
           </p:cNvPr>
@@ -8482,7 +8387,7 @@
           <p:cNvPr id="10" name="">
             <a:extLst xmlns:a="http://schemas.openxmlformats.org/drawingml/2006/main">
               <a:ext uri="{FF2B5EF4-FFF2-40B4-BE49-F238E27FC236}">
-                <a16:creationId xmlns:a16="http://schemas.microsoft.com/office/drawing/2014/main" id="{FDA99537-F8B1-407F-ACDC-9E5C5DC8AFB4}"/>
+                <a16:creationId xmlns:a16="http://schemas.microsoft.com/office/drawing/2014/main" id="{A10C5BB8-E1AC-4560-B6C1-91477A587ECE}"/>
               </a:ext>
             </a:extLst>
           </p:cNvPr>
@@ -8532,7 +8437,7 @@
           <p:cNvPr id="11" name="">
             <a:extLst xmlns:a="http://schemas.openxmlformats.org/drawingml/2006/main">
               <a:ext uri="{FF2B5EF4-FFF2-40B4-BE49-F238E27FC236}">
-                <a16:creationId xmlns:a16="http://schemas.microsoft.com/office/drawing/2014/main" id="{8CDC67BF-D677-49D7-BD1A-F7537F197756}"/>
+                <a16:creationId xmlns:a16="http://schemas.microsoft.com/office/drawing/2014/main" id="{82041E7E-C709-4332-9DE4-AB031FE329F7}"/>
               </a:ext>
             </a:extLst>
           </p:cNvPr>
@@ -8565,7 +8470,7 @@
           <p:cNvPr id="12" name="">
             <a:extLst xmlns:a="http://schemas.openxmlformats.org/drawingml/2006/main">
               <a:ext uri="{FF2B5EF4-FFF2-40B4-BE49-F238E27FC236}">
-                <a16:creationId xmlns:a16="http://schemas.microsoft.com/office/drawing/2014/main" id="{B26F4FB4-D825-446E-B6C1-9204F6B00003}"/>
+                <a16:creationId xmlns:a16="http://schemas.microsoft.com/office/drawing/2014/main" id="{AC4C3C57-CA3A-4837-ABD7-BF59CE3D38C4}"/>
               </a:ext>
             </a:extLst>
           </p:cNvPr>
@@ -8615,7 +8520,7 @@
           <p:cNvPr id="13" name="">
             <a:extLst xmlns:a="http://schemas.openxmlformats.org/drawingml/2006/main">
               <a:ext uri="{FF2B5EF4-FFF2-40B4-BE49-F238E27FC236}">
-                <a16:creationId xmlns:a16="http://schemas.microsoft.com/office/drawing/2014/main" id="{462192CC-3338-4152-B801-E20DDE520529}"/>
+                <a16:creationId xmlns:a16="http://schemas.microsoft.com/office/drawing/2014/main" id="{BB67EB18-29EA-4549-A301-C361C507D675}"/>
               </a:ext>
             </a:extLst>
           </p:cNvPr>
@@ -8648,7 +8553,7 @@
           <p:cNvPr id="14" name="">
             <a:extLst xmlns:a="http://schemas.openxmlformats.org/drawingml/2006/main">
               <a:ext uri="{FF2B5EF4-FFF2-40B4-BE49-F238E27FC236}">
-                <a16:creationId xmlns:a16="http://schemas.microsoft.com/office/drawing/2014/main" id="{406C78CB-617E-4449-909B-D276CC3D176A}"/>
+                <a16:creationId xmlns:a16="http://schemas.microsoft.com/office/drawing/2014/main" id="{E13D1600-508C-4115-B05B-244E81DCCD85}"/>
               </a:ext>
             </a:extLst>
           </p:cNvPr>
@@ -8696,7 +8601,7 @@
     </p:spTree>
     <p:extLst>
       <p:ext uri="{BB962C8B-B14F-4D97-AF65-F5344CB8AC3E}">
-        <p14:creationId xmlns:p14="http://schemas.microsoft.com/office/powerpoint/2010/main" val="1297202947"/>
+        <p14:creationId xmlns:p14="http://schemas.microsoft.com/office/powerpoint/2010/main" val="77613858"/>
       </p:ext>
     </p:extLst>
   </p:cSld>
@@ -8724,10 +8629,10 @@
       </p:grpSpPr>
       <p:sp>
         <p:nvSpPr>
-          <p:cNvPr id="1" name="">
-            <a:extLst xmlns:a="http://schemas.openxmlformats.org/drawingml/2006/main">
-              <a:ext uri="{FF2B5EF4-FFF2-40B4-BE49-F238E27FC236}">
-                <a16:creationId xmlns:a16="http://schemas.microsoft.com/office/drawing/2014/main" id="{C76E5569-5FE9-41C4-ADA0-C7427CD95E50}"/>
+          <p:cNvPr id="8" name="">
+            <a:extLst xmlns:a="http://schemas.openxmlformats.org/drawingml/2006/main">
+              <a:ext uri="{FF2B5EF4-FFF2-40B4-BE49-F238E27FC236}">
+                <a16:creationId xmlns:a16="http://schemas.microsoft.com/office/drawing/2014/main" id="{5DA2CB6D-921D-428E-8D71-D519C78AB27D}"/>
               </a:ext>
             </a:extLst>
           </p:cNvPr>
@@ -8777,7 +8682,7 @@
           <p:cNvPr id="2" name="a4-title-19">
             <a:extLst xmlns:a="http://schemas.openxmlformats.org/drawingml/2006/main">
               <a:ext uri="{FF2B5EF4-FFF2-40B4-BE49-F238E27FC236}">
-                <a16:creationId xmlns:a16="http://schemas.microsoft.com/office/drawing/2014/main" id="{4DBF07AA-4EC8-4A29-A774-E01F87F9273A}"/>
+                <a16:creationId xmlns:a16="http://schemas.microsoft.com/office/drawing/2014/main" id="{8844156B-FFC9-4326-BC88-66D7F551027B}"/>
               </a:ext>
             </a:extLst>
           </p:cNvPr>
@@ -8827,7 +8732,7 @@
           <p:cNvPr id="3" name="">
             <a:extLst xmlns:a="http://schemas.openxmlformats.org/drawingml/2006/main">
               <a:ext uri="{FF2B5EF4-FFF2-40B4-BE49-F238E27FC236}">
-                <a16:creationId xmlns:a16="http://schemas.microsoft.com/office/drawing/2014/main" id="{FEE69DFD-49AA-4868-B733-6EFDDDF07147}"/>
+                <a16:creationId xmlns:a16="http://schemas.microsoft.com/office/drawing/2014/main" id="{CDFC9AE2-D08F-4C74-BB2A-EDA9697D6B9C}"/>
               </a:ext>
             </a:extLst>
           </p:cNvPr>
@@ -8858,7 +8763,7 @@
           <p:cNvPr id="4" name="">
             <a:extLst xmlns:a="http://schemas.openxmlformats.org/drawingml/2006/main">
               <a:ext uri="{FF2B5EF4-FFF2-40B4-BE49-F238E27FC236}">
-                <a16:creationId xmlns:a16="http://schemas.microsoft.com/office/drawing/2014/main" id="{B43EBDCC-6607-456A-B8C0-454B4D9B3C55}"/>
+                <a16:creationId xmlns:a16="http://schemas.microsoft.com/office/drawing/2014/main" id="{C0E3150F-3EE1-423C-81F6-D0A7D6D10704}"/>
               </a:ext>
             </a:extLst>
           </p:cNvPr>
@@ -8908,7 +8813,7 @@
           <p:cNvPr id="5" name="">
             <a:extLst xmlns:a="http://schemas.openxmlformats.org/drawingml/2006/main">
               <a:ext uri="{FF2B5EF4-FFF2-40B4-BE49-F238E27FC236}">
-                <a16:creationId xmlns:a16="http://schemas.microsoft.com/office/drawing/2014/main" id="{60D26C23-81D0-46C0-93BB-9F4884617B25}"/>
+                <a16:creationId xmlns:a16="http://schemas.microsoft.com/office/drawing/2014/main" id="{324B8B2C-3CD5-4B9D-B191-A40339C22CC8}"/>
               </a:ext>
             </a:extLst>
           </p:cNvPr>
@@ -8947,13 +8852,13 @@
           <p:nvPr/>
         </p:nvPicPr>
         <p:blipFill>
-          <a:blip xmlns:r="http://schemas.openxmlformats.org/officeDocument/2006/relationships" xmlns:a="http://schemas.openxmlformats.org/drawingml/2006/main" r:embed="Rf0c10e1cb6b7439f"/>
+          <a:blip xmlns:r="http://schemas.openxmlformats.org/officeDocument/2006/relationships" xmlns:a="http://schemas.openxmlformats.org/drawingml/2006/main" r:embed="R4ac0017fabdb4689"/>
           <a:stretch xmlns:a="http://schemas.openxmlformats.org/drawingml/2006/main"/>
         </p:blipFill>
         <p:spPr>
           <a:xfrm xmlns:a="http://schemas.openxmlformats.org/drawingml/2006/main">
-            <a:off x="2333339" y="1847850"/>
-            <a:ext cx="2896172" cy="6667500"/>
+            <a:off x="2638262" y="1847850"/>
+            <a:ext cx="2286327" cy="6667500"/>
           </a:xfrm>
           <a:prstGeom xmlns:a="http://schemas.openxmlformats.org/drawingml/2006/main" prst="rect">
             <a:avLst/>
@@ -8965,7 +8870,7 @@
           <p:cNvPr id="7" name="">
             <a:extLst xmlns:a="http://schemas.openxmlformats.org/drawingml/2006/main">
               <a:ext uri="{FF2B5EF4-FFF2-40B4-BE49-F238E27FC236}">
-                <a16:creationId xmlns:a16="http://schemas.microsoft.com/office/drawing/2014/main" id="{28ECA91F-1632-40C1-9AED-CBD52FFF40C2}"/>
+                <a16:creationId xmlns:a16="http://schemas.microsoft.com/office/drawing/2014/main" id="{8CEE34C4-ABD6-4CD5-BDEF-0E97BBB23CC0}"/>
               </a:ext>
             </a:extLst>
           </p:cNvPr>
@@ -9013,7 +8918,7 @@
     </p:spTree>
     <p:extLst>
       <p:ext uri="{BB962C8B-B14F-4D97-AF65-F5344CB8AC3E}">
-        <p14:creationId xmlns:p14="http://schemas.microsoft.com/office/powerpoint/2010/main" val="908412323"/>
+        <p14:creationId xmlns:p14="http://schemas.microsoft.com/office/powerpoint/2010/main" val="1280207862"/>
       </p:ext>
     </p:extLst>
   </p:cSld>
@@ -9041,10 +8946,10 @@
       </p:grpSpPr>
       <p:sp>
         <p:nvSpPr>
-          <p:cNvPr id="1" name="">
-            <a:extLst xmlns:a="http://schemas.openxmlformats.org/drawingml/2006/main">
-              <a:ext uri="{FF2B5EF4-FFF2-40B4-BE49-F238E27FC236}">
-                <a16:creationId xmlns:a16="http://schemas.microsoft.com/office/drawing/2014/main" id="{5AA1CBB6-957A-45B8-837B-8AA0CAD20D39}"/>
+          <p:cNvPr id="13" name="">
+            <a:extLst xmlns:a="http://schemas.openxmlformats.org/drawingml/2006/main">
+              <a:ext uri="{FF2B5EF4-FFF2-40B4-BE49-F238E27FC236}">
+                <a16:creationId xmlns:a16="http://schemas.microsoft.com/office/drawing/2014/main" id="{66ECDEC9-09D1-46D1-A8C6-CE3F49C82BED}"/>
               </a:ext>
             </a:extLst>
           </p:cNvPr>
@@ -9094,7 +8999,7 @@
           <p:cNvPr id="2" name="a4-title-2">
             <a:extLst xmlns:a="http://schemas.openxmlformats.org/drawingml/2006/main">
               <a:ext uri="{FF2B5EF4-FFF2-40B4-BE49-F238E27FC236}">
-                <a16:creationId xmlns:a16="http://schemas.microsoft.com/office/drawing/2014/main" id="{AF2ABB1C-06BE-4F56-B6B7-F2BAF0BC6FCA}"/>
+                <a16:creationId xmlns:a16="http://schemas.microsoft.com/office/drawing/2014/main" id="{2A41A970-99CA-4FBA-8E23-FFA529F2FD51}"/>
               </a:ext>
             </a:extLst>
           </p:cNvPr>
@@ -9144,7 +9049,7 @@
           <p:cNvPr id="3" name="">
             <a:extLst xmlns:a="http://schemas.openxmlformats.org/drawingml/2006/main">
               <a:ext uri="{FF2B5EF4-FFF2-40B4-BE49-F238E27FC236}">
-                <a16:creationId xmlns:a16="http://schemas.microsoft.com/office/drawing/2014/main" id="{FAB5323C-BF66-4FA1-ADE1-50A49D1BEB7D}"/>
+                <a16:creationId xmlns:a16="http://schemas.microsoft.com/office/drawing/2014/main" id="{781F3C12-FDF2-43C5-894C-66092236535A}"/>
               </a:ext>
             </a:extLst>
           </p:cNvPr>
@@ -9175,7 +9080,7 @@
           <p:cNvPr id="4" name="">
             <a:extLst xmlns:a="http://schemas.openxmlformats.org/drawingml/2006/main">
               <a:ext uri="{FF2B5EF4-FFF2-40B4-BE49-F238E27FC236}">
-                <a16:creationId xmlns:a16="http://schemas.microsoft.com/office/drawing/2014/main" id="{06B6EB6C-C01C-44BF-AB37-8C7775461F65}"/>
+                <a16:creationId xmlns:a16="http://schemas.microsoft.com/office/drawing/2014/main" id="{6F5E4273-A557-4C17-9CD5-9A22FF309352}"/>
               </a:ext>
             </a:extLst>
           </p:cNvPr>
@@ -9225,7 +9130,7 @@
           <p:cNvPr id="5" name="">
             <a:extLst xmlns:a="http://schemas.openxmlformats.org/drawingml/2006/main">
               <a:ext uri="{FF2B5EF4-FFF2-40B4-BE49-F238E27FC236}">
-                <a16:creationId xmlns:a16="http://schemas.microsoft.com/office/drawing/2014/main" id="{ED37E3B2-6475-4DA8-BCA0-60C89638D3E4}"/>
+                <a16:creationId xmlns:a16="http://schemas.microsoft.com/office/drawing/2014/main" id="{145E00E3-C0DC-4BAA-987D-2B9651E874F6}"/>
               </a:ext>
             </a:extLst>
           </p:cNvPr>
@@ -9256,7 +9161,7 @@
           <p:cNvPr id="6" name="">
             <a:extLst xmlns:a="http://schemas.openxmlformats.org/drawingml/2006/main">
               <a:ext uri="{FF2B5EF4-FFF2-40B4-BE49-F238E27FC236}">
-                <a16:creationId xmlns:a16="http://schemas.microsoft.com/office/drawing/2014/main" id="{37635981-8C81-44F4-8D0D-AF8781AAB7F8}"/>
+                <a16:creationId xmlns:a16="http://schemas.microsoft.com/office/drawing/2014/main" id="{4E2EB560-BECE-49C3-8D60-4998BAEA12F7}"/>
               </a:ext>
             </a:extLst>
           </p:cNvPr>
@@ -9306,7 +9211,7 @@
           <p:cNvPr id="7" name="">
             <a:extLst xmlns:a="http://schemas.openxmlformats.org/drawingml/2006/main">
               <a:ext uri="{FF2B5EF4-FFF2-40B4-BE49-F238E27FC236}">
-                <a16:creationId xmlns:a16="http://schemas.microsoft.com/office/drawing/2014/main" id="{EFC4BD24-600B-4BE6-B8CA-E5F1727D56EA}"/>
+                <a16:creationId xmlns:a16="http://schemas.microsoft.com/office/drawing/2014/main" id="{EB819ADC-DE25-4F7F-A691-973309DE8CD2}"/>
               </a:ext>
             </a:extLst>
           </p:cNvPr>
@@ -9356,7 +9261,7 @@
           <p:cNvPr id="8" name="">
             <a:extLst xmlns:a="http://schemas.openxmlformats.org/drawingml/2006/main">
               <a:ext uri="{FF2B5EF4-FFF2-40B4-BE49-F238E27FC236}">
-                <a16:creationId xmlns:a16="http://schemas.microsoft.com/office/drawing/2014/main" id="{E3DE5BF1-C837-4F2A-8FD9-47AC00150441}"/>
+                <a16:creationId xmlns:a16="http://schemas.microsoft.com/office/drawing/2014/main" id="{ECC8E2E0-DE75-48FC-8FB1-51DDACB357E2}"/>
               </a:ext>
             </a:extLst>
           </p:cNvPr>
@@ -9406,7 +9311,7 @@
           <p:cNvPr id="9" name="">
             <a:extLst xmlns:a="http://schemas.openxmlformats.org/drawingml/2006/main">
               <a:ext uri="{FF2B5EF4-FFF2-40B4-BE49-F238E27FC236}">
-                <a16:creationId xmlns:a16="http://schemas.microsoft.com/office/drawing/2014/main" id="{DBC0A54D-3FD3-4258-BE17-47C0750750B9}"/>
+                <a16:creationId xmlns:a16="http://schemas.microsoft.com/office/drawing/2014/main" id="{EFDE7CE5-B0CF-429D-BE87-88AAC9C4FF86}"/>
               </a:ext>
             </a:extLst>
           </p:cNvPr>
@@ -9456,7 +9361,7 @@
           <p:cNvPr id="10" name="">
             <a:extLst xmlns:a="http://schemas.openxmlformats.org/drawingml/2006/main">
               <a:ext uri="{FF2B5EF4-FFF2-40B4-BE49-F238E27FC236}">
-                <a16:creationId xmlns:a16="http://schemas.microsoft.com/office/drawing/2014/main" id="{30182736-8B78-4AB1-819C-BE04A8039797}"/>
+                <a16:creationId xmlns:a16="http://schemas.microsoft.com/office/drawing/2014/main" id="{5E201791-3622-45B6-B54D-0C30D11DCEA7}"/>
               </a:ext>
             </a:extLst>
           </p:cNvPr>
@@ -9506,7 +9411,7 @@
           <p:cNvPr id="11" name="">
             <a:extLst xmlns:a="http://schemas.openxmlformats.org/drawingml/2006/main">
               <a:ext uri="{FF2B5EF4-FFF2-40B4-BE49-F238E27FC236}">
-                <a16:creationId xmlns:a16="http://schemas.microsoft.com/office/drawing/2014/main" id="{43694DB8-E524-4721-B131-22C0D8D0E723}"/>
+                <a16:creationId xmlns:a16="http://schemas.microsoft.com/office/drawing/2014/main" id="{3EAA5205-2E77-4888-B23C-5E19CB97A0F8}"/>
               </a:ext>
             </a:extLst>
           </p:cNvPr>
@@ -9556,7 +9461,7 @@
           <p:cNvPr id="12" name="">
             <a:extLst xmlns:a="http://schemas.openxmlformats.org/drawingml/2006/main">
               <a:ext uri="{FF2B5EF4-FFF2-40B4-BE49-F238E27FC236}">
-                <a16:creationId xmlns:a16="http://schemas.microsoft.com/office/drawing/2014/main" id="{9B9F9D29-3D49-4C71-8B63-A9C21574A59F}"/>
+                <a16:creationId xmlns:a16="http://schemas.microsoft.com/office/drawing/2014/main" id="{C752237A-C6C4-4A98-A48A-CCF4D34D6C15}"/>
               </a:ext>
             </a:extLst>
           </p:cNvPr>
@@ -9604,7 +9509,7 @@
     </p:spTree>
     <p:extLst>
       <p:ext uri="{BB962C8B-B14F-4D97-AF65-F5344CB8AC3E}">
-        <p14:creationId xmlns:p14="http://schemas.microsoft.com/office/powerpoint/2010/main" val="1783192500"/>
+        <p14:creationId xmlns:p14="http://schemas.microsoft.com/office/powerpoint/2010/main" val="677192935"/>
       </p:ext>
     </p:extLst>
   </p:cSld>
@@ -9632,10 +9537,10 @@
       </p:grpSpPr>
       <p:sp>
         <p:nvSpPr>
-          <p:cNvPr id="1" name="">
-            <a:extLst xmlns:a="http://schemas.openxmlformats.org/drawingml/2006/main">
-              <a:ext uri="{FF2B5EF4-FFF2-40B4-BE49-F238E27FC236}">
-                <a16:creationId xmlns:a16="http://schemas.microsoft.com/office/drawing/2014/main" id="{B7DB51A8-BB83-41BC-8D20-421A519AE7D7}"/>
+          <p:cNvPr id="15" name="">
+            <a:extLst xmlns:a="http://schemas.openxmlformats.org/drawingml/2006/main">
+              <a:ext uri="{FF2B5EF4-FFF2-40B4-BE49-F238E27FC236}">
+                <a16:creationId xmlns:a16="http://schemas.microsoft.com/office/drawing/2014/main" id="{82B5E205-C18F-4BA6-AE54-AC88A360C78A}"/>
               </a:ext>
             </a:extLst>
           </p:cNvPr>
@@ -9685,7 +9590,7 @@
           <p:cNvPr id="2" name="a4-title-20">
             <a:extLst xmlns:a="http://schemas.openxmlformats.org/drawingml/2006/main">
               <a:ext uri="{FF2B5EF4-FFF2-40B4-BE49-F238E27FC236}">
-                <a16:creationId xmlns:a16="http://schemas.microsoft.com/office/drawing/2014/main" id="{5ADEE365-62F7-4482-944B-97C5B0AD4921}"/>
+                <a16:creationId xmlns:a16="http://schemas.microsoft.com/office/drawing/2014/main" id="{7B7C1138-7A1E-48DF-9550-3152C21D80A7}"/>
               </a:ext>
             </a:extLst>
           </p:cNvPr>
@@ -9735,7 +9640,7 @@
           <p:cNvPr id="3" name="">
             <a:extLst xmlns:a="http://schemas.openxmlformats.org/drawingml/2006/main">
               <a:ext uri="{FF2B5EF4-FFF2-40B4-BE49-F238E27FC236}">
-                <a16:creationId xmlns:a16="http://schemas.microsoft.com/office/drawing/2014/main" id="{71422F80-35C5-4A4E-BB98-E3F5F6357962}"/>
+                <a16:creationId xmlns:a16="http://schemas.microsoft.com/office/drawing/2014/main" id="{D8BC2141-EB6B-48A3-BB3D-F42FD715A206}"/>
               </a:ext>
             </a:extLst>
           </p:cNvPr>
@@ -9766,7 +9671,7 @@
           <p:cNvPr id="4" name="">
             <a:extLst xmlns:a="http://schemas.openxmlformats.org/drawingml/2006/main">
               <a:ext uri="{FF2B5EF4-FFF2-40B4-BE49-F238E27FC236}">
-                <a16:creationId xmlns:a16="http://schemas.microsoft.com/office/drawing/2014/main" id="{533F47F1-4377-4A02-9A8E-DF45FA16D479}"/>
+                <a16:creationId xmlns:a16="http://schemas.microsoft.com/office/drawing/2014/main" id="{908F0439-6A9C-46CC-96A8-ADE0621CCD8B}"/>
               </a:ext>
             </a:extLst>
           </p:cNvPr>
@@ -9816,7 +9721,7 @@
           <p:cNvPr id="5" name="">
             <a:extLst xmlns:a="http://schemas.openxmlformats.org/drawingml/2006/main">
               <a:ext uri="{FF2B5EF4-FFF2-40B4-BE49-F238E27FC236}">
-                <a16:creationId xmlns:a16="http://schemas.microsoft.com/office/drawing/2014/main" id="{0D7C6FEC-CD60-488E-9498-7D70A5B42BBB}"/>
+                <a16:creationId xmlns:a16="http://schemas.microsoft.com/office/drawing/2014/main" id="{8EB5F589-92D4-497A-B28B-DB637A062BA1}"/>
               </a:ext>
             </a:extLst>
           </p:cNvPr>
@@ -9855,7 +9760,7 @@
           <p:nvPr/>
         </p:nvPicPr>
         <p:blipFill>
-          <a:blip xmlns:r="http://schemas.openxmlformats.org/officeDocument/2006/relationships" xmlns:a="http://schemas.openxmlformats.org/drawingml/2006/main" r:embed="R5f3be3887f0b4471"/>
+          <a:blip xmlns:r="http://schemas.openxmlformats.org/officeDocument/2006/relationships" xmlns:a="http://schemas.openxmlformats.org/drawingml/2006/main" r:embed="R156deceda85a400a"/>
           <a:stretch xmlns:a="http://schemas.openxmlformats.org/drawingml/2006/main"/>
         </p:blipFill>
         <p:spPr>
@@ -9875,7 +9780,7 @@
           <p:cNvPr id="7" name="">
             <a:extLst xmlns:a="http://schemas.openxmlformats.org/drawingml/2006/main">
               <a:ext uri="{FF2B5EF4-FFF2-40B4-BE49-F238E27FC236}">
-                <a16:creationId xmlns:a16="http://schemas.microsoft.com/office/drawing/2014/main" id="{F742B99A-6B35-4067-B296-509989FDC061}"/>
+                <a16:creationId xmlns:a16="http://schemas.microsoft.com/office/drawing/2014/main" id="{BAD69134-B448-4F9B-842B-42830CF98DC0}"/>
               </a:ext>
             </a:extLst>
           </p:cNvPr>
@@ -9906,7 +9811,7 @@
           <p:cNvPr id="8" name="">
             <a:extLst xmlns:a="http://schemas.openxmlformats.org/drawingml/2006/main">
               <a:ext uri="{FF2B5EF4-FFF2-40B4-BE49-F238E27FC236}">
-                <a16:creationId xmlns:a16="http://schemas.microsoft.com/office/drawing/2014/main" id="{F1600C75-B309-4B5D-9D46-8AB2137E1C6D}"/>
+                <a16:creationId xmlns:a16="http://schemas.microsoft.com/office/drawing/2014/main" id="{7ECFF6D3-A5DF-4D29-8CE6-B7658222A056}"/>
               </a:ext>
             </a:extLst>
           </p:cNvPr>
@@ -9956,7 +9861,7 @@
           <p:cNvPr id="9" name="">
             <a:extLst xmlns:a="http://schemas.openxmlformats.org/drawingml/2006/main">
               <a:ext uri="{FF2B5EF4-FFF2-40B4-BE49-F238E27FC236}">
-                <a16:creationId xmlns:a16="http://schemas.microsoft.com/office/drawing/2014/main" id="{1E4B2816-C74A-4915-AD3D-1B8849E1DA8C}"/>
+                <a16:creationId xmlns:a16="http://schemas.microsoft.com/office/drawing/2014/main" id="{BEF127AB-0820-4D0A-B0B3-EFBABE90968B}"/>
               </a:ext>
             </a:extLst>
           </p:cNvPr>
@@ -9989,7 +9894,7 @@
           <p:cNvPr id="10" name="">
             <a:extLst xmlns:a="http://schemas.openxmlformats.org/drawingml/2006/main">
               <a:ext uri="{FF2B5EF4-FFF2-40B4-BE49-F238E27FC236}">
-                <a16:creationId xmlns:a16="http://schemas.microsoft.com/office/drawing/2014/main" id="{7735EDFE-BC8D-4978-A205-A75FF04F5E00}"/>
+                <a16:creationId xmlns:a16="http://schemas.microsoft.com/office/drawing/2014/main" id="{E7020AA4-61B8-46D4-AB4A-693623A1ABD0}"/>
               </a:ext>
             </a:extLst>
           </p:cNvPr>
@@ -10039,7 +9944,7 @@
           <p:cNvPr id="11" name="">
             <a:extLst xmlns:a="http://schemas.openxmlformats.org/drawingml/2006/main">
               <a:ext uri="{FF2B5EF4-FFF2-40B4-BE49-F238E27FC236}">
-                <a16:creationId xmlns:a16="http://schemas.microsoft.com/office/drawing/2014/main" id="{9AEEEC6A-8952-4EAE-A456-AE869646B2CD}"/>
+                <a16:creationId xmlns:a16="http://schemas.microsoft.com/office/drawing/2014/main" id="{4B90867C-AAC8-4312-B61E-F50DCBFE0EBD}"/>
               </a:ext>
             </a:extLst>
           </p:cNvPr>
@@ -10072,7 +9977,7 @@
           <p:cNvPr id="12" name="">
             <a:extLst xmlns:a="http://schemas.openxmlformats.org/drawingml/2006/main">
               <a:ext uri="{FF2B5EF4-FFF2-40B4-BE49-F238E27FC236}">
-                <a16:creationId xmlns:a16="http://schemas.microsoft.com/office/drawing/2014/main" id="{F7A39B89-B54D-46B5-AF2F-99D1075408FE}"/>
+                <a16:creationId xmlns:a16="http://schemas.microsoft.com/office/drawing/2014/main" id="{F192612A-FBC1-434D-BC8D-7B4874EBF69E}"/>
               </a:ext>
             </a:extLst>
           </p:cNvPr>
@@ -10122,7 +10027,7 @@
           <p:cNvPr id="13" name="">
             <a:extLst xmlns:a="http://schemas.openxmlformats.org/drawingml/2006/main">
               <a:ext uri="{FF2B5EF4-FFF2-40B4-BE49-F238E27FC236}">
-                <a16:creationId xmlns:a16="http://schemas.microsoft.com/office/drawing/2014/main" id="{8D787ADC-DB55-45B3-872F-1FDA3313AFDD}"/>
+                <a16:creationId xmlns:a16="http://schemas.microsoft.com/office/drawing/2014/main" id="{067863F5-F042-4B1C-A51D-44BB39628451}"/>
               </a:ext>
             </a:extLst>
           </p:cNvPr>
@@ -10155,7 +10060,7 @@
           <p:cNvPr id="14" name="">
             <a:extLst xmlns:a="http://schemas.openxmlformats.org/drawingml/2006/main">
               <a:ext uri="{FF2B5EF4-FFF2-40B4-BE49-F238E27FC236}">
-                <a16:creationId xmlns:a16="http://schemas.microsoft.com/office/drawing/2014/main" id="{66C49A08-9357-47D8-A9AC-5A096A2C2C71}"/>
+                <a16:creationId xmlns:a16="http://schemas.microsoft.com/office/drawing/2014/main" id="{672E92EC-253E-4D43-97A0-06F611AF067B}"/>
               </a:ext>
             </a:extLst>
           </p:cNvPr>
@@ -10203,7 +10108,7 @@
     </p:spTree>
     <p:extLst>
       <p:ext uri="{BB962C8B-B14F-4D97-AF65-F5344CB8AC3E}">
-        <p14:creationId xmlns:p14="http://schemas.microsoft.com/office/powerpoint/2010/main" val="176139234"/>
+        <p14:creationId xmlns:p14="http://schemas.microsoft.com/office/powerpoint/2010/main" val="787054027"/>
       </p:ext>
     </p:extLst>
   </p:cSld>
@@ -10231,10 +10136,10 @@
       </p:grpSpPr>
       <p:sp>
         <p:nvSpPr>
-          <p:cNvPr id="1" name="">
-            <a:extLst xmlns:a="http://schemas.openxmlformats.org/drawingml/2006/main">
-              <a:ext uri="{FF2B5EF4-FFF2-40B4-BE49-F238E27FC236}">
-                <a16:creationId xmlns:a16="http://schemas.microsoft.com/office/drawing/2014/main" id="{FEE2D7D8-4F47-4BE7-836B-54C71CDD6618}"/>
+          <p:cNvPr id="8" name="">
+            <a:extLst xmlns:a="http://schemas.openxmlformats.org/drawingml/2006/main">
+              <a:ext uri="{FF2B5EF4-FFF2-40B4-BE49-F238E27FC236}">
+                <a16:creationId xmlns:a16="http://schemas.microsoft.com/office/drawing/2014/main" id="{2A729DE1-59F3-4E40-BD6B-C083BBC6663B}"/>
               </a:ext>
             </a:extLst>
           </p:cNvPr>
@@ -10284,7 +10189,7 @@
           <p:cNvPr id="2" name="a4-title-21">
             <a:extLst xmlns:a="http://schemas.openxmlformats.org/drawingml/2006/main">
               <a:ext uri="{FF2B5EF4-FFF2-40B4-BE49-F238E27FC236}">
-                <a16:creationId xmlns:a16="http://schemas.microsoft.com/office/drawing/2014/main" id="{1A793F72-CE40-410E-A023-685B3F9F7278}"/>
+                <a16:creationId xmlns:a16="http://schemas.microsoft.com/office/drawing/2014/main" id="{F9196C2A-0ED8-4B77-ADFD-3F470E8DE264}"/>
               </a:ext>
             </a:extLst>
           </p:cNvPr>
@@ -10334,7 +10239,7 @@
           <p:cNvPr id="3" name="">
             <a:extLst xmlns:a="http://schemas.openxmlformats.org/drawingml/2006/main">
               <a:ext uri="{FF2B5EF4-FFF2-40B4-BE49-F238E27FC236}">
-                <a16:creationId xmlns:a16="http://schemas.microsoft.com/office/drawing/2014/main" id="{3E3157DB-AC5D-431D-9931-D21675CE9BAC}"/>
+                <a16:creationId xmlns:a16="http://schemas.microsoft.com/office/drawing/2014/main" id="{959D002C-1219-48E5-803D-61AEB9DD4497}"/>
               </a:ext>
             </a:extLst>
           </p:cNvPr>
@@ -10365,7 +10270,7 @@
           <p:cNvPr id="4" name="">
             <a:extLst xmlns:a="http://schemas.openxmlformats.org/drawingml/2006/main">
               <a:ext uri="{FF2B5EF4-FFF2-40B4-BE49-F238E27FC236}">
-                <a16:creationId xmlns:a16="http://schemas.microsoft.com/office/drawing/2014/main" id="{B1DA935B-FBC0-4980-9C4C-6E9006DC79CB}"/>
+                <a16:creationId xmlns:a16="http://schemas.microsoft.com/office/drawing/2014/main" id="{EFFF1259-9828-43A5-9D6F-3936A13F0232}"/>
               </a:ext>
             </a:extLst>
           </p:cNvPr>
@@ -10415,7 +10320,7 @@
           <p:cNvPr id="5" name="">
             <a:extLst xmlns:a="http://schemas.openxmlformats.org/drawingml/2006/main">
               <a:ext uri="{FF2B5EF4-FFF2-40B4-BE49-F238E27FC236}">
-                <a16:creationId xmlns:a16="http://schemas.microsoft.com/office/drawing/2014/main" id="{E2B2BDF8-2082-43A9-8E52-0A70FF6D7A44}"/>
+                <a16:creationId xmlns:a16="http://schemas.microsoft.com/office/drawing/2014/main" id="{5636BC90-36D7-46F3-A9CE-BC3A06AB7D0F}"/>
               </a:ext>
             </a:extLst>
           </p:cNvPr>
@@ -10454,13 +10359,13 @@
           <p:nvPr/>
         </p:nvPicPr>
         <p:blipFill>
-          <a:blip xmlns:r="http://schemas.openxmlformats.org/officeDocument/2006/relationships" xmlns:a="http://schemas.openxmlformats.org/drawingml/2006/main" r:embed="R2875f67a5ef44f56"/>
+          <a:blip xmlns:r="http://schemas.openxmlformats.org/officeDocument/2006/relationships" xmlns:a="http://schemas.openxmlformats.org/drawingml/2006/main" r:embed="R40055a3dea954b2d"/>
           <a:stretch xmlns:a="http://schemas.openxmlformats.org/drawingml/2006/main"/>
         </p:blipFill>
         <p:spPr>
           <a:xfrm xmlns:a="http://schemas.openxmlformats.org/drawingml/2006/main">
-            <a:off x="2588615" y="1847850"/>
-            <a:ext cx="2385619" cy="6667500"/>
+            <a:off x="2661707" y="1847850"/>
+            <a:ext cx="2239436" cy="6667500"/>
           </a:xfrm>
           <a:prstGeom xmlns:a="http://schemas.openxmlformats.org/drawingml/2006/main" prst="rect">
             <a:avLst/>
@@ -10472,7 +10377,7 @@
           <p:cNvPr id="7" name="">
             <a:extLst xmlns:a="http://schemas.openxmlformats.org/drawingml/2006/main">
               <a:ext uri="{FF2B5EF4-FFF2-40B4-BE49-F238E27FC236}">
-                <a16:creationId xmlns:a16="http://schemas.microsoft.com/office/drawing/2014/main" id="{AEA2F4A8-88D2-44F5-BAFA-D56736469E6F}"/>
+                <a16:creationId xmlns:a16="http://schemas.microsoft.com/office/drawing/2014/main" id="{AC49BBEE-5A22-4763-972B-D2890C24F43F}"/>
               </a:ext>
             </a:extLst>
           </p:cNvPr>
@@ -10520,7 +10425,7 @@
     </p:spTree>
     <p:extLst>
       <p:ext uri="{BB962C8B-B14F-4D97-AF65-F5344CB8AC3E}">
-        <p14:creationId xmlns:p14="http://schemas.microsoft.com/office/powerpoint/2010/main" val="217645921"/>
+        <p14:creationId xmlns:p14="http://schemas.microsoft.com/office/powerpoint/2010/main" val="330599905"/>
       </p:ext>
     </p:extLst>
   </p:cSld>
@@ -10548,10 +10453,10 @@
       </p:grpSpPr>
       <p:sp>
         <p:nvSpPr>
-          <p:cNvPr id="1" name="">
-            <a:extLst xmlns:a="http://schemas.openxmlformats.org/drawingml/2006/main">
-              <a:ext uri="{FF2B5EF4-FFF2-40B4-BE49-F238E27FC236}">
-                <a16:creationId xmlns:a16="http://schemas.microsoft.com/office/drawing/2014/main" id="{8521D6EE-9EA2-48A2-BCBA-98CF7B4EB568}"/>
+          <p:cNvPr id="15" name="">
+            <a:extLst xmlns:a="http://schemas.openxmlformats.org/drawingml/2006/main">
+              <a:ext uri="{FF2B5EF4-FFF2-40B4-BE49-F238E27FC236}">
+                <a16:creationId xmlns:a16="http://schemas.microsoft.com/office/drawing/2014/main" id="{A5C087E1-FAC6-45D5-B436-DCCA97912EA6}"/>
               </a:ext>
             </a:extLst>
           </p:cNvPr>
@@ -10601,7 +10506,7 @@
           <p:cNvPr id="2" name="a4-title-22">
             <a:extLst xmlns:a="http://schemas.openxmlformats.org/drawingml/2006/main">
               <a:ext uri="{FF2B5EF4-FFF2-40B4-BE49-F238E27FC236}">
-                <a16:creationId xmlns:a16="http://schemas.microsoft.com/office/drawing/2014/main" id="{61CE13C9-BC6A-411A-81D3-D6E9608CFDFB}"/>
+                <a16:creationId xmlns:a16="http://schemas.microsoft.com/office/drawing/2014/main" id="{FAD92283-F078-442A-8971-AA230F4E8983}"/>
               </a:ext>
             </a:extLst>
           </p:cNvPr>
@@ -10651,7 +10556,7 @@
           <p:cNvPr id="3" name="">
             <a:extLst xmlns:a="http://schemas.openxmlformats.org/drawingml/2006/main">
               <a:ext uri="{FF2B5EF4-FFF2-40B4-BE49-F238E27FC236}">
-                <a16:creationId xmlns:a16="http://schemas.microsoft.com/office/drawing/2014/main" id="{E014EB3E-073D-4414-AC45-03D6747D7DCD}"/>
+                <a16:creationId xmlns:a16="http://schemas.microsoft.com/office/drawing/2014/main" id="{25095CEF-EE0D-4CFF-8D50-47E0B10118E1}"/>
               </a:ext>
             </a:extLst>
           </p:cNvPr>
@@ -10682,7 +10587,7 @@
           <p:cNvPr id="4" name="">
             <a:extLst xmlns:a="http://schemas.openxmlformats.org/drawingml/2006/main">
               <a:ext uri="{FF2B5EF4-FFF2-40B4-BE49-F238E27FC236}">
-                <a16:creationId xmlns:a16="http://schemas.microsoft.com/office/drawing/2014/main" id="{FB5A846B-E262-4575-8207-3EB1A7E88A8C}"/>
+                <a16:creationId xmlns:a16="http://schemas.microsoft.com/office/drawing/2014/main" id="{A8C22E03-7713-4CD4-81F5-C023296718C9}"/>
               </a:ext>
             </a:extLst>
           </p:cNvPr>
@@ -10732,7 +10637,7 @@
           <p:cNvPr id="5" name="">
             <a:extLst xmlns:a="http://schemas.openxmlformats.org/drawingml/2006/main">
               <a:ext uri="{FF2B5EF4-FFF2-40B4-BE49-F238E27FC236}">
-                <a16:creationId xmlns:a16="http://schemas.microsoft.com/office/drawing/2014/main" id="{ACF06941-0643-4464-94CB-44133E73E3B1}"/>
+                <a16:creationId xmlns:a16="http://schemas.microsoft.com/office/drawing/2014/main" id="{2A1AEB07-FDBE-46F2-BFEE-314568256C19}"/>
               </a:ext>
             </a:extLst>
           </p:cNvPr>
@@ -10771,7 +10676,7 @@
           <p:nvPr/>
         </p:nvPicPr>
         <p:blipFill>
-          <a:blip xmlns:r="http://schemas.openxmlformats.org/officeDocument/2006/relationships" xmlns:a="http://schemas.openxmlformats.org/drawingml/2006/main" r:embed="R4a9d5635bd9640d6"/>
+          <a:blip xmlns:r="http://schemas.openxmlformats.org/officeDocument/2006/relationships" xmlns:a="http://schemas.openxmlformats.org/drawingml/2006/main" r:embed="R67e48a4442bd4358"/>
           <a:stretch xmlns:a="http://schemas.openxmlformats.org/drawingml/2006/main"/>
         </p:blipFill>
         <p:spPr>
@@ -10791,7 +10696,7 @@
           <p:cNvPr id="7" name="">
             <a:extLst xmlns:a="http://schemas.openxmlformats.org/drawingml/2006/main">
               <a:ext uri="{FF2B5EF4-FFF2-40B4-BE49-F238E27FC236}">
-                <a16:creationId xmlns:a16="http://schemas.microsoft.com/office/drawing/2014/main" id="{E3F03789-8B88-4701-8D4F-B20DE2D3CDC1}"/>
+                <a16:creationId xmlns:a16="http://schemas.microsoft.com/office/drawing/2014/main" id="{389CF97F-E3B5-422E-B77F-D46333736DED}"/>
               </a:ext>
             </a:extLst>
           </p:cNvPr>
@@ -10822,7 +10727,7 @@
           <p:cNvPr id="8" name="">
             <a:extLst xmlns:a="http://schemas.openxmlformats.org/drawingml/2006/main">
               <a:ext uri="{FF2B5EF4-FFF2-40B4-BE49-F238E27FC236}">
-                <a16:creationId xmlns:a16="http://schemas.microsoft.com/office/drawing/2014/main" id="{1AF431C6-4625-4EB6-B1F4-BA8BD90994CB}"/>
+                <a16:creationId xmlns:a16="http://schemas.microsoft.com/office/drawing/2014/main" id="{AEE9442F-C3AC-49CE-B648-B76BBC9AB6CA}"/>
               </a:ext>
             </a:extLst>
           </p:cNvPr>
@@ -10872,7 +10777,7 @@
           <p:cNvPr id="9" name="">
             <a:extLst xmlns:a="http://schemas.openxmlformats.org/drawingml/2006/main">
               <a:ext uri="{FF2B5EF4-FFF2-40B4-BE49-F238E27FC236}">
-                <a16:creationId xmlns:a16="http://schemas.microsoft.com/office/drawing/2014/main" id="{BE337C31-8945-4D70-8AF2-45DB1C7AC261}"/>
+                <a16:creationId xmlns:a16="http://schemas.microsoft.com/office/drawing/2014/main" id="{CDC74016-90E1-4B9E-BC10-1C567E906D41}"/>
               </a:ext>
             </a:extLst>
           </p:cNvPr>
@@ -10905,7 +10810,7 @@
           <p:cNvPr id="10" name="">
             <a:extLst xmlns:a="http://schemas.openxmlformats.org/drawingml/2006/main">
               <a:ext uri="{FF2B5EF4-FFF2-40B4-BE49-F238E27FC236}">
-                <a16:creationId xmlns:a16="http://schemas.microsoft.com/office/drawing/2014/main" id="{4AE044DF-C526-4E0B-A141-1F97399D1F90}"/>
+                <a16:creationId xmlns:a16="http://schemas.microsoft.com/office/drawing/2014/main" id="{3A6E3DDD-BD0E-44C1-A9F0-2B9D009203A9}"/>
               </a:ext>
             </a:extLst>
           </p:cNvPr>
@@ -10955,7 +10860,7 @@
           <p:cNvPr id="11" name="">
             <a:extLst xmlns:a="http://schemas.openxmlformats.org/drawingml/2006/main">
               <a:ext uri="{FF2B5EF4-FFF2-40B4-BE49-F238E27FC236}">
-                <a16:creationId xmlns:a16="http://schemas.microsoft.com/office/drawing/2014/main" id="{24A41BB6-086C-4C9D-B533-DC380E94A4F7}"/>
+                <a16:creationId xmlns:a16="http://schemas.microsoft.com/office/drawing/2014/main" id="{3B68CF34-057E-486B-B600-5A0C3174D07A}"/>
               </a:ext>
             </a:extLst>
           </p:cNvPr>
@@ -10988,7 +10893,7 @@
           <p:cNvPr id="12" name="">
             <a:extLst xmlns:a="http://schemas.openxmlformats.org/drawingml/2006/main">
               <a:ext uri="{FF2B5EF4-FFF2-40B4-BE49-F238E27FC236}">
-                <a16:creationId xmlns:a16="http://schemas.microsoft.com/office/drawing/2014/main" id="{CDB82662-D572-419F-86D1-E44DFA6AEA3E}"/>
+                <a16:creationId xmlns:a16="http://schemas.microsoft.com/office/drawing/2014/main" id="{34B82FBC-85E7-4D4D-9D58-BBCD48AACAB2}"/>
               </a:ext>
             </a:extLst>
           </p:cNvPr>
@@ -11038,7 +10943,7 @@
           <p:cNvPr id="13" name="">
             <a:extLst xmlns:a="http://schemas.openxmlformats.org/drawingml/2006/main">
               <a:ext uri="{FF2B5EF4-FFF2-40B4-BE49-F238E27FC236}">
-                <a16:creationId xmlns:a16="http://schemas.microsoft.com/office/drawing/2014/main" id="{1904B380-B45F-4E1E-A7F3-21A36F613D3C}"/>
+                <a16:creationId xmlns:a16="http://schemas.microsoft.com/office/drawing/2014/main" id="{868ED94F-F629-4B8E-B1D9-A7A96342BBD8}"/>
               </a:ext>
             </a:extLst>
           </p:cNvPr>
@@ -11071,7 +10976,7 @@
           <p:cNvPr id="14" name="">
             <a:extLst xmlns:a="http://schemas.openxmlformats.org/drawingml/2006/main">
               <a:ext uri="{FF2B5EF4-FFF2-40B4-BE49-F238E27FC236}">
-                <a16:creationId xmlns:a16="http://schemas.microsoft.com/office/drawing/2014/main" id="{58D08B61-4D95-403C-A407-F56FE5F73CF6}"/>
+                <a16:creationId xmlns:a16="http://schemas.microsoft.com/office/drawing/2014/main" id="{E165A2B3-86FA-4A67-B40E-C6CAC3C4F003}"/>
               </a:ext>
             </a:extLst>
           </p:cNvPr>
@@ -11119,7 +11024,7 @@
     </p:spTree>
     <p:extLst>
       <p:ext uri="{BB962C8B-B14F-4D97-AF65-F5344CB8AC3E}">
-        <p14:creationId xmlns:p14="http://schemas.microsoft.com/office/powerpoint/2010/main" val="1223820444"/>
+        <p14:creationId xmlns:p14="http://schemas.microsoft.com/office/powerpoint/2010/main" val="1496837576"/>
       </p:ext>
     </p:extLst>
   </p:cSld>
@@ -11147,10 +11052,10 @@
       </p:grpSpPr>
       <p:sp>
         <p:nvSpPr>
-          <p:cNvPr id="1" name="">
-            <a:extLst xmlns:a="http://schemas.openxmlformats.org/drawingml/2006/main">
-              <a:ext uri="{FF2B5EF4-FFF2-40B4-BE49-F238E27FC236}">
-                <a16:creationId xmlns:a16="http://schemas.microsoft.com/office/drawing/2014/main" id="{49F59139-035A-41E3-BF9B-FDF5F912BED5}"/>
+          <p:cNvPr id="8" name="">
+            <a:extLst xmlns:a="http://schemas.openxmlformats.org/drawingml/2006/main">
+              <a:ext uri="{FF2B5EF4-FFF2-40B4-BE49-F238E27FC236}">
+                <a16:creationId xmlns:a16="http://schemas.microsoft.com/office/drawing/2014/main" id="{60F33C72-403E-4AF7-9C1C-29C3EA51131A}"/>
               </a:ext>
             </a:extLst>
           </p:cNvPr>
@@ -11200,7 +11105,7 @@
           <p:cNvPr id="2" name="a4-title-23">
             <a:extLst xmlns:a="http://schemas.openxmlformats.org/drawingml/2006/main">
               <a:ext uri="{FF2B5EF4-FFF2-40B4-BE49-F238E27FC236}">
-                <a16:creationId xmlns:a16="http://schemas.microsoft.com/office/drawing/2014/main" id="{B50C544E-899D-4B85-A5D5-45FABB0899E0}"/>
+                <a16:creationId xmlns:a16="http://schemas.microsoft.com/office/drawing/2014/main" id="{938E881D-63D9-4F62-A55A-CA23BC32F33E}"/>
               </a:ext>
             </a:extLst>
           </p:cNvPr>
@@ -11250,7 +11155,7 @@
           <p:cNvPr id="3" name="">
             <a:extLst xmlns:a="http://schemas.openxmlformats.org/drawingml/2006/main">
               <a:ext uri="{FF2B5EF4-FFF2-40B4-BE49-F238E27FC236}">
-                <a16:creationId xmlns:a16="http://schemas.microsoft.com/office/drawing/2014/main" id="{8ED28DA6-0306-4DC8-AA22-016339B32F06}"/>
+                <a16:creationId xmlns:a16="http://schemas.microsoft.com/office/drawing/2014/main" id="{BB136D97-43D9-49A2-BFAC-A1EEA2987575}"/>
               </a:ext>
             </a:extLst>
           </p:cNvPr>
@@ -11281,7 +11186,7 @@
           <p:cNvPr id="4" name="">
             <a:extLst xmlns:a="http://schemas.openxmlformats.org/drawingml/2006/main">
               <a:ext uri="{FF2B5EF4-FFF2-40B4-BE49-F238E27FC236}">
-                <a16:creationId xmlns:a16="http://schemas.microsoft.com/office/drawing/2014/main" id="{704B8C4F-73B4-4462-9DBF-8B773DE45258}"/>
+                <a16:creationId xmlns:a16="http://schemas.microsoft.com/office/drawing/2014/main" id="{94D2CB40-32F0-4D4A-A188-897DA4F46A4E}"/>
               </a:ext>
             </a:extLst>
           </p:cNvPr>
@@ -11331,7 +11236,7 @@
           <p:cNvPr id="5" name="">
             <a:extLst xmlns:a="http://schemas.openxmlformats.org/drawingml/2006/main">
               <a:ext uri="{FF2B5EF4-FFF2-40B4-BE49-F238E27FC236}">
-                <a16:creationId xmlns:a16="http://schemas.microsoft.com/office/drawing/2014/main" id="{C36512F6-BBDF-4473-8671-BE05364E87ED}"/>
+                <a16:creationId xmlns:a16="http://schemas.microsoft.com/office/drawing/2014/main" id="{DBBC5C29-F1D0-4A9F-BE52-2D37CBD056A4}"/>
               </a:ext>
             </a:extLst>
           </p:cNvPr>
@@ -11370,13 +11275,13 @@
           <p:nvPr/>
         </p:nvPicPr>
         <p:blipFill>
-          <a:blip xmlns:r="http://schemas.openxmlformats.org/officeDocument/2006/relationships" xmlns:a="http://schemas.openxmlformats.org/drawingml/2006/main" r:embed="R345d9db5ea544b0d"/>
+          <a:blip xmlns:r="http://schemas.openxmlformats.org/officeDocument/2006/relationships" xmlns:a="http://schemas.openxmlformats.org/drawingml/2006/main" r:embed="Rda67c7d5e6a24a8b"/>
           <a:stretch xmlns:a="http://schemas.openxmlformats.org/drawingml/2006/main"/>
         </p:blipFill>
         <p:spPr>
           <a:xfrm xmlns:a="http://schemas.openxmlformats.org/drawingml/2006/main">
-            <a:off x="1427717" y="1847850"/>
-            <a:ext cx="4707416" cy="6667500"/>
+            <a:off x="1074259" y="1847850"/>
+            <a:ext cx="5414331" cy="6667500"/>
           </a:xfrm>
           <a:prstGeom xmlns:a="http://schemas.openxmlformats.org/drawingml/2006/main" prst="rect">
             <a:avLst/>
@@ -11388,7 +11293,7 @@
           <p:cNvPr id="7" name="">
             <a:extLst xmlns:a="http://schemas.openxmlformats.org/drawingml/2006/main">
               <a:ext uri="{FF2B5EF4-FFF2-40B4-BE49-F238E27FC236}">
-                <a16:creationId xmlns:a16="http://schemas.microsoft.com/office/drawing/2014/main" id="{B6507962-66A2-49F4-ADC3-9AFF72940ED8}"/>
+                <a16:creationId xmlns:a16="http://schemas.microsoft.com/office/drawing/2014/main" id="{13992D83-958E-41DB-8CB8-3CF0563A0566}"/>
               </a:ext>
             </a:extLst>
           </p:cNvPr>
@@ -11436,7 +11341,7 @@
     </p:spTree>
     <p:extLst>
       <p:ext uri="{BB962C8B-B14F-4D97-AF65-F5344CB8AC3E}">
-        <p14:creationId xmlns:p14="http://schemas.microsoft.com/office/powerpoint/2010/main" val="325510062"/>
+        <p14:creationId xmlns:p14="http://schemas.microsoft.com/office/powerpoint/2010/main" val="1829162574"/>
       </p:ext>
     </p:extLst>
   </p:cSld>
@@ -11464,10 +11369,10 @@
       </p:grpSpPr>
       <p:sp>
         <p:nvSpPr>
-          <p:cNvPr id="1" name="">
-            <a:extLst xmlns:a="http://schemas.openxmlformats.org/drawingml/2006/main">
-              <a:ext uri="{FF2B5EF4-FFF2-40B4-BE49-F238E27FC236}">
-                <a16:creationId xmlns:a16="http://schemas.microsoft.com/office/drawing/2014/main" id="{F9539C04-0C0E-47DD-91E5-D5F92848A976}"/>
+          <p:cNvPr id="8" name="">
+            <a:extLst xmlns:a="http://schemas.openxmlformats.org/drawingml/2006/main">
+              <a:ext uri="{FF2B5EF4-FFF2-40B4-BE49-F238E27FC236}">
+                <a16:creationId xmlns:a16="http://schemas.microsoft.com/office/drawing/2014/main" id="{B24ECBC1-DBB2-40E0-84A3-532ADADD6D37}"/>
               </a:ext>
             </a:extLst>
           </p:cNvPr>
@@ -11517,7 +11422,7 @@
           <p:cNvPr id="2" name="a4-title-24">
             <a:extLst xmlns:a="http://schemas.openxmlformats.org/drawingml/2006/main">
               <a:ext uri="{FF2B5EF4-FFF2-40B4-BE49-F238E27FC236}">
-                <a16:creationId xmlns:a16="http://schemas.microsoft.com/office/drawing/2014/main" id="{8952CC77-6DC3-4CB9-9A65-4432D6D8F641}"/>
+                <a16:creationId xmlns:a16="http://schemas.microsoft.com/office/drawing/2014/main" id="{0FCD0FC2-7099-40F7-82B4-80C7BB28802E}"/>
               </a:ext>
             </a:extLst>
           </p:cNvPr>
@@ -11557,7 +11462,7 @@
                   <a:srgbClr val="25242B"/>
                 </a:solidFill>
               </a:rPr>
-              <a:t>5–10 分钟讲完一条学习故事</a:t>
+              <a:t>5–10 分钟讲完一条 iPhone + Web 学习故事</a:t>
             </a:r>
           </a:p>
         </p:txBody>
@@ -11567,7 +11472,7 @@
           <p:cNvPr id="3" name="">
             <a:extLst xmlns:a="http://schemas.openxmlformats.org/drawingml/2006/main">
               <a:ext uri="{FF2B5EF4-FFF2-40B4-BE49-F238E27FC236}">
-                <a16:creationId xmlns:a16="http://schemas.microsoft.com/office/drawing/2014/main" id="{001B949E-E14E-489E-BE69-F3883263C8F6}"/>
+                <a16:creationId xmlns:a16="http://schemas.microsoft.com/office/drawing/2014/main" id="{AF39FF50-C3FE-4A81-BA2F-D0B529B61DB6}"/>
               </a:ext>
             </a:extLst>
           </p:cNvPr>
@@ -11598,7 +11503,7 @@
           <p:cNvPr id="4" name="">
             <a:extLst xmlns:a="http://schemas.openxmlformats.org/drawingml/2006/main">
               <a:ext uri="{FF2B5EF4-FFF2-40B4-BE49-F238E27FC236}">
-                <a16:creationId xmlns:a16="http://schemas.microsoft.com/office/drawing/2014/main" id="{F1778382-8DB6-4D75-85BF-6F3D8C9B2237}"/>
+                <a16:creationId xmlns:a16="http://schemas.microsoft.com/office/drawing/2014/main" id="{EA2544E9-FBB7-4EAD-A48C-83A32F878C81}"/>
               </a:ext>
             </a:extLst>
           </p:cNvPr>
@@ -11648,7 +11553,7 @@
           <p:cNvPr id="5" name="">
             <a:extLst xmlns:a="http://schemas.openxmlformats.org/drawingml/2006/main">
               <a:ext uri="{FF2B5EF4-FFF2-40B4-BE49-F238E27FC236}">
-                <a16:creationId xmlns:a16="http://schemas.microsoft.com/office/drawing/2014/main" id="{3E76479E-5E20-4AFB-B07C-EF0DC6AAFAD1}"/>
+                <a16:creationId xmlns:a16="http://schemas.microsoft.com/office/drawing/2014/main" id="{C35F8FAB-9390-4ADA-9DDA-ABBDEB89AEA0}"/>
               </a:ext>
             </a:extLst>
           </p:cNvPr>
@@ -11687,13 +11592,13 @@
           <p:nvPr/>
         </p:nvPicPr>
         <p:blipFill>
-          <a:blip xmlns:r="http://schemas.openxmlformats.org/officeDocument/2006/relationships" xmlns:a="http://schemas.openxmlformats.org/drawingml/2006/main" r:embed="R9f94879a6c0f4544"/>
+          <a:blip xmlns:r="http://schemas.openxmlformats.org/officeDocument/2006/relationships" xmlns:a="http://schemas.openxmlformats.org/drawingml/2006/main" r:embed="R0d6da6f75c4b4e0e"/>
           <a:stretch xmlns:a="http://schemas.openxmlformats.org/drawingml/2006/main"/>
         </p:blipFill>
         <p:spPr>
           <a:xfrm xmlns:a="http://schemas.openxmlformats.org/drawingml/2006/main">
-            <a:off x="781050" y="5004108"/>
-            <a:ext cx="6000750" cy="354985"/>
+            <a:off x="781050" y="4937735"/>
+            <a:ext cx="6000750" cy="487729"/>
           </a:xfrm>
           <a:prstGeom xmlns:a="http://schemas.openxmlformats.org/drawingml/2006/main" prst="rect">
             <a:avLst/>
@@ -11705,7 +11610,7 @@
           <p:cNvPr id="7" name="">
             <a:extLst xmlns:a="http://schemas.openxmlformats.org/drawingml/2006/main">
               <a:ext uri="{FF2B5EF4-FFF2-40B4-BE49-F238E27FC236}">
-                <a16:creationId xmlns:a16="http://schemas.microsoft.com/office/drawing/2014/main" id="{B07B2BD7-EE0A-462E-B4C4-0A6C644A744F}"/>
+                <a16:creationId xmlns:a16="http://schemas.microsoft.com/office/drawing/2014/main" id="{F2553E46-7AA5-4428-8609-9FF38E9088EE}"/>
               </a:ext>
             </a:extLst>
           </p:cNvPr>
@@ -11745,7 +11650,7 @@
                   <a:srgbClr val="6F6C76"/>
                 </a:solidFill>
               </a:rPr>
-              <a:t>建议用 CS336 贯穿 Today、Timer/Quick Log、Proof、Project Detail 和 Weekly Review。</a:t>
+              <a:t>建议用 CS336 贯穿 Today、Routine/Timer、Proof、Trail、Stage/Weekly Review 和 guarded Web plan decision。</a:t>
             </a:r>
           </a:p>
         </p:txBody>
@@ -11753,7 +11658,7 @@
     </p:spTree>
     <p:extLst>
       <p:ext uri="{BB962C8B-B14F-4D97-AF65-F5344CB8AC3E}">
-        <p14:creationId xmlns:p14="http://schemas.microsoft.com/office/powerpoint/2010/main" val="58237105"/>
+        <p14:creationId xmlns:p14="http://schemas.microsoft.com/office/powerpoint/2010/main" val="771025203"/>
       </p:ext>
     </p:extLst>
   </p:cSld>
@@ -11781,10 +11686,10 @@
       </p:grpSpPr>
       <p:sp>
         <p:nvSpPr>
-          <p:cNvPr id="1" name="">
-            <a:extLst xmlns:a="http://schemas.openxmlformats.org/drawingml/2006/main">
-              <a:ext uri="{FF2B5EF4-FFF2-40B4-BE49-F238E27FC236}">
-                <a16:creationId xmlns:a16="http://schemas.microsoft.com/office/drawing/2014/main" id="{E30D5E77-6C1B-4793-AA18-BCEAF9B615DE}"/>
+          <p:cNvPr id="17" name="">
+            <a:extLst xmlns:a="http://schemas.openxmlformats.org/drawingml/2006/main">
+              <a:ext uri="{FF2B5EF4-FFF2-40B4-BE49-F238E27FC236}">
+                <a16:creationId xmlns:a16="http://schemas.microsoft.com/office/drawing/2014/main" id="{5F0E5ED7-6C12-4F2D-9491-E65ADEC88D0D}"/>
               </a:ext>
             </a:extLst>
           </p:cNvPr>
@@ -11834,7 +11739,7 @@
           <p:cNvPr id="2" name="a4-title-25">
             <a:extLst xmlns:a="http://schemas.openxmlformats.org/drawingml/2006/main">
               <a:ext uri="{FF2B5EF4-FFF2-40B4-BE49-F238E27FC236}">
-                <a16:creationId xmlns:a16="http://schemas.microsoft.com/office/drawing/2014/main" id="{70586CF1-F14F-420B-B8D3-A23629771A4A}"/>
+                <a16:creationId xmlns:a16="http://schemas.microsoft.com/office/drawing/2014/main" id="{D6457E1B-6013-43F1-AC1A-FB00D16AF0C5}"/>
               </a:ext>
             </a:extLst>
           </p:cNvPr>
@@ -11884,7 +11789,7 @@
           <p:cNvPr id="3" name="">
             <a:extLst xmlns:a="http://schemas.openxmlformats.org/drawingml/2006/main">
               <a:ext uri="{FF2B5EF4-FFF2-40B4-BE49-F238E27FC236}">
-                <a16:creationId xmlns:a16="http://schemas.microsoft.com/office/drawing/2014/main" id="{40CFBC78-639F-42A8-A652-9D87539E43F2}"/>
+                <a16:creationId xmlns:a16="http://schemas.microsoft.com/office/drawing/2014/main" id="{94AAB146-9581-435A-9D57-077A3A198662}"/>
               </a:ext>
             </a:extLst>
           </p:cNvPr>
@@ -11915,7 +11820,7 @@
           <p:cNvPr id="4" name="">
             <a:extLst xmlns:a="http://schemas.openxmlformats.org/drawingml/2006/main">
               <a:ext uri="{FF2B5EF4-FFF2-40B4-BE49-F238E27FC236}">
-                <a16:creationId xmlns:a16="http://schemas.microsoft.com/office/drawing/2014/main" id="{7557A2F1-12FC-4E1C-9AB9-D7C0D84C82B6}"/>
+                <a16:creationId xmlns:a16="http://schemas.microsoft.com/office/drawing/2014/main" id="{6F6810CF-5F35-466A-A444-AC5C64EE03CD}"/>
               </a:ext>
             </a:extLst>
           </p:cNvPr>
@@ -11965,7 +11870,7 @@
           <p:cNvPr id="5" name="">
             <a:extLst xmlns:a="http://schemas.openxmlformats.org/drawingml/2006/main">
               <a:ext uri="{FF2B5EF4-FFF2-40B4-BE49-F238E27FC236}">
-                <a16:creationId xmlns:a16="http://schemas.microsoft.com/office/drawing/2014/main" id="{E64BD608-98B8-4F7A-A460-001D4FD19945}"/>
+                <a16:creationId xmlns:a16="http://schemas.microsoft.com/office/drawing/2014/main" id="{7901CCCD-5F79-4557-97E2-428D168E5280}"/>
               </a:ext>
             </a:extLst>
           </p:cNvPr>
@@ -11996,7 +11901,7 @@
           <p:cNvPr id="6" name="">
             <a:extLst xmlns:a="http://schemas.openxmlformats.org/drawingml/2006/main">
               <a:ext uri="{FF2B5EF4-FFF2-40B4-BE49-F238E27FC236}">
-                <a16:creationId xmlns:a16="http://schemas.microsoft.com/office/drawing/2014/main" id="{7628FD98-026D-4273-A759-730206888270}"/>
+                <a16:creationId xmlns:a16="http://schemas.microsoft.com/office/drawing/2014/main" id="{C85A5F1B-31BA-4C5B-B455-396A6ADE9C6E}"/>
               </a:ext>
             </a:extLst>
           </p:cNvPr>
@@ -12046,7 +11951,7 @@
           <p:cNvPr id="7" name="">
             <a:extLst xmlns:a="http://schemas.openxmlformats.org/drawingml/2006/main">
               <a:ext uri="{FF2B5EF4-FFF2-40B4-BE49-F238E27FC236}">
-                <a16:creationId xmlns:a16="http://schemas.microsoft.com/office/drawing/2014/main" id="{8FC37597-AB80-456C-8877-8748E30617AF}"/>
+                <a16:creationId xmlns:a16="http://schemas.microsoft.com/office/drawing/2014/main" id="{7C257B36-4839-47C7-8FFD-FE4CC3AFDCC4}"/>
               </a:ext>
             </a:extLst>
           </p:cNvPr>
@@ -12096,7 +12001,7 @@
           <p:cNvPr id="8" name="">
             <a:extLst xmlns:a="http://schemas.openxmlformats.org/drawingml/2006/main">
               <a:ext uri="{FF2B5EF4-FFF2-40B4-BE49-F238E27FC236}">
-                <a16:creationId xmlns:a16="http://schemas.microsoft.com/office/drawing/2014/main" id="{3B562C28-5311-4428-AE04-91266BF3B8EA}"/>
+                <a16:creationId xmlns:a16="http://schemas.microsoft.com/office/drawing/2014/main" id="{626B4017-A5B1-40A8-A1EE-8F3AF5F336E7}"/>
               </a:ext>
             </a:extLst>
           </p:cNvPr>
@@ -12146,7 +12051,7 @@
           <p:cNvPr id="9" name="">
             <a:extLst xmlns:a="http://schemas.openxmlformats.org/drawingml/2006/main">
               <a:ext uri="{FF2B5EF4-FFF2-40B4-BE49-F238E27FC236}">
-                <a16:creationId xmlns:a16="http://schemas.microsoft.com/office/drawing/2014/main" id="{5275204D-02E1-4E3E-89DF-3BA1EA177510}"/>
+                <a16:creationId xmlns:a16="http://schemas.microsoft.com/office/drawing/2014/main" id="{E5C32E29-D88E-420C-87BB-5050ADA3510D}"/>
               </a:ext>
             </a:extLst>
           </p:cNvPr>
@@ -12196,7 +12101,7 @@
           <p:cNvPr id="10" name="">
             <a:extLst xmlns:a="http://schemas.openxmlformats.org/drawingml/2006/main">
               <a:ext uri="{FF2B5EF4-FFF2-40B4-BE49-F238E27FC236}">
-                <a16:creationId xmlns:a16="http://schemas.microsoft.com/office/drawing/2014/main" id="{89779691-4992-4AC3-8464-DBF23581F53F}"/>
+                <a16:creationId xmlns:a16="http://schemas.microsoft.com/office/drawing/2014/main" id="{4DC7C505-354F-4DF8-AFD8-16B32EF54A83}"/>
               </a:ext>
             </a:extLst>
           </p:cNvPr>
@@ -12246,7 +12151,7 @@
           <p:cNvPr id="11" name="">
             <a:extLst xmlns:a="http://schemas.openxmlformats.org/drawingml/2006/main">
               <a:ext uri="{FF2B5EF4-FFF2-40B4-BE49-F238E27FC236}">
-                <a16:creationId xmlns:a16="http://schemas.microsoft.com/office/drawing/2014/main" id="{8EEB8047-7836-4BB5-B7A3-EF486CDC1212}"/>
+                <a16:creationId xmlns:a16="http://schemas.microsoft.com/office/drawing/2014/main" id="{254B9E6A-E971-4FC6-B2AE-A06DB75D12E7}"/>
               </a:ext>
             </a:extLst>
           </p:cNvPr>
@@ -12296,7 +12201,7 @@
           <p:cNvPr id="12" name="">
             <a:extLst xmlns:a="http://schemas.openxmlformats.org/drawingml/2006/main">
               <a:ext uri="{FF2B5EF4-FFF2-40B4-BE49-F238E27FC236}">
-                <a16:creationId xmlns:a16="http://schemas.microsoft.com/office/drawing/2014/main" id="{E943CDCB-3DD6-423A-B0CB-6F9F8ED78ED2}"/>
+                <a16:creationId xmlns:a16="http://schemas.microsoft.com/office/drawing/2014/main" id="{73C9810B-C8CD-45C7-9E29-CBBC3A7EA280}"/>
               </a:ext>
             </a:extLst>
           </p:cNvPr>
@@ -12346,7 +12251,7 @@
           <p:cNvPr id="13" name="">
             <a:extLst xmlns:a="http://schemas.openxmlformats.org/drawingml/2006/main">
               <a:ext uri="{FF2B5EF4-FFF2-40B4-BE49-F238E27FC236}">
-                <a16:creationId xmlns:a16="http://schemas.microsoft.com/office/drawing/2014/main" id="{47C8EDAB-A911-4000-94C8-33FF8AA2F017}"/>
+                <a16:creationId xmlns:a16="http://schemas.microsoft.com/office/drawing/2014/main" id="{46AEC5BE-7BB1-4C25-B686-89DCF72B3479}"/>
               </a:ext>
             </a:extLst>
           </p:cNvPr>
@@ -12396,7 +12301,7 @@
           <p:cNvPr id="14" name="">
             <a:extLst xmlns:a="http://schemas.openxmlformats.org/drawingml/2006/main">
               <a:ext uri="{FF2B5EF4-FFF2-40B4-BE49-F238E27FC236}">
-                <a16:creationId xmlns:a16="http://schemas.microsoft.com/office/drawing/2014/main" id="{C71DDFE5-DB75-49AD-86DB-7201D1564F76}"/>
+                <a16:creationId xmlns:a16="http://schemas.microsoft.com/office/drawing/2014/main" id="{BD7E27A7-6FEF-4475-8857-DCA2EB93AACF}"/>
               </a:ext>
             </a:extLst>
           </p:cNvPr>
@@ -12446,7 +12351,7 @@
           <p:cNvPr id="15" name="">
             <a:extLst xmlns:a="http://schemas.openxmlformats.org/drawingml/2006/main">
               <a:ext uri="{FF2B5EF4-FFF2-40B4-BE49-F238E27FC236}">
-                <a16:creationId xmlns:a16="http://schemas.microsoft.com/office/drawing/2014/main" id="{6DB0E6C3-5A1E-4CD4-88CA-AF4E5ABA7047}"/>
+                <a16:creationId xmlns:a16="http://schemas.microsoft.com/office/drawing/2014/main" id="{15DA6674-5E99-43CC-8FD7-7EC6D20A7A21}"/>
               </a:ext>
             </a:extLst>
           </p:cNvPr>
@@ -12496,7 +12401,7 @@
           <p:cNvPr id="16" name="">
             <a:extLst xmlns:a="http://schemas.openxmlformats.org/drawingml/2006/main">
               <a:ext uri="{FF2B5EF4-FFF2-40B4-BE49-F238E27FC236}">
-                <a16:creationId xmlns:a16="http://schemas.microsoft.com/office/drawing/2014/main" id="{A92E19CE-6656-4CF8-B07D-1AF8179E0A77}"/>
+                <a16:creationId xmlns:a16="http://schemas.microsoft.com/office/drawing/2014/main" id="{3A6E689E-44EB-4D46-992C-8BC58CB3644D}"/>
               </a:ext>
             </a:extLst>
           </p:cNvPr>
@@ -12544,7 +12449,7 @@
     </p:spTree>
     <p:extLst>
       <p:ext uri="{BB962C8B-B14F-4D97-AF65-F5344CB8AC3E}">
-        <p14:creationId xmlns:p14="http://schemas.microsoft.com/office/powerpoint/2010/main" val="145127217"/>
+        <p14:creationId xmlns:p14="http://schemas.microsoft.com/office/powerpoint/2010/main" val="1237025297"/>
       </p:ext>
     </p:extLst>
   </p:cSld>
@@ -12572,10 +12477,10 @@
       </p:grpSpPr>
       <p:sp>
         <p:nvSpPr>
-          <p:cNvPr id="1" name="">
-            <a:extLst xmlns:a="http://schemas.openxmlformats.org/drawingml/2006/main">
-              <a:ext uri="{FF2B5EF4-FFF2-40B4-BE49-F238E27FC236}">
-                <a16:creationId xmlns:a16="http://schemas.microsoft.com/office/drawing/2014/main" id="{92604488-724C-4A89-AAC4-5A6866E0C2FE}"/>
+          <p:cNvPr id="45" name="">
+            <a:extLst xmlns:a="http://schemas.openxmlformats.org/drawingml/2006/main">
+              <a:ext uri="{FF2B5EF4-FFF2-40B4-BE49-F238E27FC236}">
+                <a16:creationId xmlns:a16="http://schemas.microsoft.com/office/drawing/2014/main" id="{65910B0D-5B99-41EA-BC99-A5A1358F7F6D}"/>
               </a:ext>
             </a:extLst>
           </p:cNvPr>
@@ -12625,7 +12530,7 @@
           <p:cNvPr id="2" name="a4-title-26">
             <a:extLst xmlns:a="http://schemas.openxmlformats.org/drawingml/2006/main">
               <a:ext uri="{FF2B5EF4-FFF2-40B4-BE49-F238E27FC236}">
-                <a16:creationId xmlns:a16="http://schemas.microsoft.com/office/drawing/2014/main" id="{1C1F98DB-8914-4B30-A613-AA5F1AE2847E}"/>
+                <a16:creationId xmlns:a16="http://schemas.microsoft.com/office/drawing/2014/main" id="{CABD3EAB-F561-45E7-B797-6C3981E97A54}"/>
               </a:ext>
             </a:extLst>
           </p:cNvPr>
@@ -12665,7 +12570,7 @@
                   <a:srgbClr val="25242B"/>
                 </a:solidFill>
               </a:rPr>
-              <a:t>当前能力与规划能力保持清晰边界</a:t>
+              <a:t>B1–B6 与 C1/C2 本地证据，D1 live gates 单独标注</a:t>
             </a:r>
           </a:p>
         </p:txBody>
@@ -12675,7 +12580,7 @@
           <p:cNvPr id="3" name="">
             <a:extLst xmlns:a="http://schemas.openxmlformats.org/drawingml/2006/main">
               <a:ext uri="{FF2B5EF4-FFF2-40B4-BE49-F238E27FC236}">
-                <a16:creationId xmlns:a16="http://schemas.microsoft.com/office/drawing/2014/main" id="{DEED775C-89D5-4726-B819-9D7CB4F1D83F}"/>
+                <a16:creationId xmlns:a16="http://schemas.microsoft.com/office/drawing/2014/main" id="{9BC49ED6-9A53-4FA4-8FBA-92DC46BE8109}"/>
               </a:ext>
             </a:extLst>
           </p:cNvPr>
@@ -12706,7 +12611,7 @@
           <p:cNvPr id="4" name="">
             <a:extLst xmlns:a="http://schemas.openxmlformats.org/drawingml/2006/main">
               <a:ext uri="{FF2B5EF4-FFF2-40B4-BE49-F238E27FC236}">
-                <a16:creationId xmlns:a16="http://schemas.microsoft.com/office/drawing/2014/main" id="{95DBF8A9-A17E-430B-9121-3139376C99D6}"/>
+                <a16:creationId xmlns:a16="http://schemas.microsoft.com/office/drawing/2014/main" id="{07F54F9F-4B9B-45F6-8297-6E3E8D2511F9}"/>
               </a:ext>
             </a:extLst>
           </p:cNvPr>
@@ -12756,7 +12661,7 @@
           <p:cNvPr id="5" name="">
             <a:extLst xmlns:a="http://schemas.openxmlformats.org/drawingml/2006/main">
               <a:ext uri="{FF2B5EF4-FFF2-40B4-BE49-F238E27FC236}">
-                <a16:creationId xmlns:a16="http://schemas.microsoft.com/office/drawing/2014/main" id="{A4B0BC9C-E281-449B-89F9-8F9FC46445C6}"/>
+                <a16:creationId xmlns:a16="http://schemas.microsoft.com/office/drawing/2014/main" id="{EDDB0216-D149-4C33-85D4-2EA68B8D81F4}"/>
               </a:ext>
             </a:extLst>
           </p:cNvPr>
@@ -12791,7 +12696,7 @@
           <p:cNvPr id="6" name="">
             <a:extLst xmlns:a="http://schemas.openxmlformats.org/drawingml/2006/main">
               <a:ext uri="{FF2B5EF4-FFF2-40B4-BE49-F238E27FC236}">
-                <a16:creationId xmlns:a16="http://schemas.microsoft.com/office/drawing/2014/main" id="{220FFDF5-A3B8-4F1F-8D55-84F07C396851}"/>
+                <a16:creationId xmlns:a16="http://schemas.microsoft.com/office/drawing/2014/main" id="{CC1AB1A4-F356-497E-89CC-CA585BF3A7C1}"/>
               </a:ext>
             </a:extLst>
           </p:cNvPr>
@@ -12824,7 +12729,7 @@
           <p:cNvPr id="7" name="">
             <a:extLst xmlns:a="http://schemas.openxmlformats.org/drawingml/2006/main">
               <a:ext uri="{FF2B5EF4-FFF2-40B4-BE49-F238E27FC236}">
-                <a16:creationId xmlns:a16="http://schemas.microsoft.com/office/drawing/2014/main" id="{A3A2FE56-07E3-4CA9-84D0-06F16D0581CA}"/>
+                <a16:creationId xmlns:a16="http://schemas.microsoft.com/office/drawing/2014/main" id="{8A451CA3-ABD3-432D-862D-E9C5E570F3E6}"/>
               </a:ext>
             </a:extLst>
           </p:cNvPr>
@@ -12874,7 +12779,7 @@
           <p:cNvPr id="8" name="">
             <a:extLst xmlns:a="http://schemas.openxmlformats.org/drawingml/2006/main">
               <a:ext uri="{FF2B5EF4-FFF2-40B4-BE49-F238E27FC236}">
-                <a16:creationId xmlns:a16="http://schemas.microsoft.com/office/drawing/2014/main" id="{63911318-0295-4740-9E22-F3F92B1EA353}"/>
+                <a16:creationId xmlns:a16="http://schemas.microsoft.com/office/drawing/2014/main" id="{4E20136B-6939-4B32-96AF-6C6916BA7BB9}"/>
               </a:ext>
             </a:extLst>
           </p:cNvPr>
@@ -12914,7 +12819,7 @@
                   <a:srgbClr val="25242B"/>
                 </a:solidFill>
               </a:rPr>
-              <a:t>首次启动与 1-3 个 Project</a:t>
+              <a:t>Onboarding 与首条 Session</a:t>
             </a:r>
           </a:p>
         </p:txBody>
@@ -12924,7 +12829,7 @@
           <p:cNvPr id="9" name="">
             <a:extLst xmlns:a="http://schemas.openxmlformats.org/drawingml/2006/main">
               <a:ext uri="{FF2B5EF4-FFF2-40B4-BE49-F238E27FC236}">
-                <a16:creationId xmlns:a16="http://schemas.microsoft.com/office/drawing/2014/main" id="{17A93023-9A8B-4F2B-9E36-27ED13DFA97E}"/>
+                <a16:creationId xmlns:a16="http://schemas.microsoft.com/office/drawing/2014/main" id="{13249DDA-02D5-4ED1-BAB1-D550F972EC96}"/>
               </a:ext>
             </a:extLst>
           </p:cNvPr>
@@ -12964,7 +12869,7 @@
                   <a:srgbClr val="6F6C76"/>
                 </a:solidFill>
               </a:rPr>
-              <a:t>两步 Onboarding 创建当前学习项目，并要求首条 Session。</a:t>
+              <a:t>创建 1–3 个 Project 后完成首条记录，Today 才开放。</a:t>
             </a:r>
           </a:p>
         </p:txBody>
@@ -12974,7 +12879,7 @@
           <p:cNvPr id="10" name="">
             <a:extLst xmlns:a="http://schemas.openxmlformats.org/drawingml/2006/main">
               <a:ext uri="{FF2B5EF4-FFF2-40B4-BE49-F238E27FC236}">
-                <a16:creationId xmlns:a16="http://schemas.microsoft.com/office/drawing/2014/main" id="{5409140D-623B-479A-990C-9C921BC6E7A3}"/>
+                <a16:creationId xmlns:a16="http://schemas.microsoft.com/office/drawing/2014/main" id="{8B2BBF3B-8F4F-44AC-AFBA-C6036C1DEA70}"/>
               </a:ext>
             </a:extLst>
           </p:cNvPr>
@@ -13009,7 +12914,7 @@
           <p:cNvPr id="11" name="">
             <a:extLst xmlns:a="http://schemas.openxmlformats.org/drawingml/2006/main">
               <a:ext uri="{FF2B5EF4-FFF2-40B4-BE49-F238E27FC236}">
-                <a16:creationId xmlns:a16="http://schemas.microsoft.com/office/drawing/2014/main" id="{E4995B0C-2CA5-40D9-AE33-440EA15FA07B}"/>
+                <a16:creationId xmlns:a16="http://schemas.microsoft.com/office/drawing/2014/main" id="{9162A561-794D-48B9-BD3A-7E52604EFBD6}"/>
               </a:ext>
             </a:extLst>
           </p:cNvPr>
@@ -13042,7 +12947,7 @@
           <p:cNvPr id="12" name="">
             <a:extLst xmlns:a="http://schemas.openxmlformats.org/drawingml/2006/main">
               <a:ext uri="{FF2B5EF4-FFF2-40B4-BE49-F238E27FC236}">
-                <a16:creationId xmlns:a16="http://schemas.microsoft.com/office/drawing/2014/main" id="{4EA1E4D4-EEDD-4FBF-BC5C-34231064462C}"/>
+                <a16:creationId xmlns:a16="http://schemas.microsoft.com/office/drawing/2014/main" id="{864B80AA-9D8C-4DCE-B22F-E21096E69D74}"/>
               </a:ext>
             </a:extLst>
           </p:cNvPr>
@@ -13092,7 +12997,7 @@
           <p:cNvPr id="13" name="">
             <a:extLst xmlns:a="http://schemas.openxmlformats.org/drawingml/2006/main">
               <a:ext uri="{FF2B5EF4-FFF2-40B4-BE49-F238E27FC236}">
-                <a16:creationId xmlns:a16="http://schemas.microsoft.com/office/drawing/2014/main" id="{2A18E230-0C70-4B20-A9A1-CDB6102887EB}"/>
+                <a16:creationId xmlns:a16="http://schemas.microsoft.com/office/drawing/2014/main" id="{AF4CFDEC-E01A-4718-B085-5B984E4ACAA7}"/>
               </a:ext>
             </a:extLst>
           </p:cNvPr>
@@ -13132,7 +13037,7 @@
                   <a:srgbClr val="25242B"/>
                 </a:solidFill>
               </a:rPr>
-              <a:t>Quick Log</a:t>
+              <a:t>Learning Plan 与 Plan Revision</a:t>
             </a:r>
           </a:p>
         </p:txBody>
@@ -13142,7 +13047,7 @@
           <p:cNvPr id="14" name="">
             <a:extLst xmlns:a="http://schemas.openxmlformats.org/drawingml/2006/main">
               <a:ext uri="{FF2B5EF4-FFF2-40B4-BE49-F238E27FC236}">
-                <a16:creationId xmlns:a16="http://schemas.microsoft.com/office/drawing/2014/main" id="{AB866E3C-483E-4C6B-ADEC-FB1135382C5A}"/>
+                <a16:creationId xmlns:a16="http://schemas.microsoft.com/office/drawing/2014/main" id="{2F6679AA-F48F-45F8-8365-3F3A2E2F0DAA}"/>
               </a:ext>
             </a:extLst>
           </p:cNvPr>
@@ -13182,7 +13087,7 @@
                   <a:srgbClr val="6F6C76"/>
                 </a:solidFill>
               </a:rPr>
-              <a:t>用预设或自定义时长补记 Session，并可更新 Next Step。</a:t>
+              <a:t>结构性计划变化创建不可变 revision；执行层 Planned Session 仍可单独完成或改期。</a:t>
             </a:r>
           </a:p>
         </p:txBody>
@@ -13192,7 +13097,7 @@
           <p:cNvPr id="15" name="">
             <a:extLst xmlns:a="http://schemas.openxmlformats.org/drawingml/2006/main">
               <a:ext uri="{FF2B5EF4-FFF2-40B4-BE49-F238E27FC236}">
-                <a16:creationId xmlns:a16="http://schemas.microsoft.com/office/drawing/2014/main" id="{18A6E4F3-C768-49BA-9AFE-BE271260BD1F}"/>
+                <a16:creationId xmlns:a16="http://schemas.microsoft.com/office/drawing/2014/main" id="{694C0415-6900-4537-A3E9-65597575122E}"/>
               </a:ext>
             </a:extLst>
           </p:cNvPr>
@@ -13227,7 +13132,7 @@
           <p:cNvPr id="16" name="">
             <a:extLst xmlns:a="http://schemas.openxmlformats.org/drawingml/2006/main">
               <a:ext uri="{FF2B5EF4-FFF2-40B4-BE49-F238E27FC236}">
-                <a16:creationId xmlns:a16="http://schemas.microsoft.com/office/drawing/2014/main" id="{9C6F9ADC-0588-473A-9B38-3921BF333B4A}"/>
+                <a16:creationId xmlns:a16="http://schemas.microsoft.com/office/drawing/2014/main" id="{A427AEFE-79CC-4056-8043-A264812AEBB4}"/>
               </a:ext>
             </a:extLst>
           </p:cNvPr>
@@ -13260,7 +13165,7 @@
           <p:cNvPr id="17" name="">
             <a:extLst xmlns:a="http://schemas.openxmlformats.org/drawingml/2006/main">
               <a:ext uri="{FF2B5EF4-FFF2-40B4-BE49-F238E27FC236}">
-                <a16:creationId xmlns:a16="http://schemas.microsoft.com/office/drawing/2014/main" id="{98825385-0A4F-4309-83BC-CF734818A42E}"/>
+                <a16:creationId xmlns:a16="http://schemas.microsoft.com/office/drawing/2014/main" id="{060881A8-5956-4F88-A5BA-C9E6F8301F4A}"/>
               </a:ext>
             </a:extLst>
           </p:cNvPr>
@@ -13310,7 +13215,7 @@
           <p:cNvPr id="18" name="">
             <a:extLst xmlns:a="http://schemas.openxmlformats.org/drawingml/2006/main">
               <a:ext uri="{FF2B5EF4-FFF2-40B4-BE49-F238E27FC236}">
-                <a16:creationId xmlns:a16="http://schemas.microsoft.com/office/drawing/2014/main" id="{8CC6D532-3D67-4D98-9F62-2D425EDA9707}"/>
+                <a16:creationId xmlns:a16="http://schemas.microsoft.com/office/drawing/2014/main" id="{35096B7E-C329-491E-ABF9-E17D8C917E3F}"/>
               </a:ext>
             </a:extLst>
           </p:cNvPr>
@@ -13350,7 +13255,7 @@
                   <a:srgbClr val="25242B"/>
                 </a:solidFill>
               </a:rPr>
-              <a:t>Proof</a:t>
+              <a:t>Stage Review 与 Qualifying Proof</a:t>
             </a:r>
           </a:p>
         </p:txBody>
@@ -13360,7 +13265,7 @@
           <p:cNvPr id="19" name="">
             <a:extLst xmlns:a="http://schemas.openxmlformats.org/drawingml/2006/main">
               <a:ext uri="{FF2B5EF4-FFF2-40B4-BE49-F238E27FC236}">
-                <a16:creationId xmlns:a16="http://schemas.microsoft.com/office/drawing/2014/main" id="{F366E515-8B94-4621-BBE4-87FBBCA7D535}"/>
+                <a16:creationId xmlns:a16="http://schemas.microsoft.com/office/drawing/2014/main" id="{4261E644-FC32-4FF1-B607-87565D825541}"/>
               </a:ext>
             </a:extLst>
           </p:cNvPr>
@@ -13400,7 +13305,7 @@
                   <a:srgbClr val="6F6C76"/>
                 </a:solidFill>
               </a:rPr>
-              <a:t>添加图片、录音、文件或链接，并查看对应预览。</a:t>
+              <a:t>阶段锚定的 Readiness、Proof Revision、Evidence Contract 验收和显式 Review Decision 可原子发布。</a:t>
             </a:r>
           </a:p>
         </p:txBody>
@@ -13410,7 +13315,7 @@
           <p:cNvPr id="20" name="">
             <a:extLst xmlns:a="http://schemas.openxmlformats.org/drawingml/2006/main">
               <a:ext uri="{FF2B5EF4-FFF2-40B4-BE49-F238E27FC236}">
-                <a16:creationId xmlns:a16="http://schemas.microsoft.com/office/drawing/2014/main" id="{C254FB4D-068A-4188-B5E6-16B5E615FDF9}"/>
+                <a16:creationId xmlns:a16="http://schemas.microsoft.com/office/drawing/2014/main" id="{A266AC88-D4FA-41A3-930C-933D75F63855}"/>
               </a:ext>
             </a:extLst>
           </p:cNvPr>
@@ -13445,7 +13350,7 @@
           <p:cNvPr id="21" name="">
             <a:extLst xmlns:a="http://schemas.openxmlformats.org/drawingml/2006/main">
               <a:ext uri="{FF2B5EF4-FFF2-40B4-BE49-F238E27FC236}">
-                <a16:creationId xmlns:a16="http://schemas.microsoft.com/office/drawing/2014/main" id="{7BB3C653-F1A5-4F24-94BE-E359F18959F5}"/>
+                <a16:creationId xmlns:a16="http://schemas.microsoft.com/office/drawing/2014/main" id="{9E4B777B-2222-4226-8646-74FAF7E085BC}"/>
               </a:ext>
             </a:extLst>
           </p:cNvPr>
@@ -13478,7 +13383,7 @@
           <p:cNvPr id="22" name="">
             <a:extLst xmlns:a="http://schemas.openxmlformats.org/drawingml/2006/main">
               <a:ext uri="{FF2B5EF4-FFF2-40B4-BE49-F238E27FC236}">
-                <a16:creationId xmlns:a16="http://schemas.microsoft.com/office/drawing/2014/main" id="{EC65DA23-20C1-40CB-B160-A45560294300}"/>
+                <a16:creationId xmlns:a16="http://schemas.microsoft.com/office/drawing/2014/main" id="{68323FD5-B012-4CD7-8D25-1B5751A418B3}"/>
               </a:ext>
             </a:extLst>
           </p:cNvPr>
@@ -13528,7 +13433,7 @@
           <p:cNvPr id="23" name="">
             <a:extLst xmlns:a="http://schemas.openxmlformats.org/drawingml/2006/main">
               <a:ext uri="{FF2B5EF4-FFF2-40B4-BE49-F238E27FC236}">
-                <a16:creationId xmlns:a16="http://schemas.microsoft.com/office/drawing/2014/main" id="{1B7B190B-903C-4A85-BCB9-D380F3E320CE}"/>
+                <a16:creationId xmlns:a16="http://schemas.microsoft.com/office/drawing/2014/main" id="{F5BB5D19-8E01-4D7C-BFF4-A557DC5F7CE4}"/>
               </a:ext>
             </a:extLst>
           </p:cNvPr>
@@ -13568,7 +13473,7 @@
                   <a:srgbClr val="25242B"/>
                 </a:solidFill>
               </a:rPr>
-              <a:t>Weekly Review</a:t>
+              <a:t>Planning Window 与 Capacity Check</a:t>
             </a:r>
           </a:p>
         </p:txBody>
@@ -13578,7 +13483,7 @@
           <p:cNvPr id="24" name="">
             <a:extLst xmlns:a="http://schemas.openxmlformats.org/drawingml/2006/main">
               <a:ext uri="{FF2B5EF4-FFF2-40B4-BE49-F238E27FC236}">
-                <a16:creationId xmlns:a16="http://schemas.microsoft.com/office/drawing/2014/main" id="{550A892C-D1BB-4A55-A567-82A812E9FBAE}"/>
+                <a16:creationId xmlns:a16="http://schemas.microsoft.com/office/drawing/2014/main" id="{4A53C7FC-FAAC-4065-8DBD-229186C7DC06}"/>
               </a:ext>
             </a:extLst>
           </p:cNvPr>
@@ -13618,7 +13523,7 @@
                   <a:srgbClr val="6F6C76"/>
                 </a:solidFill>
               </a:rPr>
-              <a:t>生成、编辑并保存 Facts、Patterns、Decisions 和 Next Steps。</a:t>
+              <a:t>按周/项目汇总计划与练习负载，支持 DST 安全的可用时间检查并要求确认。</a:t>
             </a:r>
           </a:p>
         </p:txBody>
@@ -13628,7 +13533,7 @@
           <p:cNvPr id="25" name="">
             <a:extLst xmlns:a="http://schemas.openxmlformats.org/drawingml/2006/main">
               <a:ext uri="{FF2B5EF4-FFF2-40B4-BE49-F238E27FC236}">
-                <a16:creationId xmlns:a16="http://schemas.microsoft.com/office/drawing/2014/main" id="{9FA0FF40-0252-4F4A-A3E0-03BB31C3A237}"/>
+                <a16:creationId xmlns:a16="http://schemas.microsoft.com/office/drawing/2014/main" id="{F1A3911F-B632-4CFF-8BE9-AABA0AF51D29}"/>
               </a:ext>
             </a:extLst>
           </p:cNvPr>
@@ -13663,7 +13568,7 @@
           <p:cNvPr id="26" name="">
             <a:extLst xmlns:a="http://schemas.openxmlformats.org/drawingml/2006/main">
               <a:ext uri="{FF2B5EF4-FFF2-40B4-BE49-F238E27FC236}">
-                <a16:creationId xmlns:a16="http://schemas.microsoft.com/office/drawing/2014/main" id="{F6178993-D553-468D-84EF-89B48123B079}"/>
+                <a16:creationId xmlns:a16="http://schemas.microsoft.com/office/drawing/2014/main" id="{CCBE41F7-3C80-4194-830D-8112A92957C8}"/>
               </a:ext>
             </a:extLst>
           </p:cNvPr>
@@ -13683,7 +13588,7 @@
             </a:avLst>
           </a:prstGeom>
           <a:solidFill xmlns:a="http://schemas.openxmlformats.org/drawingml/2006/main">
-            <a:srgbClr val="F6E7D7"/>
+            <a:srgbClr val="DDEFE8"/>
           </a:solidFill>
           <a:ln xmlns:a="http://schemas.openxmlformats.org/drawingml/2006/main" w="0">
             <a:noFill/>
@@ -13696,7 +13601,7 @@
           <p:cNvPr id="27" name="">
             <a:extLst xmlns:a="http://schemas.openxmlformats.org/drawingml/2006/main">
               <a:ext uri="{FF2B5EF4-FFF2-40B4-BE49-F238E27FC236}">
-                <a16:creationId xmlns:a16="http://schemas.microsoft.com/office/drawing/2014/main" id="{AF6A3084-24DD-4B65-B863-F8D880C6ABCC}"/>
+                <a16:creationId xmlns:a16="http://schemas.microsoft.com/office/drawing/2014/main" id="{0C1EBCE2-3BB5-4598-8765-DEA1408897A8}"/>
               </a:ext>
             </a:extLst>
           </p:cNvPr>
@@ -13726,17 +13631,17 @@
             <a:pPr algn="ctr">
               <a:defRPr sz="975" b="1">
                 <a:solidFill>
-                  <a:srgbClr val="C77932"/>
+                  <a:srgbClr val="34866B"/>
                 </a:solidFill>
               </a:defRPr>
             </a:pPr>
             <a:r>
               <a:rPr sz="975" b="1">
                 <a:solidFill>
-                  <a:srgbClr val="C77932"/>
-                </a:solidFill>
-              </a:rPr>
-              <a:t>部分实现</a:t>
+                  <a:srgbClr val="34866B"/>
+                </a:solidFill>
+              </a:rPr>
+              <a:t>已实现</a:t>
             </a:r>
           </a:p>
         </p:txBody>
@@ -13746,7 +13651,7 @@
           <p:cNvPr id="28" name="">
             <a:extLst xmlns:a="http://schemas.openxmlformats.org/drawingml/2006/main">
               <a:ext uri="{FF2B5EF4-FFF2-40B4-BE49-F238E27FC236}">
-                <a16:creationId xmlns:a16="http://schemas.microsoft.com/office/drawing/2014/main" id="{C7B4606C-455E-4DB3-A206-079C6A02594B}"/>
+                <a16:creationId xmlns:a16="http://schemas.microsoft.com/office/drawing/2014/main" id="{506F8FE6-1274-448C-9AD2-CB198A643CEA}"/>
               </a:ext>
             </a:extLst>
           </p:cNvPr>
@@ -13786,7 +13691,7 @@
                   <a:srgbClr val="25242B"/>
                 </a:solidFill>
               </a:rPr>
-              <a:t>OpenAI-compatible Review</a:t>
+              <a:t>iPhone CloudKit/iCloud</a:t>
             </a:r>
           </a:p>
         </p:txBody>
@@ -13796,7 +13701,7 @@
           <p:cNvPr id="29" name="">
             <a:extLst xmlns:a="http://schemas.openxmlformats.org/drawingml/2006/main">
               <a:ext uri="{FF2B5EF4-FFF2-40B4-BE49-F238E27FC236}">
-                <a16:creationId xmlns:a16="http://schemas.microsoft.com/office/drawing/2014/main" id="{5A348D3D-AD27-4F57-9E65-B36EFCD20C58}"/>
+                <a16:creationId xmlns:a16="http://schemas.microsoft.com/office/drawing/2014/main" id="{5048CD0A-F2CC-40EE-B140-2794BA4900B2}"/>
               </a:ext>
             </a:extLst>
           </p:cNvPr>
@@ -13836,7 +13741,7 @@
                   <a:srgbClr val="6F6C76"/>
                 </a:solidFill>
               </a:rPr>
-              <a:t>配置 Endpoint、Model 与 API Key 后调用 Chat Completions。</a:t>
+              <a:t>账号隔离、outbox、冲突审阅、重试上传与恢复路径已在本地/伪客户端测试覆盖。</a:t>
             </a:r>
           </a:p>
         </p:txBody>
@@ -13846,7 +13751,7 @@
           <p:cNvPr id="30" name="">
             <a:extLst xmlns:a="http://schemas.openxmlformats.org/drawingml/2006/main">
               <a:ext uri="{FF2B5EF4-FFF2-40B4-BE49-F238E27FC236}">
-                <a16:creationId xmlns:a16="http://schemas.microsoft.com/office/drawing/2014/main" id="{54E8D5C7-C00A-4F33-8ABA-647B3F1D4E03}"/>
+                <a16:creationId xmlns:a16="http://schemas.microsoft.com/office/drawing/2014/main" id="{0E18F643-94F2-48B6-B6ED-337DFC654535}"/>
               </a:ext>
             </a:extLst>
           </p:cNvPr>
@@ -13881,7 +13786,7 @@
           <p:cNvPr id="31" name="">
             <a:extLst xmlns:a="http://schemas.openxmlformats.org/drawingml/2006/main">
               <a:ext uri="{FF2B5EF4-FFF2-40B4-BE49-F238E27FC236}">
-                <a16:creationId xmlns:a16="http://schemas.microsoft.com/office/drawing/2014/main" id="{B7E0AA5D-7828-4618-ACFE-75C5B08B4854}"/>
+                <a16:creationId xmlns:a16="http://schemas.microsoft.com/office/drawing/2014/main" id="{89EFDA9E-6F71-476B-8683-B345EAC695C3}"/>
               </a:ext>
             </a:extLst>
           </p:cNvPr>
@@ -13901,7 +13806,7 @@
             </a:avLst>
           </a:prstGeom>
           <a:solidFill xmlns:a="http://schemas.openxmlformats.org/drawingml/2006/main">
-            <a:srgbClr val="DDEFE8"/>
+            <a:srgbClr val="F6E7D7"/>
           </a:solidFill>
           <a:ln xmlns:a="http://schemas.openxmlformats.org/drawingml/2006/main" w="0">
             <a:noFill/>
@@ -13914,7 +13819,7 @@
           <p:cNvPr id="32" name="">
             <a:extLst xmlns:a="http://schemas.openxmlformats.org/drawingml/2006/main">
               <a:ext uri="{FF2B5EF4-FFF2-40B4-BE49-F238E27FC236}">
-                <a16:creationId xmlns:a16="http://schemas.microsoft.com/office/drawing/2014/main" id="{D38BFDA3-A108-48DC-A9B5-2B815BAFA977}"/>
+                <a16:creationId xmlns:a16="http://schemas.microsoft.com/office/drawing/2014/main" id="{B5057F93-FA0C-4E53-AE4E-B690234BDDAC}"/>
               </a:ext>
             </a:extLst>
           </p:cNvPr>
@@ -13944,17 +13849,17 @@
             <a:pPr algn="ctr">
               <a:defRPr sz="975" b="1">
                 <a:solidFill>
-                  <a:srgbClr val="34866B"/>
+                  <a:srgbClr val="C77932"/>
                 </a:solidFill>
               </a:defRPr>
             </a:pPr>
             <a:r>
               <a:rPr sz="975" b="1">
                 <a:solidFill>
-                  <a:srgbClr val="34866B"/>
-                </a:solidFill>
-              </a:rPr>
-              <a:t>已实现</a:t>
+                  <a:srgbClr val="C77932"/>
+                </a:solidFill>
+              </a:rPr>
+              <a:t>部分实现</a:t>
             </a:r>
           </a:p>
         </p:txBody>
@@ -13964,7 +13869,7 @@
           <p:cNvPr id="33" name="">
             <a:extLst xmlns:a="http://schemas.openxmlformats.org/drawingml/2006/main">
               <a:ext uri="{FF2B5EF4-FFF2-40B4-BE49-F238E27FC236}">
-                <a16:creationId xmlns:a16="http://schemas.microsoft.com/office/drawing/2014/main" id="{84C6DBF8-2644-4896-A0EA-99F266FE0A76}"/>
+                <a16:creationId xmlns:a16="http://schemas.microsoft.com/office/drawing/2014/main" id="{49730A19-83BD-465E-8EBE-595A9A4A869D}"/>
               </a:ext>
             </a:extLst>
           </p:cNvPr>
@@ -14004,7 +13909,7 @@
                   <a:srgbClr val="25242B"/>
                 </a:solidFill>
               </a:rPr>
-              <a:t>完整 Bundle 导出</a:t>
+              <a:t>Web C2 guarded writes</a:t>
             </a:r>
           </a:p>
         </p:txBody>
@@ -14014,7 +13919,7 @@
           <p:cNvPr id="34" name="">
             <a:extLst xmlns:a="http://schemas.openxmlformats.org/drawingml/2006/main">
               <a:ext uri="{FF2B5EF4-FFF2-40B4-BE49-F238E27FC236}">
-                <a16:creationId xmlns:a16="http://schemas.microsoft.com/office/drawing/2014/main" id="{51644F86-0270-4D1D-AD92-DEA28B1E18F3}"/>
+                <a16:creationId xmlns:a16="http://schemas.microsoft.com/office/drawing/2014/main" id="{8CC8C591-2528-4E8D-9ACC-2691E6848911}"/>
               </a:ext>
             </a:extLst>
           </p:cNvPr>
@@ -14054,7 +13959,7 @@
                   <a:srgbClr val="6F6C76"/>
                 </a:solidFill>
               </a:rPr>
-              <a:t>一次导出版本化 journal.json 与附件目录。</a:t>
+              <a:t>Next Step、Learning Plan、Routine、Qualifying Proof 与 Stage Review 通过 typed atomic writer 和 change-tag guard。</a:t>
             </a:r>
           </a:p>
         </p:txBody>
@@ -14064,7 +13969,7 @@
           <p:cNvPr id="35" name="">
             <a:extLst xmlns:a="http://schemas.openxmlformats.org/drawingml/2006/main">
               <a:ext uri="{FF2B5EF4-FFF2-40B4-BE49-F238E27FC236}">
-                <a16:creationId xmlns:a16="http://schemas.microsoft.com/office/drawing/2014/main" id="{A126318A-6E87-4391-9E8E-B4A6B0666274}"/>
+                <a16:creationId xmlns:a16="http://schemas.microsoft.com/office/drawing/2014/main" id="{51D062A5-03A2-47F8-AFBC-CCE0F02BEE4A}"/>
               </a:ext>
             </a:extLst>
           </p:cNvPr>
@@ -14099,7 +14004,7 @@
           <p:cNvPr id="36" name="">
             <a:extLst xmlns:a="http://schemas.openxmlformats.org/drawingml/2006/main">
               <a:ext uri="{FF2B5EF4-FFF2-40B4-BE49-F238E27FC236}">
-                <a16:creationId xmlns:a16="http://schemas.microsoft.com/office/drawing/2014/main" id="{2D41CE9C-DD21-43BD-BC52-9337BF207971}"/>
+                <a16:creationId xmlns:a16="http://schemas.microsoft.com/office/drawing/2014/main" id="{80C1D7AF-C55E-463D-9471-8C29A96E0143}"/>
               </a:ext>
             </a:extLst>
           </p:cNvPr>
@@ -14119,7 +14024,7 @@
             </a:avLst>
           </a:prstGeom>
           <a:solidFill xmlns:a="http://schemas.openxmlformats.org/drawingml/2006/main">
-            <a:srgbClr val="E7E2FA"/>
+            <a:srgbClr val="DDEFE8"/>
           </a:solidFill>
           <a:ln xmlns:a="http://schemas.openxmlformats.org/drawingml/2006/main" w="0">
             <a:noFill/>
@@ -14132,7 +14037,7 @@
           <p:cNvPr id="37" name="">
             <a:extLst xmlns:a="http://schemas.openxmlformats.org/drawingml/2006/main">
               <a:ext uri="{FF2B5EF4-FFF2-40B4-BE49-F238E27FC236}">
-                <a16:creationId xmlns:a16="http://schemas.microsoft.com/office/drawing/2014/main" id="{6EC52B76-7F15-4315-9995-DC9B5A124DA9}"/>
+                <a16:creationId xmlns:a16="http://schemas.microsoft.com/office/drawing/2014/main" id="{FAAA8D47-7DF1-45F1-98D9-051E28270A06}"/>
               </a:ext>
             </a:extLst>
           </p:cNvPr>
@@ -14162,17 +14067,17 @@
             <a:pPr algn="ctr">
               <a:defRPr sz="975" b="1">
                 <a:solidFill>
-                  <a:srgbClr val="6657D9"/>
+                  <a:srgbClr val="34866B"/>
                 </a:solidFill>
               </a:defRPr>
             </a:pPr>
             <a:r>
               <a:rPr sz="975" b="1">
                 <a:solidFill>
-                  <a:srgbClr val="6657D9"/>
-                </a:solidFill>
-              </a:rPr>
-              <a:t>已设计</a:t>
+                  <a:srgbClr val="34866B"/>
+                </a:solidFill>
+              </a:rPr>
+              <a:t>已实现</a:t>
             </a:r>
           </a:p>
         </p:txBody>
@@ -14182,7 +14087,7 @@
           <p:cNvPr id="38" name="">
             <a:extLst xmlns:a="http://schemas.openxmlformats.org/drawingml/2006/main">
               <a:ext uri="{FF2B5EF4-FFF2-40B4-BE49-F238E27FC236}">
-                <a16:creationId xmlns:a16="http://schemas.microsoft.com/office/drawing/2014/main" id="{D4B120B2-2037-41D4-BCA5-35E5E8A43E37}"/>
+                <a16:creationId xmlns:a16="http://schemas.microsoft.com/office/drawing/2014/main" id="{16A41DB7-D21A-478A-8C4A-2A57FADB599A}"/>
               </a:ext>
             </a:extLst>
           </p:cNvPr>
@@ -14222,7 +14127,7 @@
                   <a:srgbClr val="25242B"/>
                 </a:solidFill>
               </a:rPr>
-              <a:t>CloudKit/iCloud 私有同步</a:t>
+              <a:t>Calendar 与 EventKit</a:t>
             </a:r>
           </a:p>
         </p:txBody>
@@ -14232,7 +14137,7 @@
           <p:cNvPr id="39" name="">
             <a:extLst xmlns:a="http://schemas.openxmlformats.org/drawingml/2006/main">
               <a:ext uri="{FF2B5EF4-FFF2-40B4-BE49-F238E27FC236}">
-                <a16:creationId xmlns:a16="http://schemas.microsoft.com/office/drawing/2014/main" id="{664C444D-2A7B-49F0-A19F-AF6CF05162F1}"/>
+                <a16:creationId xmlns:a16="http://schemas.microsoft.com/office/drawing/2014/main" id="{4C95F6A2-C110-454B-B213-6A0BD4F84F0B}"/>
               </a:ext>
             </a:extLst>
           </p:cNvPr>
@@ -14272,7 +14177,7 @@
                   <a:srgbClr val="6F6C76"/>
                 </a:solidFill>
               </a:rPr>
-              <a:t>当前 App 不显示同步入口。</a:t>
+              <a:t>日/周/月排课草稿、冲突预览和第二次确认后才写入系统 Calendar。</a:t>
             </a:r>
           </a:p>
         </p:txBody>
@@ -14282,7 +14187,7 @@
           <p:cNvPr id="40" name="">
             <a:extLst xmlns:a="http://schemas.openxmlformats.org/drawingml/2006/main">
               <a:ext uri="{FF2B5EF4-FFF2-40B4-BE49-F238E27FC236}">
-                <a16:creationId xmlns:a16="http://schemas.microsoft.com/office/drawing/2014/main" id="{4F1C2DDB-1852-4DB4-9B6C-B7AA29484FC3}"/>
+                <a16:creationId xmlns:a16="http://schemas.microsoft.com/office/drawing/2014/main" id="{2B347AE0-0523-4C45-88E4-F3C7BD929D74}"/>
               </a:ext>
             </a:extLst>
           </p:cNvPr>
@@ -14317,7 +14222,7 @@
           <p:cNvPr id="41" name="">
             <a:extLst xmlns:a="http://schemas.openxmlformats.org/drawingml/2006/main">
               <a:ext uri="{FF2B5EF4-FFF2-40B4-BE49-F238E27FC236}">
-                <a16:creationId xmlns:a16="http://schemas.microsoft.com/office/drawing/2014/main" id="{996A43A7-7DA9-4C12-9504-AFF7397E69FB}"/>
+                <a16:creationId xmlns:a16="http://schemas.microsoft.com/office/drawing/2014/main" id="{95676133-6AE3-4E24-833B-36719745FD66}"/>
               </a:ext>
             </a:extLst>
           </p:cNvPr>
@@ -14337,7 +14242,7 @@
             </a:avLst>
           </a:prstGeom>
           <a:solidFill xmlns:a="http://schemas.openxmlformats.org/drawingml/2006/main">
-            <a:srgbClr val="E7E2FA"/>
+            <a:srgbClr val="F6E7D7"/>
           </a:solidFill>
           <a:ln xmlns:a="http://schemas.openxmlformats.org/drawingml/2006/main" w="0">
             <a:noFill/>
@@ -14350,7 +14255,7 @@
           <p:cNvPr id="42" name="">
             <a:extLst xmlns:a="http://schemas.openxmlformats.org/drawingml/2006/main">
               <a:ext uri="{FF2B5EF4-FFF2-40B4-BE49-F238E27FC236}">
-                <a16:creationId xmlns:a16="http://schemas.microsoft.com/office/drawing/2014/main" id="{40F60C4E-77A3-437B-97D8-AAA02A71EE16}"/>
+                <a16:creationId xmlns:a16="http://schemas.microsoft.com/office/drawing/2014/main" id="{2C4F6B89-A079-45CB-BB74-DD507C4217B5}"/>
               </a:ext>
             </a:extLst>
           </p:cNvPr>
@@ -14380,17 +14285,17 @@
             <a:pPr algn="ctr">
               <a:defRPr sz="975" b="1">
                 <a:solidFill>
-                  <a:srgbClr val="6657D9"/>
+                  <a:srgbClr val="C77932"/>
                 </a:solidFill>
               </a:defRPr>
             </a:pPr>
             <a:r>
               <a:rPr sz="975" b="1">
                 <a:solidFill>
-                  <a:srgbClr val="6657D9"/>
-                </a:solidFill>
-              </a:rPr>
-              <a:t>已设计</a:t>
+                  <a:srgbClr val="C77932"/>
+                </a:solidFill>
+              </a:rPr>
+              <a:t>部分实现</a:t>
             </a:r>
           </a:p>
         </p:txBody>
@@ -14400,7 +14305,7 @@
           <p:cNvPr id="43" name="">
             <a:extLst xmlns:a="http://schemas.openxmlformats.org/drawingml/2006/main">
               <a:ext uri="{FF2B5EF4-FFF2-40B4-BE49-F238E27FC236}">
-                <a16:creationId xmlns:a16="http://schemas.microsoft.com/office/drawing/2014/main" id="{0D82C31D-9313-4D2B-A9BD-E94BE85B27DC}"/>
+                <a16:creationId xmlns:a16="http://schemas.microsoft.com/office/drawing/2014/main" id="{ABDE5EC8-548B-4D6A-A9F9-A903800A6A80}"/>
               </a:ext>
             </a:extLst>
           </p:cNvPr>
@@ -14440,7 +14345,7 @@
                   <a:srgbClr val="25242B"/>
                 </a:solidFill>
               </a:rPr>
-              <a:t>AI 课程规划与学习日历</a:t>
+              <a:t>D1 本地自动化验收</a:t>
             </a:r>
           </a:p>
         </p:txBody>
@@ -14450,7 +14355,7 @@
           <p:cNvPr id="44" name="">
             <a:extLst xmlns:a="http://schemas.openxmlformats.org/drawingml/2006/main">
               <a:ext uri="{FF2B5EF4-FFF2-40B4-BE49-F238E27FC236}">
-                <a16:creationId xmlns:a16="http://schemas.microsoft.com/office/drawing/2014/main" id="{21B24FBA-98A0-46C8-B647-FE6B9C44303C}"/>
+                <a16:creationId xmlns:a16="http://schemas.microsoft.com/office/drawing/2014/main" id="{FCEC8367-737E-4D40-B6CB-EA7499623A57}"/>
               </a:ext>
             </a:extLst>
           </p:cNvPr>
@@ -14490,7 +14395,7 @@
                   <a:srgbClr val="6F6C76"/>
                 </a:solidFill>
               </a:rPr>
-              <a:t>当前 App 不显示课程规划或 Calendar Tab。</a:t>
+              <a:t>脚本映射 12 个 MVP 场景并运行 Swift/Web 本地检查，报告明确区分本地通过与 live gates。</a:t>
             </a:r>
           </a:p>
         </p:txBody>
@@ -14498,7 +14403,7 @@
     </p:spTree>
     <p:extLst>
       <p:ext uri="{BB962C8B-B14F-4D97-AF65-F5344CB8AC3E}">
-        <p14:creationId xmlns:p14="http://schemas.microsoft.com/office/powerpoint/2010/main" val="1163006364"/>
+        <p14:creationId xmlns:p14="http://schemas.microsoft.com/office/powerpoint/2010/main" val="27351499"/>
       </p:ext>
     </p:extLst>
   </p:cSld>
@@ -14526,10 +14431,10 @@
       </p:grpSpPr>
       <p:sp>
         <p:nvSpPr>
-          <p:cNvPr id="1" name="">
-            <a:extLst xmlns:a="http://schemas.openxmlformats.org/drawingml/2006/main">
-              <a:ext uri="{FF2B5EF4-FFF2-40B4-BE49-F238E27FC236}">
-                <a16:creationId xmlns:a16="http://schemas.microsoft.com/office/drawing/2014/main" id="{FA746539-B7C6-41B4-9693-721192FB8F42}"/>
+          <p:cNvPr id="15" name="">
+            <a:extLst xmlns:a="http://schemas.openxmlformats.org/drawingml/2006/main">
+              <a:ext uri="{FF2B5EF4-FFF2-40B4-BE49-F238E27FC236}">
+                <a16:creationId xmlns:a16="http://schemas.microsoft.com/office/drawing/2014/main" id="{B217CE11-EA79-42C4-8FF0-457EC24C4E39}"/>
               </a:ext>
             </a:extLst>
           </p:cNvPr>
@@ -14579,7 +14484,7 @@
           <p:cNvPr id="2" name="a4-title-27">
             <a:extLst xmlns:a="http://schemas.openxmlformats.org/drawingml/2006/main">
               <a:ext uri="{FF2B5EF4-FFF2-40B4-BE49-F238E27FC236}">
-                <a16:creationId xmlns:a16="http://schemas.microsoft.com/office/drawing/2014/main" id="{E189F0E5-9E3F-40A1-9B2F-567ECE3E0977}"/>
+                <a16:creationId xmlns:a16="http://schemas.microsoft.com/office/drawing/2014/main" id="{4BE3C8C7-8999-495E-9AE0-8DC226B203D3}"/>
               </a:ext>
             </a:extLst>
           </p:cNvPr>
@@ -14629,7 +14534,7 @@
           <p:cNvPr id="3" name="">
             <a:extLst xmlns:a="http://schemas.openxmlformats.org/drawingml/2006/main">
               <a:ext uri="{FF2B5EF4-FFF2-40B4-BE49-F238E27FC236}">
-                <a16:creationId xmlns:a16="http://schemas.microsoft.com/office/drawing/2014/main" id="{1F2CDFC2-5032-4CD3-AB74-2E226609DDBE}"/>
+                <a16:creationId xmlns:a16="http://schemas.microsoft.com/office/drawing/2014/main" id="{E717FF37-9C6E-4583-81E5-8D430C83667E}"/>
               </a:ext>
             </a:extLst>
           </p:cNvPr>
@@ -14660,7 +14565,7 @@
           <p:cNvPr id="4" name="">
             <a:extLst xmlns:a="http://schemas.openxmlformats.org/drawingml/2006/main">
               <a:ext uri="{FF2B5EF4-FFF2-40B4-BE49-F238E27FC236}">
-                <a16:creationId xmlns:a16="http://schemas.microsoft.com/office/drawing/2014/main" id="{8AFD38AF-4097-4936-A283-387931181F0E}"/>
+                <a16:creationId xmlns:a16="http://schemas.microsoft.com/office/drawing/2014/main" id="{C779A35F-C516-4933-91BA-74C844588A35}"/>
               </a:ext>
             </a:extLst>
           </p:cNvPr>
@@ -14710,7 +14615,7 @@
           <p:cNvPr id="5" name="">
             <a:extLst xmlns:a="http://schemas.openxmlformats.org/drawingml/2006/main">
               <a:ext uri="{FF2B5EF4-FFF2-40B4-BE49-F238E27FC236}">
-                <a16:creationId xmlns:a16="http://schemas.microsoft.com/office/drawing/2014/main" id="{C331A9C9-D35F-4D7A-A2C6-188380205A03}"/>
+                <a16:creationId xmlns:a16="http://schemas.microsoft.com/office/drawing/2014/main" id="{4A63ED02-349C-45EB-BACC-25B089FFE2BB}"/>
               </a:ext>
             </a:extLst>
           </p:cNvPr>
@@ -14741,7 +14646,7 @@
           <p:cNvPr id="6" name="">
             <a:extLst xmlns:a="http://schemas.openxmlformats.org/drawingml/2006/main">
               <a:ext uri="{FF2B5EF4-FFF2-40B4-BE49-F238E27FC236}">
-                <a16:creationId xmlns:a16="http://schemas.microsoft.com/office/drawing/2014/main" id="{D6610AF1-2B84-4F05-89B6-E0237D2CAD82}"/>
+                <a16:creationId xmlns:a16="http://schemas.microsoft.com/office/drawing/2014/main" id="{4FBBBE06-2A29-499E-A224-1E684FF5BFED}"/>
               </a:ext>
             </a:extLst>
           </p:cNvPr>
@@ -14791,7 +14696,7 @@
           <p:cNvPr id="7" name="">
             <a:extLst xmlns:a="http://schemas.openxmlformats.org/drawingml/2006/main">
               <a:ext uri="{FF2B5EF4-FFF2-40B4-BE49-F238E27FC236}">
-                <a16:creationId xmlns:a16="http://schemas.microsoft.com/office/drawing/2014/main" id="{9CC72526-A3F1-4B67-9BC6-9791E14E56C5}"/>
+                <a16:creationId xmlns:a16="http://schemas.microsoft.com/office/drawing/2014/main" id="{0E404170-503D-46D0-AD78-BC001648C0B6}"/>
               </a:ext>
             </a:extLst>
           </p:cNvPr>
@@ -14821,17 +14726,17 @@
             <a:pPr algn="l">
               <a:defRPr sz="1575" b="1">
                 <a:solidFill>
-                  <a:srgbClr val="C77932"/>
+                  <a:srgbClr val="6657D9"/>
                 </a:solidFill>
               </a:defRPr>
             </a:pPr>
             <a:r>
               <a:rPr sz="1575" b="1">
                 <a:solidFill>
-                  <a:srgbClr val="C77932"/>
-                </a:solidFill>
-              </a:rPr>
-              <a:t>测试</a:t>
+                  <a:srgbClr val="6657D9"/>
+                </a:solidFill>
+              </a:rPr>
+              <a:t>本地验证</a:t>
             </a:r>
           </a:p>
         </p:txBody>
@@ -14841,7 +14746,7 @@
           <p:cNvPr id="8" name="">
             <a:extLst xmlns:a="http://schemas.openxmlformats.org/drawingml/2006/main">
               <a:ext uri="{FF2B5EF4-FFF2-40B4-BE49-F238E27FC236}">
-                <a16:creationId xmlns:a16="http://schemas.microsoft.com/office/drawing/2014/main" id="{CE002A1E-F887-4794-B516-D340B51F196F}"/>
+                <a16:creationId xmlns:a16="http://schemas.microsoft.com/office/drawing/2014/main" id="{180C9960-EACB-4398-9E6A-8CAB8633EE3A}"/>
               </a:ext>
             </a:extLst>
           </p:cNvPr>
@@ -14881,7 +14786,7 @@
                   <a:srgbClr val="25242B"/>
                 </a:solidFill>
               </a:rPr>
-              <a:t>2026-07-13 执行 50 个测试，49 个通过；OpenAI-compatible Review 解析测试的测试响应缺少 sourceReferences，但断言期望来源映射。</a:t>
+              <a:t>2026-08-09：swift test 446 个测试 0 失败，swift build、Web npm test 63/63、Web lint/build 通过；D1 脚本可映射 12 个本地场景。</a:t>
             </a:r>
           </a:p>
         </p:txBody>
@@ -14891,7 +14796,7 @@
           <p:cNvPr id="9" name="">
             <a:extLst xmlns:a="http://schemas.openxmlformats.org/drawingml/2006/main">
               <a:ext uri="{FF2B5EF4-FFF2-40B4-BE49-F238E27FC236}">
-                <a16:creationId xmlns:a16="http://schemas.microsoft.com/office/drawing/2014/main" id="{7F2E526C-8A2F-4C2C-969D-C12FE0F34C92}"/>
+                <a16:creationId xmlns:a16="http://schemas.microsoft.com/office/drawing/2014/main" id="{ABC5F8C2-10F7-458A-9DDB-B4F9B4EC580B}"/>
               </a:ext>
             </a:extLst>
           </p:cNvPr>
@@ -14931,7 +14836,7 @@
                   <a:srgbClr val="6657D9"/>
                 </a:solidFill>
               </a:rPr>
-              <a:t>设备</a:t>
+              <a:t>实时门禁</a:t>
             </a:r>
           </a:p>
         </p:txBody>
@@ -14941,7 +14846,7 @@
           <p:cNvPr id="10" name="">
             <a:extLst xmlns:a="http://schemas.openxmlformats.org/drawingml/2006/main">
               <a:ext uri="{FF2B5EF4-FFF2-40B4-BE49-F238E27FC236}">
-                <a16:creationId xmlns:a16="http://schemas.microsoft.com/office/drawing/2014/main" id="{F667550A-48D8-4213-9D9C-92ADF411CBA9}"/>
+                <a16:creationId xmlns:a16="http://schemas.microsoft.com/office/drawing/2014/main" id="{70676CFB-22FF-462B-8E89-DC87E90FC8A8}"/>
               </a:ext>
             </a:extLst>
           </p:cNvPr>
@@ -14981,7 +14886,7 @@
                   <a:srgbClr val="25242B"/>
                 </a:solidFill>
               </a:rPr>
-              <a:t>模拟器构建和启动可验证；当前文档不把真机安装描述为已验证。</a:t>
+              <a:t>真机签名安装、真实 CloudKit schema/token/origin/private zone、同账号 iPhone/Web 双端收敛和附件下载仍为 BLOCKED。</a:t>
             </a:r>
           </a:p>
         </p:txBody>
@@ -14991,7 +14896,7 @@
           <p:cNvPr id="11" name="">
             <a:extLst xmlns:a="http://schemas.openxmlformats.org/drawingml/2006/main">
               <a:ext uri="{FF2B5EF4-FFF2-40B4-BE49-F238E27FC236}">
-                <a16:creationId xmlns:a16="http://schemas.microsoft.com/office/drawing/2014/main" id="{C7B9A839-1EA1-4DC7-AF7D-89998A1EE589}"/>
+                <a16:creationId xmlns:a16="http://schemas.microsoft.com/office/drawing/2014/main" id="{30D321A9-507E-4272-9BE0-758F081AC8B6}"/>
               </a:ext>
             </a:extLst>
           </p:cNvPr>
@@ -15031,7 +14936,7 @@
                   <a:srgbClr val="6657D9"/>
                 </a:solidFill>
               </a:rPr>
-              <a:t>同步</a:t>
+              <a:t>Web 边界</a:t>
             </a:r>
           </a:p>
         </p:txBody>
@@ -15041,7 +14946,7 @@
           <p:cNvPr id="12" name="">
             <a:extLst xmlns:a="http://schemas.openxmlformats.org/drawingml/2006/main">
               <a:ext uri="{FF2B5EF4-FFF2-40B4-BE49-F238E27FC236}">
-                <a16:creationId xmlns:a16="http://schemas.microsoft.com/office/drawing/2014/main" id="{F344316B-4194-4F5A-BD7C-3ECF33F4D1CB}"/>
+                <a16:creationId xmlns:a16="http://schemas.microsoft.com/office/drawing/2014/main" id="{15609803-2817-4B1C-97B6-8DF7B4B94A3F}"/>
               </a:ext>
             </a:extLst>
           </p:cNvPr>
@@ -15081,7 +14986,7 @@
                   <a:srgbClr val="25242B"/>
                 </a:solidFill>
               </a:rPr>
-              <a:t>v0.1 为本地优先单设备数据，没有账号、CloudKit 或冲突解决。</a:t>
+              <a:t>Demo fixture 永远 noncanonical 且禁止写入；Real 模式读取并通过 typed atomic writer 写入，但 conditional write 的生产行为尚未验证。</a:t>
             </a:r>
           </a:p>
         </p:txBody>
@@ -15091,7 +14996,7 @@
           <p:cNvPr id="13" name="">
             <a:extLst xmlns:a="http://schemas.openxmlformats.org/drawingml/2006/main">
               <a:ext uri="{FF2B5EF4-FFF2-40B4-BE49-F238E27FC236}">
-                <a16:creationId xmlns:a16="http://schemas.microsoft.com/office/drawing/2014/main" id="{D07F272F-C7EE-4E70-A526-0AA9BE4D2116}"/>
+                <a16:creationId xmlns:a16="http://schemas.microsoft.com/office/drawing/2014/main" id="{4799C6E6-28DD-41B0-A5DC-A45820700492}"/>
               </a:ext>
             </a:extLst>
           </p:cNvPr>
@@ -15131,7 +15036,7 @@
                   <a:srgbClr val="6657D9"/>
                 </a:solidFill>
               </a:rPr>
-              <a:t>AI</a:t>
+              <a:t>交互验收</a:t>
             </a:r>
           </a:p>
         </p:txBody>
@@ -15141,7 +15046,7 @@
           <p:cNvPr id="14" name="">
             <a:extLst xmlns:a="http://schemas.openxmlformats.org/drawingml/2006/main">
               <a:ext uri="{FF2B5EF4-FFF2-40B4-BE49-F238E27FC236}">
-                <a16:creationId xmlns:a16="http://schemas.microsoft.com/office/drawing/2014/main" id="{E51B19FF-EF63-4C1F-AB83-F4AB2CB8904D}"/>
+                <a16:creationId xmlns:a16="http://schemas.microsoft.com/office/drawing/2014/main" id="{7E7C0A46-15C6-458C-9B45-2EE3254A4BF4}"/>
               </a:ext>
             </a:extLst>
           </p:cNvPr>
@@ -15181,7 +15086,7 @@
                   <a:srgbClr val="25242B"/>
                 </a:solidFill>
               </a:rPr>
-              <a:t>AI Review 是可选边界；未配置、请求失败或响应不可解析时使用本地规则。</a:t>
+              <a:t>EventKit 实际写入、浏览器视觉检查、VoiceOver/辅助技术和无 AI/Support Service 的人工完整闭环尚未运行。</a:t>
             </a:r>
           </a:p>
         </p:txBody>
@@ -15189,7 +15094,7 @@
     </p:spTree>
     <p:extLst>
       <p:ext uri="{BB962C8B-B14F-4D97-AF65-F5344CB8AC3E}">
-        <p14:creationId xmlns:p14="http://schemas.microsoft.com/office/powerpoint/2010/main" val="2092756065"/>
+        <p14:creationId xmlns:p14="http://schemas.microsoft.com/office/powerpoint/2010/main" val="1411933239"/>
       </p:ext>
     </p:extLst>
   </p:cSld>
@@ -15217,10 +15122,10 @@
       </p:grpSpPr>
       <p:sp>
         <p:nvSpPr>
-          <p:cNvPr id="1" name="">
-            <a:extLst xmlns:a="http://schemas.openxmlformats.org/drawingml/2006/main">
-              <a:ext uri="{FF2B5EF4-FFF2-40B4-BE49-F238E27FC236}">
-                <a16:creationId xmlns:a16="http://schemas.microsoft.com/office/drawing/2014/main" id="{1676824A-FBC1-476C-86BF-2E8A6291A67F}"/>
+          <p:cNvPr id="15" name="">
+            <a:extLst xmlns:a="http://schemas.openxmlformats.org/drawingml/2006/main">
+              <a:ext uri="{FF2B5EF4-FFF2-40B4-BE49-F238E27FC236}">
+                <a16:creationId xmlns:a16="http://schemas.microsoft.com/office/drawing/2014/main" id="{91FC6A60-C72A-45A4-9434-8E9DA4A73880}"/>
               </a:ext>
             </a:extLst>
           </p:cNvPr>
@@ -15270,7 +15175,7 @@
           <p:cNvPr id="2" name="a4-title-28">
             <a:extLst xmlns:a="http://schemas.openxmlformats.org/drawingml/2006/main">
               <a:ext uri="{FF2B5EF4-FFF2-40B4-BE49-F238E27FC236}">
-                <a16:creationId xmlns:a16="http://schemas.microsoft.com/office/drawing/2014/main" id="{16F48611-CC30-45E2-B8E6-6904F3A06A08}"/>
+                <a16:creationId xmlns:a16="http://schemas.microsoft.com/office/drawing/2014/main" id="{4853C1F8-54F6-4C50-BE9A-AD7107D2ACF5}"/>
               </a:ext>
             </a:extLst>
           </p:cNvPr>
@@ -15320,7 +15225,7 @@
           <p:cNvPr id="3" name="">
             <a:extLst xmlns:a="http://schemas.openxmlformats.org/drawingml/2006/main">
               <a:ext uri="{FF2B5EF4-FFF2-40B4-BE49-F238E27FC236}">
-                <a16:creationId xmlns:a16="http://schemas.microsoft.com/office/drawing/2014/main" id="{E1F9A4CB-E77B-4AC3-B03F-FD741E02088A}"/>
+                <a16:creationId xmlns:a16="http://schemas.microsoft.com/office/drawing/2014/main" id="{C5D81BD9-0412-4D41-B9E8-10AFBA888863}"/>
               </a:ext>
             </a:extLst>
           </p:cNvPr>
@@ -15351,7 +15256,7 @@
           <p:cNvPr id="4" name="">
             <a:extLst xmlns:a="http://schemas.openxmlformats.org/drawingml/2006/main">
               <a:ext uri="{FF2B5EF4-FFF2-40B4-BE49-F238E27FC236}">
-                <a16:creationId xmlns:a16="http://schemas.microsoft.com/office/drawing/2014/main" id="{CB4AD1AC-D31D-4345-902A-5FD5E313CB1A}"/>
+                <a16:creationId xmlns:a16="http://schemas.microsoft.com/office/drawing/2014/main" id="{83FF0EF6-4076-40D6-B90D-E084BAB477D6}"/>
               </a:ext>
             </a:extLst>
           </p:cNvPr>
@@ -15401,7 +15306,7 @@
           <p:cNvPr id="5" name="">
             <a:extLst xmlns:a="http://schemas.openxmlformats.org/drawingml/2006/main">
               <a:ext uri="{FF2B5EF4-FFF2-40B4-BE49-F238E27FC236}">
-                <a16:creationId xmlns:a16="http://schemas.microsoft.com/office/drawing/2014/main" id="{18790390-A2F7-45BC-A26A-EA8E3EC70745}"/>
+                <a16:creationId xmlns:a16="http://schemas.microsoft.com/office/drawing/2014/main" id="{4B75DF13-6BCC-470A-B861-E1FE2CD275DD}"/>
               </a:ext>
             </a:extLst>
           </p:cNvPr>
@@ -15432,7 +15337,7 @@
           <p:cNvPr id="6" name="">
             <a:extLst xmlns:a="http://schemas.openxmlformats.org/drawingml/2006/main">
               <a:ext uri="{FF2B5EF4-FFF2-40B4-BE49-F238E27FC236}">
-                <a16:creationId xmlns:a16="http://schemas.microsoft.com/office/drawing/2014/main" id="{F4F0CBC5-4A3F-4058-ACD5-376A585B078F}"/>
+                <a16:creationId xmlns:a16="http://schemas.microsoft.com/office/drawing/2014/main" id="{9D1CE502-FEF6-4B76-8D0C-D19713DFFD3F}"/>
               </a:ext>
             </a:extLst>
           </p:cNvPr>
@@ -15482,7 +15387,7 @@
           <p:cNvPr id="7" name="">
             <a:extLst xmlns:a="http://schemas.openxmlformats.org/drawingml/2006/main">
               <a:ext uri="{FF2B5EF4-FFF2-40B4-BE49-F238E27FC236}">
-                <a16:creationId xmlns:a16="http://schemas.microsoft.com/office/drawing/2014/main" id="{E6A73174-3D88-4731-A220-2743884C15EA}"/>
+                <a16:creationId xmlns:a16="http://schemas.microsoft.com/office/drawing/2014/main" id="{2D3886A4-CDB8-448F-9D97-400B614B31B7}"/>
               </a:ext>
             </a:extLst>
           </p:cNvPr>
@@ -15532,7 +15437,7 @@
           <p:cNvPr id="8" name="">
             <a:extLst xmlns:a="http://schemas.openxmlformats.org/drawingml/2006/main">
               <a:ext uri="{FF2B5EF4-FFF2-40B4-BE49-F238E27FC236}">
-                <a16:creationId xmlns:a16="http://schemas.microsoft.com/office/drawing/2014/main" id="{4B789B09-7695-4366-8BC5-5654FD3A00E5}"/>
+                <a16:creationId xmlns:a16="http://schemas.microsoft.com/office/drawing/2014/main" id="{65DF4064-3A0D-4910-AA56-90451CDC7F02}"/>
               </a:ext>
             </a:extLst>
           </p:cNvPr>
@@ -15582,7 +15487,7 @@
           <p:cNvPr id="9" name="">
             <a:extLst xmlns:a="http://schemas.openxmlformats.org/drawingml/2006/main">
               <a:ext uri="{FF2B5EF4-FFF2-40B4-BE49-F238E27FC236}">
-                <a16:creationId xmlns:a16="http://schemas.microsoft.com/office/drawing/2014/main" id="{C5A1CAF7-BE52-4C27-83FA-FCEC09064DB7}"/>
+                <a16:creationId xmlns:a16="http://schemas.microsoft.com/office/drawing/2014/main" id="{B9C0A3EB-6CFD-4CC9-BC23-BBE3C8E139C9}"/>
               </a:ext>
             </a:extLst>
           </p:cNvPr>
@@ -15632,7 +15537,7 @@
           <p:cNvPr id="10" name="">
             <a:extLst xmlns:a="http://schemas.openxmlformats.org/drawingml/2006/main">
               <a:ext uri="{FF2B5EF4-FFF2-40B4-BE49-F238E27FC236}">
-                <a16:creationId xmlns:a16="http://schemas.microsoft.com/office/drawing/2014/main" id="{D8D41356-69D4-4B8A-AB47-38AB2EB9D85F}"/>
+                <a16:creationId xmlns:a16="http://schemas.microsoft.com/office/drawing/2014/main" id="{6590F8BD-ADA9-4532-A4F3-0B67C70812F4}"/>
               </a:ext>
             </a:extLst>
           </p:cNvPr>
@@ -15682,7 +15587,7 @@
           <p:cNvPr id="11" name="">
             <a:extLst xmlns:a="http://schemas.openxmlformats.org/drawingml/2006/main">
               <a:ext uri="{FF2B5EF4-FFF2-40B4-BE49-F238E27FC236}">
-                <a16:creationId xmlns:a16="http://schemas.microsoft.com/office/drawing/2014/main" id="{540212B7-B0D8-4BD7-9AB4-36387ADE7A7A}"/>
+                <a16:creationId xmlns:a16="http://schemas.microsoft.com/office/drawing/2014/main" id="{58D6AA25-A794-4C0F-81CE-8217E995E41E}"/>
               </a:ext>
             </a:extLst>
           </p:cNvPr>
@@ -15732,7 +15637,7 @@
           <p:cNvPr id="12" name="">
             <a:extLst xmlns:a="http://schemas.openxmlformats.org/drawingml/2006/main">
               <a:ext uri="{FF2B5EF4-FFF2-40B4-BE49-F238E27FC236}">
-                <a16:creationId xmlns:a16="http://schemas.microsoft.com/office/drawing/2014/main" id="{66DA524E-3905-485D-B387-0D02DD578441}"/>
+                <a16:creationId xmlns:a16="http://schemas.microsoft.com/office/drawing/2014/main" id="{81072178-435E-4CB1-95BA-EA631CC90D2F}"/>
               </a:ext>
             </a:extLst>
           </p:cNvPr>
@@ -15782,7 +15687,7 @@
           <p:cNvPr id="13" name="">
             <a:extLst xmlns:a="http://schemas.openxmlformats.org/drawingml/2006/main">
               <a:ext uri="{FF2B5EF4-FFF2-40B4-BE49-F238E27FC236}">
-                <a16:creationId xmlns:a16="http://schemas.microsoft.com/office/drawing/2014/main" id="{CDE7DF76-5B9B-4044-9F20-A652766D37D2}"/>
+                <a16:creationId xmlns:a16="http://schemas.microsoft.com/office/drawing/2014/main" id="{FAB03C6C-2C63-40F9-A65F-4E41A9FCAB25}"/>
               </a:ext>
             </a:extLst>
           </p:cNvPr>
@@ -15832,7 +15737,7 @@
           <p:cNvPr id="14" name="">
             <a:extLst xmlns:a="http://schemas.openxmlformats.org/drawingml/2006/main">
               <a:ext uri="{FF2B5EF4-FFF2-40B4-BE49-F238E27FC236}">
-                <a16:creationId xmlns:a16="http://schemas.microsoft.com/office/drawing/2014/main" id="{40A4D267-07F8-410B-A675-41E2FC4C0F1A}"/>
+                <a16:creationId xmlns:a16="http://schemas.microsoft.com/office/drawing/2014/main" id="{1D3F6158-3456-495D-9C26-816E62B28686}"/>
               </a:ext>
             </a:extLst>
           </p:cNvPr>
@@ -15872,7 +15777,7 @@
                   <a:srgbClr val="25242B"/>
                 </a:solidFill>
               </a:rPr>
-              <a:t>50 tests executed, 49 passed, 1 known assertion failure</a:t>
+              <a:t>Swift 446 tests / 0 failures; Web npm test 63 / 63; build and lint pass; D1 local mappings pass while live gates remain blocked</a:t>
             </a:r>
           </a:p>
           <a:p xmlns:a="http://schemas.openxmlformats.org/drawingml/2006/main">
@@ -15889,7 +15794,7 @@
                   <a:srgbClr val="25242B"/>
                 </a:solidFill>
               </a:rPr>
-              <a:t>commit a6c707e</a:t>
+              <a:t>commit d476f32</a:t>
             </a:r>
           </a:p>
         </p:txBody>
@@ -15897,7 +15802,7 @@
     </p:spTree>
     <p:extLst>
       <p:ext uri="{BB962C8B-B14F-4D97-AF65-F5344CB8AC3E}">
-        <p14:creationId xmlns:p14="http://schemas.microsoft.com/office/powerpoint/2010/main" val="1686075066"/>
+        <p14:creationId xmlns:p14="http://schemas.microsoft.com/office/powerpoint/2010/main" val="1503225879"/>
       </p:ext>
     </p:extLst>
   </p:cSld>
@@ -15925,10 +15830,10 @@
       </p:grpSpPr>
       <p:sp>
         <p:nvSpPr>
-          <p:cNvPr id="1" name="">
-            <a:extLst xmlns:a="http://schemas.openxmlformats.org/drawingml/2006/main">
-              <a:ext uri="{FF2B5EF4-FFF2-40B4-BE49-F238E27FC236}">
-                <a16:creationId xmlns:a16="http://schemas.microsoft.com/office/drawing/2014/main" id="{4886EBC4-B2C9-4345-A178-8EB1E727C9BA}"/>
+          <p:cNvPr id="15" name="">
+            <a:extLst xmlns:a="http://schemas.openxmlformats.org/drawingml/2006/main">
+              <a:ext uri="{FF2B5EF4-FFF2-40B4-BE49-F238E27FC236}">
+                <a16:creationId xmlns:a16="http://schemas.microsoft.com/office/drawing/2014/main" id="{1AB934EE-5112-4FD9-91ED-F202B0E02E79}"/>
               </a:ext>
             </a:extLst>
           </p:cNvPr>
@@ -15978,7 +15883,7 @@
           <p:cNvPr id="2" name="a4-title-3">
             <a:extLst xmlns:a="http://schemas.openxmlformats.org/drawingml/2006/main">
               <a:ext uri="{FF2B5EF4-FFF2-40B4-BE49-F238E27FC236}">
-                <a16:creationId xmlns:a16="http://schemas.microsoft.com/office/drawing/2014/main" id="{32C7B1A5-2085-46DA-B2F7-1E45C8CCA461}"/>
+                <a16:creationId xmlns:a16="http://schemas.microsoft.com/office/drawing/2014/main" id="{AD8FEAAE-89ED-45C1-A080-562EC7FC734C}"/>
               </a:ext>
             </a:extLst>
           </p:cNvPr>
@@ -16028,7 +15933,7 @@
           <p:cNvPr id="3" name="">
             <a:extLst xmlns:a="http://schemas.openxmlformats.org/drawingml/2006/main">
               <a:ext uri="{FF2B5EF4-FFF2-40B4-BE49-F238E27FC236}">
-                <a16:creationId xmlns:a16="http://schemas.microsoft.com/office/drawing/2014/main" id="{3EFCF7F9-B1F6-45BF-8CAA-CF6B3DE0EF1B}"/>
+                <a16:creationId xmlns:a16="http://schemas.microsoft.com/office/drawing/2014/main" id="{D1D0BC8D-3C54-4A5E-8B48-4FCCE722EE30}"/>
               </a:ext>
             </a:extLst>
           </p:cNvPr>
@@ -16059,7 +15964,7 @@
           <p:cNvPr id="4" name="">
             <a:extLst xmlns:a="http://schemas.openxmlformats.org/drawingml/2006/main">
               <a:ext uri="{FF2B5EF4-FFF2-40B4-BE49-F238E27FC236}">
-                <a16:creationId xmlns:a16="http://schemas.microsoft.com/office/drawing/2014/main" id="{E2CEB88F-CD89-4115-93E9-66BA6BA16502}"/>
+                <a16:creationId xmlns:a16="http://schemas.microsoft.com/office/drawing/2014/main" id="{186313DD-217B-425D-98B9-2F1465F32928}"/>
               </a:ext>
             </a:extLst>
           </p:cNvPr>
@@ -16109,7 +16014,7 @@
           <p:cNvPr id="5" name="">
             <a:extLst xmlns:a="http://schemas.openxmlformats.org/drawingml/2006/main">
               <a:ext uri="{FF2B5EF4-FFF2-40B4-BE49-F238E27FC236}">
-                <a16:creationId xmlns:a16="http://schemas.microsoft.com/office/drawing/2014/main" id="{F54ACBB6-5F7F-4FAC-A140-D23C64169970}"/>
+                <a16:creationId xmlns:a16="http://schemas.microsoft.com/office/drawing/2014/main" id="{17C7570A-55FC-4EE6-8966-4A7AC4CF356F}"/>
               </a:ext>
             </a:extLst>
           </p:cNvPr>
@@ -16140,7 +16045,7 @@
           <p:cNvPr id="6" name="">
             <a:extLst xmlns:a="http://schemas.openxmlformats.org/drawingml/2006/main">
               <a:ext uri="{FF2B5EF4-FFF2-40B4-BE49-F238E27FC236}">
-                <a16:creationId xmlns:a16="http://schemas.microsoft.com/office/drawing/2014/main" id="{B9EA3F8C-7496-46A9-85A9-D3DE3ABFAC70}"/>
+                <a16:creationId xmlns:a16="http://schemas.microsoft.com/office/drawing/2014/main" id="{6745C706-0BC4-4941-9E5B-F81D1BE7B767}"/>
               </a:ext>
             </a:extLst>
           </p:cNvPr>
@@ -16180,7 +16085,7 @@
                   <a:srgbClr val="25242B"/>
                 </a:solidFill>
               </a:rPr>
-              <a:t>一个帮助个人学习者把行动、证据和复盘串成下一步决定的本地优先学习日志。</a:t>
+              <a:t>一个帮助个人学习者把行动、证据和复盘串成下一步决定的学习日志，并把同一份 Journal 连接到 iPhone 与 Web Workspace。</a:t>
             </a:r>
           </a:p>
         </p:txBody>
@@ -16190,7 +16095,7 @@
           <p:cNvPr id="7" name="">
             <a:extLst xmlns:a="http://schemas.openxmlformats.org/drawingml/2006/main">
               <a:ext uri="{FF2B5EF4-FFF2-40B4-BE49-F238E27FC236}">
-                <a16:creationId xmlns:a16="http://schemas.microsoft.com/office/drawing/2014/main" id="{84CFBB8C-A3FC-429C-8A82-F5210E97DAC6}"/>
+                <a16:creationId xmlns:a16="http://schemas.microsoft.com/office/drawing/2014/main" id="{9FEB4A78-58C9-428F-9FDD-7828E4A63546}"/>
               </a:ext>
             </a:extLst>
           </p:cNvPr>
@@ -16240,7 +16145,7 @@
           <p:cNvPr id="8" name="">
             <a:extLst xmlns:a="http://schemas.openxmlformats.org/drawingml/2006/main">
               <a:ext uri="{FF2B5EF4-FFF2-40B4-BE49-F238E27FC236}">
-                <a16:creationId xmlns:a16="http://schemas.microsoft.com/office/drawing/2014/main" id="{8D612EA0-216C-49D2-8E9A-6ED079DD15CF}"/>
+                <a16:creationId xmlns:a16="http://schemas.microsoft.com/office/drawing/2014/main" id="{31515CBB-59AC-4639-BBB1-123E214F85D8}"/>
               </a:ext>
             </a:extLst>
           </p:cNvPr>
@@ -16290,7 +16195,7 @@
           <p:cNvPr id="9" name="">
             <a:extLst xmlns:a="http://schemas.openxmlformats.org/drawingml/2006/main">
               <a:ext uri="{FF2B5EF4-FFF2-40B4-BE49-F238E27FC236}">
-                <a16:creationId xmlns:a16="http://schemas.microsoft.com/office/drawing/2014/main" id="{1363E37D-663F-4396-A24C-5CDAA860F269}"/>
+                <a16:creationId xmlns:a16="http://schemas.microsoft.com/office/drawing/2014/main" id="{A5628DA7-95CF-4951-97E6-16D8FDC5B507}"/>
               </a:ext>
             </a:extLst>
           </p:cNvPr>
@@ -16340,7 +16245,7 @@
           <p:cNvPr id="10" name="">
             <a:extLst xmlns:a="http://schemas.openxmlformats.org/drawingml/2006/main">
               <a:ext uri="{FF2B5EF4-FFF2-40B4-BE49-F238E27FC236}">
-                <a16:creationId xmlns:a16="http://schemas.microsoft.com/office/drawing/2014/main" id="{CBB370FD-6FB0-47F3-BAC5-C6921E41007B}"/>
+                <a16:creationId xmlns:a16="http://schemas.microsoft.com/office/drawing/2014/main" id="{CE5F1ECC-F7D2-4E97-A790-1248B2A3C06E}"/>
               </a:ext>
             </a:extLst>
           </p:cNvPr>
@@ -16380,7 +16285,7 @@
                   <a:srgbClr val="25242B"/>
                 </a:solidFill>
               </a:rPr>
-              <a:t>学习过程容易留下零散记录，却很难回答这周做了什么、证据是什么、接下来该做什么。</a:t>
+              <a:t>学习过程容易留下零散记录，却很难回答这周做了什么、证据是什么、接下来该做什么，以及不同设备上的修改是否安全。</a:t>
             </a:r>
           </a:p>
         </p:txBody>
@@ -16390,7 +16295,7 @@
           <p:cNvPr id="11" name="">
             <a:extLst xmlns:a="http://schemas.openxmlformats.org/drawingml/2006/main">
               <a:ext uri="{FF2B5EF4-FFF2-40B4-BE49-F238E27FC236}">
-                <a16:creationId xmlns:a16="http://schemas.microsoft.com/office/drawing/2014/main" id="{A0A559A4-3829-4D1F-9D52-FE08C23C6C63}"/>
+                <a16:creationId xmlns:a16="http://schemas.microsoft.com/office/drawing/2014/main" id="{B2E79AE4-9E14-43D7-B71D-93A2ACE0BEC9}"/>
               </a:ext>
             </a:extLst>
           </p:cNvPr>
@@ -16440,7 +16345,7 @@
           <p:cNvPr id="12" name="">
             <a:extLst xmlns:a="http://schemas.openxmlformats.org/drawingml/2006/main">
               <a:ext uri="{FF2B5EF4-FFF2-40B4-BE49-F238E27FC236}">
-                <a16:creationId xmlns:a16="http://schemas.microsoft.com/office/drawing/2014/main" id="{AA86A265-F16C-4124-BEDE-3169F7E28A50}"/>
+                <a16:creationId xmlns:a16="http://schemas.microsoft.com/office/drawing/2014/main" id="{0E9F5445-6152-4162-BCE1-6FAE25F7F63A}"/>
               </a:ext>
             </a:extLst>
           </p:cNvPr>
@@ -16480,7 +16385,7 @@
                   <a:srgbClr val="25242B"/>
                 </a:solidFill>
               </a:rPr>
-              <a:t>用低摩擦 Session 记录行动，用 Proof 保存证据，再通过 Review 做出明确决定。</a:t>
+              <a:t>用低摩擦 Session 记录行动，用 Proof 保存证据，用 Learning Plan 与 Stage Review 做出明确决定，并让 Web/ iPhone 共用一份受保护的 Journal。</a:t>
             </a:r>
           </a:p>
         </p:txBody>
@@ -16490,7 +16395,7 @@
           <p:cNvPr id="13" name="">
             <a:extLst xmlns:a="http://schemas.openxmlformats.org/drawingml/2006/main">
               <a:ext uri="{FF2B5EF4-FFF2-40B4-BE49-F238E27FC236}">
-                <a16:creationId xmlns:a16="http://schemas.microsoft.com/office/drawing/2014/main" id="{1EF80004-6B36-4CAD-8119-4056F3B7F9CD}"/>
+                <a16:creationId xmlns:a16="http://schemas.microsoft.com/office/drawing/2014/main" id="{35B0C0E6-961D-4200-BB4E-1D219DEDBEBE}"/>
               </a:ext>
             </a:extLst>
           </p:cNvPr>
@@ -16540,7 +16445,7 @@
           <p:cNvPr id="14" name="">
             <a:extLst xmlns:a="http://schemas.openxmlformats.org/drawingml/2006/main">
               <a:ext uri="{FF2B5EF4-FFF2-40B4-BE49-F238E27FC236}">
-                <a16:creationId xmlns:a16="http://schemas.microsoft.com/office/drawing/2014/main" id="{193C61B7-7849-4D59-B3B8-4AB82659283C}"/>
+                <a16:creationId xmlns:a16="http://schemas.microsoft.com/office/drawing/2014/main" id="{CEB287C6-64EE-4ABF-BE07-D520658AD056}"/>
               </a:ext>
             </a:extLst>
           </p:cNvPr>
@@ -16580,7 +16485,7 @@
                   <a:srgbClr val="25242B"/>
                 </a:solidFill>
               </a:rPr>
-              <a:t>不是课程平台、社交社区、排行榜或自动替用户学习的 Agent。</a:t>
+              <a:t>不是课程市场、社交社区、排行榜或自动替用户学习的 Agent；CloudKit 实时账户、真机与双设备收敛仍需 D1 外部验收。</a:t>
             </a:r>
           </a:p>
         </p:txBody>
@@ -16588,7 +16493,7 @@
     </p:spTree>
     <p:extLst>
       <p:ext uri="{BB962C8B-B14F-4D97-AF65-F5344CB8AC3E}">
-        <p14:creationId xmlns:p14="http://schemas.microsoft.com/office/powerpoint/2010/main" val="1571942680"/>
+        <p14:creationId xmlns:p14="http://schemas.microsoft.com/office/powerpoint/2010/main" val="538333543"/>
       </p:ext>
     </p:extLst>
   </p:cSld>
@@ -16616,10 +16521,10 @@
       </p:grpSpPr>
       <p:sp>
         <p:nvSpPr>
-          <p:cNvPr id="1" name="">
-            <a:extLst xmlns:a="http://schemas.openxmlformats.org/drawingml/2006/main">
-              <a:ext uri="{FF2B5EF4-FFF2-40B4-BE49-F238E27FC236}">
-                <a16:creationId xmlns:a16="http://schemas.microsoft.com/office/drawing/2014/main" id="{BD353F77-36E2-4345-B6D5-9C29EAA4D7C7}"/>
+          <p:cNvPr id="8" name="">
+            <a:extLst xmlns:a="http://schemas.openxmlformats.org/drawingml/2006/main">
+              <a:ext uri="{FF2B5EF4-FFF2-40B4-BE49-F238E27FC236}">
+                <a16:creationId xmlns:a16="http://schemas.microsoft.com/office/drawing/2014/main" id="{E0A78BFB-011E-416D-A36A-C9FBE742887D}"/>
               </a:ext>
             </a:extLst>
           </p:cNvPr>
@@ -16669,7 +16574,7 @@
           <p:cNvPr id="2" name="a4-title-4">
             <a:extLst xmlns:a="http://schemas.openxmlformats.org/drawingml/2006/main">
               <a:ext uri="{FF2B5EF4-FFF2-40B4-BE49-F238E27FC236}">
-                <a16:creationId xmlns:a16="http://schemas.microsoft.com/office/drawing/2014/main" id="{B973F392-EC5C-46B4-B692-B39A887B78D5}"/>
+                <a16:creationId xmlns:a16="http://schemas.microsoft.com/office/drawing/2014/main" id="{83AE0C04-6B7F-417D-B91A-1371543C67A4}"/>
               </a:ext>
             </a:extLst>
           </p:cNvPr>
@@ -16719,7 +16624,7 @@
           <p:cNvPr id="3" name="">
             <a:extLst xmlns:a="http://schemas.openxmlformats.org/drawingml/2006/main">
               <a:ext uri="{FF2B5EF4-FFF2-40B4-BE49-F238E27FC236}">
-                <a16:creationId xmlns:a16="http://schemas.microsoft.com/office/drawing/2014/main" id="{E68F256C-89F2-4BB9-B299-85345AEE3389}"/>
+                <a16:creationId xmlns:a16="http://schemas.microsoft.com/office/drawing/2014/main" id="{BACC43E0-5779-4E4D-B6F4-8283E0635FCB}"/>
               </a:ext>
             </a:extLst>
           </p:cNvPr>
@@ -16750,7 +16655,7 @@
           <p:cNvPr id="4" name="">
             <a:extLst xmlns:a="http://schemas.openxmlformats.org/drawingml/2006/main">
               <a:ext uri="{FF2B5EF4-FFF2-40B4-BE49-F238E27FC236}">
-                <a16:creationId xmlns:a16="http://schemas.microsoft.com/office/drawing/2014/main" id="{A6D87060-7BBA-41E4-9FAC-8BF06A6E7576}"/>
+                <a16:creationId xmlns:a16="http://schemas.microsoft.com/office/drawing/2014/main" id="{28DA75FD-DE78-4889-B3F0-ED1C850F7471}"/>
               </a:ext>
             </a:extLst>
           </p:cNvPr>
@@ -16800,7 +16705,7 @@
           <p:cNvPr id="5" name="">
             <a:extLst xmlns:a="http://schemas.openxmlformats.org/drawingml/2006/main">
               <a:ext uri="{FF2B5EF4-FFF2-40B4-BE49-F238E27FC236}">
-                <a16:creationId xmlns:a16="http://schemas.microsoft.com/office/drawing/2014/main" id="{E9624943-D14F-41B1-BBF4-4D1FBCB58873}"/>
+                <a16:creationId xmlns:a16="http://schemas.microsoft.com/office/drawing/2014/main" id="{B8B19166-4303-4C49-8048-832AED841319}"/>
               </a:ext>
             </a:extLst>
           </p:cNvPr>
@@ -16839,13 +16744,13 @@
           <p:nvPr/>
         </p:nvPicPr>
         <p:blipFill>
-          <a:blip xmlns:r="http://schemas.openxmlformats.org/officeDocument/2006/relationships" xmlns:a="http://schemas.openxmlformats.org/drawingml/2006/main" r:embed="Ra34aa722996d44c0"/>
+          <a:blip xmlns:r="http://schemas.openxmlformats.org/officeDocument/2006/relationships" xmlns:a="http://schemas.openxmlformats.org/drawingml/2006/main" r:embed="Rd8ea38d18baf446b"/>
           <a:stretch xmlns:a="http://schemas.openxmlformats.org/drawingml/2006/main"/>
         </p:blipFill>
         <p:spPr>
           <a:xfrm xmlns:a="http://schemas.openxmlformats.org/drawingml/2006/main">
-            <a:off x="781050" y="4759462"/>
-            <a:ext cx="6000750" cy="844276"/>
+            <a:off x="781050" y="4823371"/>
+            <a:ext cx="6000750" cy="716457"/>
           </a:xfrm>
           <a:prstGeom xmlns:a="http://schemas.openxmlformats.org/drawingml/2006/main" prst="rect">
             <a:avLst/>
@@ -16857,7 +16762,7 @@
           <p:cNvPr id="7" name="">
             <a:extLst xmlns:a="http://schemas.openxmlformats.org/drawingml/2006/main">
               <a:ext uri="{FF2B5EF4-FFF2-40B4-BE49-F238E27FC236}">
-                <a16:creationId xmlns:a16="http://schemas.microsoft.com/office/drawing/2014/main" id="{FF883E88-E1EB-4929-A38B-73256D220278}"/>
+                <a16:creationId xmlns:a16="http://schemas.microsoft.com/office/drawing/2014/main" id="{F0A8B914-DB09-4AA3-BB89-E93820BB96BF}"/>
               </a:ext>
             </a:extLst>
           </p:cNvPr>
@@ -16905,7 +16810,7 @@
     </p:spTree>
     <p:extLst>
       <p:ext uri="{BB962C8B-B14F-4D97-AF65-F5344CB8AC3E}">
-        <p14:creationId xmlns:p14="http://schemas.microsoft.com/office/powerpoint/2010/main" val="59666792"/>
+        <p14:creationId xmlns:p14="http://schemas.microsoft.com/office/powerpoint/2010/main" val="460545062"/>
       </p:ext>
     </p:extLst>
   </p:cSld>
@@ -16933,10 +16838,10 @@
       </p:grpSpPr>
       <p:sp>
         <p:nvSpPr>
-          <p:cNvPr id="1" name="">
-            <a:extLst xmlns:a="http://schemas.openxmlformats.org/drawingml/2006/main">
-              <a:ext uri="{FF2B5EF4-FFF2-40B4-BE49-F238E27FC236}">
-                <a16:creationId xmlns:a16="http://schemas.microsoft.com/office/drawing/2014/main" id="{36E833B5-8DFD-4B14-A7D2-B6F066515809}"/>
+          <p:cNvPr id="15" name="">
+            <a:extLst xmlns:a="http://schemas.openxmlformats.org/drawingml/2006/main">
+              <a:ext uri="{FF2B5EF4-FFF2-40B4-BE49-F238E27FC236}">
+                <a16:creationId xmlns:a16="http://schemas.microsoft.com/office/drawing/2014/main" id="{6E4859F5-F661-4092-BD79-EE54D1B5F55C}"/>
               </a:ext>
             </a:extLst>
           </p:cNvPr>
@@ -16986,7 +16891,7 @@
           <p:cNvPr id="2" name="a4-title-5">
             <a:extLst xmlns:a="http://schemas.openxmlformats.org/drawingml/2006/main">
               <a:ext uri="{FF2B5EF4-FFF2-40B4-BE49-F238E27FC236}">
-                <a16:creationId xmlns:a16="http://schemas.microsoft.com/office/drawing/2014/main" id="{F958EE48-2CB6-4500-AED3-2D543F2E0739}"/>
+                <a16:creationId xmlns:a16="http://schemas.microsoft.com/office/drawing/2014/main" id="{549206B1-AA79-4603-A270-D006B3F33CD1}"/>
               </a:ext>
             </a:extLst>
           </p:cNvPr>
@@ -17036,7 +16941,7 @@
           <p:cNvPr id="3" name="">
             <a:extLst xmlns:a="http://schemas.openxmlformats.org/drawingml/2006/main">
               <a:ext uri="{FF2B5EF4-FFF2-40B4-BE49-F238E27FC236}">
-                <a16:creationId xmlns:a16="http://schemas.microsoft.com/office/drawing/2014/main" id="{F8E9DE75-9EDA-4106-B9BE-47B96D897B90}"/>
+                <a16:creationId xmlns:a16="http://schemas.microsoft.com/office/drawing/2014/main" id="{2A96168B-8B21-49A8-938B-AC83F0CA6819}"/>
               </a:ext>
             </a:extLst>
           </p:cNvPr>
@@ -17067,7 +16972,7 @@
           <p:cNvPr id="4" name="">
             <a:extLst xmlns:a="http://schemas.openxmlformats.org/drawingml/2006/main">
               <a:ext uri="{FF2B5EF4-FFF2-40B4-BE49-F238E27FC236}">
-                <a16:creationId xmlns:a16="http://schemas.microsoft.com/office/drawing/2014/main" id="{03DD57C5-1EE2-4DA6-A695-377AA8914151}"/>
+                <a16:creationId xmlns:a16="http://schemas.microsoft.com/office/drawing/2014/main" id="{67916252-9A92-4C5C-8E02-9F97DB52C05B}"/>
               </a:ext>
             </a:extLst>
           </p:cNvPr>
@@ -17117,7 +17022,7 @@
           <p:cNvPr id="5" name="">
             <a:extLst xmlns:a="http://schemas.openxmlformats.org/drawingml/2006/main">
               <a:ext uri="{FF2B5EF4-FFF2-40B4-BE49-F238E27FC236}">
-                <a16:creationId xmlns:a16="http://schemas.microsoft.com/office/drawing/2014/main" id="{A62876E9-1A2B-4E6F-BB85-5EE261724C62}"/>
+                <a16:creationId xmlns:a16="http://schemas.microsoft.com/office/drawing/2014/main" id="{64CBE950-D375-4769-8F08-A3B004CA01EC}"/>
               </a:ext>
             </a:extLst>
           </p:cNvPr>
@@ -17148,7 +17053,7 @@
           <p:cNvPr id="6" name="">
             <a:extLst xmlns:a="http://schemas.openxmlformats.org/drawingml/2006/main">
               <a:ext uri="{FF2B5EF4-FFF2-40B4-BE49-F238E27FC236}">
-                <a16:creationId xmlns:a16="http://schemas.microsoft.com/office/drawing/2014/main" id="{F717FE90-CD80-4A32-B818-3C349B4B2742}"/>
+                <a16:creationId xmlns:a16="http://schemas.microsoft.com/office/drawing/2014/main" id="{4AF9CF7D-2340-4A15-BD54-9BCDF7DDCE6A}"/>
               </a:ext>
             </a:extLst>
           </p:cNvPr>
@@ -17198,7 +17103,7 @@
           <p:cNvPr id="7" name="">
             <a:extLst xmlns:a="http://schemas.openxmlformats.org/drawingml/2006/main">
               <a:ext uri="{FF2B5EF4-FFF2-40B4-BE49-F238E27FC236}">
-                <a16:creationId xmlns:a16="http://schemas.microsoft.com/office/drawing/2014/main" id="{4E806761-DD14-4598-9450-AFCE5A7C18AB}"/>
+                <a16:creationId xmlns:a16="http://schemas.microsoft.com/office/drawing/2014/main" id="{090D3FDC-259D-4668-8427-CD5C92551366}"/>
               </a:ext>
             </a:extLst>
           </p:cNvPr>
@@ -17248,7 +17153,7 @@
           <p:cNvPr id="8" name="">
             <a:extLst xmlns:a="http://schemas.openxmlformats.org/drawingml/2006/main">
               <a:ext uri="{FF2B5EF4-FFF2-40B4-BE49-F238E27FC236}">
-                <a16:creationId xmlns:a16="http://schemas.microsoft.com/office/drawing/2014/main" id="{A29A97EE-668D-4C45-B375-230A4404AEAB}"/>
+                <a16:creationId xmlns:a16="http://schemas.microsoft.com/office/drawing/2014/main" id="{1D7DE2DA-684D-4B31-88D6-FEE77971CAA5}"/>
               </a:ext>
             </a:extLst>
           </p:cNvPr>
@@ -17298,7 +17203,7 @@
           <p:cNvPr id="9" name="">
             <a:extLst xmlns:a="http://schemas.openxmlformats.org/drawingml/2006/main">
               <a:ext uri="{FF2B5EF4-FFF2-40B4-BE49-F238E27FC236}">
-                <a16:creationId xmlns:a16="http://schemas.microsoft.com/office/drawing/2014/main" id="{B1FF6BA3-B864-4A50-8B6C-5418D08E3C9A}"/>
+                <a16:creationId xmlns:a16="http://schemas.microsoft.com/office/drawing/2014/main" id="{938B8078-ACD7-4041-8EA7-0670322EF2ED}"/>
               </a:ext>
             </a:extLst>
           </p:cNvPr>
@@ -17348,7 +17253,7 @@
           <p:cNvPr id="10" name="">
             <a:extLst xmlns:a="http://schemas.openxmlformats.org/drawingml/2006/main">
               <a:ext uri="{FF2B5EF4-FFF2-40B4-BE49-F238E27FC236}">
-                <a16:creationId xmlns:a16="http://schemas.microsoft.com/office/drawing/2014/main" id="{B0ED0C9F-18B2-4C84-8651-04D8B8CEB027}"/>
+                <a16:creationId xmlns:a16="http://schemas.microsoft.com/office/drawing/2014/main" id="{79334A97-9245-42B5-9250-A30F38D7745C}"/>
               </a:ext>
             </a:extLst>
           </p:cNvPr>
@@ -17398,7 +17303,7 @@
           <p:cNvPr id="11" name="">
             <a:extLst xmlns:a="http://schemas.openxmlformats.org/drawingml/2006/main">
               <a:ext uri="{FF2B5EF4-FFF2-40B4-BE49-F238E27FC236}">
-                <a16:creationId xmlns:a16="http://schemas.microsoft.com/office/drawing/2014/main" id="{C5712905-39CA-4F7D-A336-9C57C5ECB0CC}"/>
+                <a16:creationId xmlns:a16="http://schemas.microsoft.com/office/drawing/2014/main" id="{CBAC1C8C-C1E9-4DA8-B009-76A58229C01D}"/>
               </a:ext>
             </a:extLst>
           </p:cNvPr>
@@ -17448,7 +17353,7 @@
           <p:cNvPr id="12" name="">
             <a:extLst xmlns:a="http://schemas.openxmlformats.org/drawingml/2006/main">
               <a:ext uri="{FF2B5EF4-FFF2-40B4-BE49-F238E27FC236}">
-                <a16:creationId xmlns:a16="http://schemas.microsoft.com/office/drawing/2014/main" id="{0EAB5962-1F1C-4DAF-AF39-55F5A1A70210}"/>
+                <a16:creationId xmlns:a16="http://schemas.microsoft.com/office/drawing/2014/main" id="{78A5E0ED-EB5C-4D7D-B55B-C2FC73F8E2F6}"/>
               </a:ext>
             </a:extLst>
           </p:cNvPr>
@@ -17498,7 +17403,7 @@
           <p:cNvPr id="13" name="">
             <a:extLst xmlns:a="http://schemas.openxmlformats.org/drawingml/2006/main">
               <a:ext uri="{FF2B5EF4-FFF2-40B4-BE49-F238E27FC236}">
-                <a16:creationId xmlns:a16="http://schemas.microsoft.com/office/drawing/2014/main" id="{8530E968-E229-43B3-B84D-11BF54EEFDC2}"/>
+                <a16:creationId xmlns:a16="http://schemas.microsoft.com/office/drawing/2014/main" id="{C9BB9784-CA84-4599-ADD8-4D1DC12F2EA7}"/>
               </a:ext>
             </a:extLst>
           </p:cNvPr>
@@ -17548,7 +17453,7 @@
           <p:cNvPr id="14" name="">
             <a:extLst xmlns:a="http://schemas.openxmlformats.org/drawingml/2006/main">
               <a:ext uri="{FF2B5EF4-FFF2-40B4-BE49-F238E27FC236}">
-                <a16:creationId xmlns:a16="http://schemas.microsoft.com/office/drawing/2014/main" id="{E46A4D82-9DA8-4EB8-8E24-5C7CB4CD5C5E}"/>
+                <a16:creationId xmlns:a16="http://schemas.microsoft.com/office/drawing/2014/main" id="{14B25796-718A-4537-8046-0AF64BC3289C}"/>
               </a:ext>
             </a:extLst>
           </p:cNvPr>
@@ -17596,7 +17501,7 @@
     </p:spTree>
     <p:extLst>
       <p:ext uri="{BB962C8B-B14F-4D97-AF65-F5344CB8AC3E}">
-        <p14:creationId xmlns:p14="http://schemas.microsoft.com/office/powerpoint/2010/main" val="387176850"/>
+        <p14:creationId xmlns:p14="http://schemas.microsoft.com/office/powerpoint/2010/main" val="76379007"/>
       </p:ext>
     </p:extLst>
   </p:cSld>
@@ -17624,10 +17529,10 @@
       </p:grpSpPr>
       <p:sp>
         <p:nvSpPr>
-          <p:cNvPr id="1" name="">
-            <a:extLst xmlns:a="http://schemas.openxmlformats.org/drawingml/2006/main">
-              <a:ext uri="{FF2B5EF4-FFF2-40B4-BE49-F238E27FC236}">
-                <a16:creationId xmlns:a16="http://schemas.microsoft.com/office/drawing/2014/main" id="{9A302073-DE7F-4FBE-8746-E578A9FA46F8}"/>
+          <p:cNvPr id="15" name="">
+            <a:extLst xmlns:a="http://schemas.openxmlformats.org/drawingml/2006/main">
+              <a:ext uri="{FF2B5EF4-FFF2-40B4-BE49-F238E27FC236}">
+                <a16:creationId xmlns:a16="http://schemas.microsoft.com/office/drawing/2014/main" id="{D1F9AE03-2AC3-4436-9688-E3CA19F268C9}"/>
               </a:ext>
             </a:extLst>
           </p:cNvPr>
@@ -17677,7 +17582,7 @@
           <p:cNvPr id="2" name="a4-title-6">
             <a:extLst xmlns:a="http://schemas.openxmlformats.org/drawingml/2006/main">
               <a:ext uri="{FF2B5EF4-FFF2-40B4-BE49-F238E27FC236}">
-                <a16:creationId xmlns:a16="http://schemas.microsoft.com/office/drawing/2014/main" id="{814ED10F-B2BA-41FA-9DC5-72E1424F63B5}"/>
+                <a16:creationId xmlns:a16="http://schemas.microsoft.com/office/drawing/2014/main" id="{5C1A2032-5A25-4ED6-9094-CBAD81C627F4}"/>
               </a:ext>
             </a:extLst>
           </p:cNvPr>
@@ -17727,7 +17632,7 @@
           <p:cNvPr id="3" name="">
             <a:extLst xmlns:a="http://schemas.openxmlformats.org/drawingml/2006/main">
               <a:ext uri="{FF2B5EF4-FFF2-40B4-BE49-F238E27FC236}">
-                <a16:creationId xmlns:a16="http://schemas.microsoft.com/office/drawing/2014/main" id="{43910E4E-9645-44E8-9175-D29E18005DDC}"/>
+                <a16:creationId xmlns:a16="http://schemas.microsoft.com/office/drawing/2014/main" id="{F2DAC799-62E8-4E6F-A239-2161DD2C4885}"/>
               </a:ext>
             </a:extLst>
           </p:cNvPr>
@@ -17758,7 +17663,7 @@
           <p:cNvPr id="4" name="">
             <a:extLst xmlns:a="http://schemas.openxmlformats.org/drawingml/2006/main">
               <a:ext uri="{FF2B5EF4-FFF2-40B4-BE49-F238E27FC236}">
-                <a16:creationId xmlns:a16="http://schemas.microsoft.com/office/drawing/2014/main" id="{722C329D-F5AF-4FEF-BA42-3195C6C3F402}"/>
+                <a16:creationId xmlns:a16="http://schemas.microsoft.com/office/drawing/2014/main" id="{D288A37F-319A-4670-9A3E-F23439CBD888}"/>
               </a:ext>
             </a:extLst>
           </p:cNvPr>
@@ -17808,7 +17713,7 @@
           <p:cNvPr id="5" name="">
             <a:extLst xmlns:a="http://schemas.openxmlformats.org/drawingml/2006/main">
               <a:ext uri="{FF2B5EF4-FFF2-40B4-BE49-F238E27FC236}">
-                <a16:creationId xmlns:a16="http://schemas.microsoft.com/office/drawing/2014/main" id="{1892618C-D4DC-4506-B98D-BBDAF2836319}"/>
+                <a16:creationId xmlns:a16="http://schemas.microsoft.com/office/drawing/2014/main" id="{66E4F670-C3B3-41EB-8387-13FF51295751}"/>
               </a:ext>
             </a:extLst>
           </p:cNvPr>
@@ -17839,7 +17744,7 @@
           <p:cNvPr id="6" name="">
             <a:extLst xmlns:a="http://schemas.openxmlformats.org/drawingml/2006/main">
               <a:ext uri="{FF2B5EF4-FFF2-40B4-BE49-F238E27FC236}">
-                <a16:creationId xmlns:a16="http://schemas.microsoft.com/office/drawing/2014/main" id="{5947ADF3-DAE5-4D95-A3C5-3FB5808CC139}"/>
+                <a16:creationId xmlns:a16="http://schemas.microsoft.com/office/drawing/2014/main" id="{E41A06E5-DA1E-4373-86A8-02E89311153B}"/>
               </a:ext>
             </a:extLst>
           </p:cNvPr>
@@ -17889,7 +17794,7 @@
           <p:cNvPr id="7" name="">
             <a:extLst xmlns:a="http://schemas.openxmlformats.org/drawingml/2006/main">
               <a:ext uri="{FF2B5EF4-FFF2-40B4-BE49-F238E27FC236}">
-                <a16:creationId xmlns:a16="http://schemas.microsoft.com/office/drawing/2014/main" id="{4034ED0D-430A-4923-A98A-42A29066FD6A}"/>
+                <a16:creationId xmlns:a16="http://schemas.microsoft.com/office/drawing/2014/main" id="{D0C4C784-1171-4C51-AAB8-98EFA86BA6CA}"/>
               </a:ext>
             </a:extLst>
           </p:cNvPr>
@@ -17939,7 +17844,7 @@
           <p:cNvPr id="8" name="">
             <a:extLst xmlns:a="http://schemas.openxmlformats.org/drawingml/2006/main">
               <a:ext uri="{FF2B5EF4-FFF2-40B4-BE49-F238E27FC236}">
-                <a16:creationId xmlns:a16="http://schemas.microsoft.com/office/drawing/2014/main" id="{236CE782-1E68-421E-9B93-A3DF28C6BF5C}"/>
+                <a16:creationId xmlns:a16="http://schemas.microsoft.com/office/drawing/2014/main" id="{99288AD3-C41D-4F5C-8545-C6894DB8D47F}"/>
               </a:ext>
             </a:extLst>
           </p:cNvPr>
@@ -17979,7 +17884,7 @@
                   <a:srgbClr val="25242B"/>
                 </a:solidFill>
               </a:rPr>
-              <a:t>一个持续学习目标及其当前状态。</a:t>
+              <a:t>一个持续学习目标及其当前生命周期状态；Archive 与 Permanent Deletion 分开。</a:t>
             </a:r>
           </a:p>
         </p:txBody>
@@ -17989,7 +17894,7 @@
           <p:cNvPr id="9" name="">
             <a:extLst xmlns:a="http://schemas.openxmlformats.org/drawingml/2006/main">
               <a:ext uri="{FF2B5EF4-FFF2-40B4-BE49-F238E27FC236}">
-                <a16:creationId xmlns:a16="http://schemas.microsoft.com/office/drawing/2014/main" id="{D3001EC1-FA6D-4746-9AF2-30DE5E7E09B6}"/>
+                <a16:creationId xmlns:a16="http://schemas.microsoft.com/office/drawing/2014/main" id="{8AC37671-A3D4-4749-B4AD-F90DE84CD754}"/>
               </a:ext>
             </a:extLst>
           </p:cNvPr>
@@ -18039,7 +17944,7 @@
           <p:cNvPr id="10" name="">
             <a:extLst xmlns:a="http://schemas.openxmlformats.org/drawingml/2006/main">
               <a:ext uri="{FF2B5EF4-FFF2-40B4-BE49-F238E27FC236}">
-                <a16:creationId xmlns:a16="http://schemas.microsoft.com/office/drawing/2014/main" id="{46143D4B-4BBF-4F05-A425-BDE1B008BDBD}"/>
+                <a16:creationId xmlns:a16="http://schemas.microsoft.com/office/drawing/2014/main" id="{3572DFD0-02DF-4757-89E8-0D321FBCA720}"/>
               </a:ext>
             </a:extLst>
           </p:cNvPr>
@@ -18079,7 +17984,7 @@
                   <a:srgbClr val="25242B"/>
                 </a:solidFill>
               </a:rPr>
-              <a:t>下一次打开 App 时可以直接执行的具体动作。</a:t>
+              <a:t>下一次打开 iPhone 或 Web Workspace 时可以直接执行的具体动作。</a:t>
             </a:r>
           </a:p>
         </p:txBody>
@@ -18089,7 +17994,7 @@
           <p:cNvPr id="11" name="">
             <a:extLst xmlns:a="http://schemas.openxmlformats.org/drawingml/2006/main">
               <a:ext uri="{FF2B5EF4-FFF2-40B4-BE49-F238E27FC236}">
-                <a16:creationId xmlns:a16="http://schemas.microsoft.com/office/drawing/2014/main" id="{30E45238-C627-4D8B-8E6B-1B738886B968}"/>
+                <a16:creationId xmlns:a16="http://schemas.microsoft.com/office/drawing/2014/main" id="{4AE8BDD7-8620-4776-B899-AC103AECF3A2}"/>
               </a:ext>
             </a:extLst>
           </p:cNvPr>
@@ -18139,7 +18044,7 @@
           <p:cNvPr id="12" name="">
             <a:extLst xmlns:a="http://schemas.openxmlformats.org/drawingml/2006/main">
               <a:ext uri="{FF2B5EF4-FFF2-40B4-BE49-F238E27FC236}">
-                <a16:creationId xmlns:a16="http://schemas.microsoft.com/office/drawing/2014/main" id="{AA868194-902E-4203-93EB-45B78B977502}"/>
+                <a16:creationId xmlns:a16="http://schemas.microsoft.com/office/drawing/2014/main" id="{A94B6676-45F1-4376-AC0E-B0044D03B468}"/>
               </a:ext>
             </a:extLst>
           </p:cNvPr>
@@ -18179,7 +18084,7 @@
                   <a:srgbClr val="25242B"/>
                 </a:solidFill>
               </a:rPr>
-              <a:t>一次已发生的学习行动，由 Quick Log 或 Timer 生成。</a:t>
+              <a:t>一次已发生的学习行动，由 Quick Log、Timer 或 Guided Routine Player 生成。</a:t>
             </a:r>
           </a:p>
         </p:txBody>
@@ -18189,7 +18094,7 @@
           <p:cNvPr id="13" name="">
             <a:extLst xmlns:a="http://schemas.openxmlformats.org/drawingml/2006/main">
               <a:ext uri="{FF2B5EF4-FFF2-40B4-BE49-F238E27FC236}">
-                <a16:creationId xmlns:a16="http://schemas.microsoft.com/office/drawing/2014/main" id="{560C146E-CE1D-4924-ABF1-7C15D2DD7A5A}"/>
+                <a16:creationId xmlns:a16="http://schemas.microsoft.com/office/drawing/2014/main" id="{388B0EAE-0670-422C-B130-C9FACF35BA41}"/>
               </a:ext>
             </a:extLst>
           </p:cNvPr>
@@ -18239,7 +18144,7 @@
           <p:cNvPr id="14" name="">
             <a:extLst xmlns:a="http://schemas.openxmlformats.org/drawingml/2006/main">
               <a:ext uri="{FF2B5EF4-FFF2-40B4-BE49-F238E27FC236}">
-                <a16:creationId xmlns:a16="http://schemas.microsoft.com/office/drawing/2014/main" id="{22683F1A-3F04-4D9C-8D29-0519270A01D4}"/>
+                <a16:creationId xmlns:a16="http://schemas.microsoft.com/office/drawing/2014/main" id="{31B7ACE6-D3B9-4F61-98B1-EE1584B84107}"/>
               </a:ext>
             </a:extLst>
           </p:cNvPr>
@@ -18279,7 +18184,7 @@
                   <a:srgbClr val="25242B"/>
                 </a:solidFill>
               </a:rPr>
-              <a:t>带有“这证明了什么”说明的图片、录音、文件或链接。</a:t>
+              <a:t>带有“这证明了什么”说明的图片、录音、文件或链接；必要时可成为 Qualifying Proof。</a:t>
             </a:r>
           </a:p>
         </p:txBody>
@@ -18287,7 +18192,7 @@
     </p:spTree>
     <p:extLst>
       <p:ext uri="{BB962C8B-B14F-4D97-AF65-F5344CB8AC3E}">
-        <p14:creationId xmlns:p14="http://schemas.microsoft.com/office/powerpoint/2010/main" val="136758073"/>
+        <p14:creationId xmlns:p14="http://schemas.microsoft.com/office/powerpoint/2010/main" val="157116717"/>
       </p:ext>
     </p:extLst>
   </p:cSld>
@@ -18315,10 +18220,10 @@
       </p:grpSpPr>
       <p:sp>
         <p:nvSpPr>
-          <p:cNvPr id="1" name="">
-            <a:extLst xmlns:a="http://schemas.openxmlformats.org/drawingml/2006/main">
-              <a:ext uri="{FF2B5EF4-FFF2-40B4-BE49-F238E27FC236}">
-                <a16:creationId xmlns:a16="http://schemas.microsoft.com/office/drawing/2014/main" id="{C9CBD12F-F13A-4D7C-899C-3AF1910359E9}"/>
+          <p:cNvPr id="8" name="">
+            <a:extLst xmlns:a="http://schemas.openxmlformats.org/drawingml/2006/main">
+              <a:ext uri="{FF2B5EF4-FFF2-40B4-BE49-F238E27FC236}">
+                <a16:creationId xmlns:a16="http://schemas.microsoft.com/office/drawing/2014/main" id="{FDDA1E10-9306-43B3-8FEB-8C67C2484A3A}"/>
               </a:ext>
             </a:extLst>
           </p:cNvPr>
@@ -18368,7 +18273,7 @@
           <p:cNvPr id="2" name="a4-title-7">
             <a:extLst xmlns:a="http://schemas.openxmlformats.org/drawingml/2006/main">
               <a:ext uri="{FF2B5EF4-FFF2-40B4-BE49-F238E27FC236}">
-                <a16:creationId xmlns:a16="http://schemas.microsoft.com/office/drawing/2014/main" id="{AA763B2C-D3F7-4B41-AADA-574CB919C034}"/>
+                <a16:creationId xmlns:a16="http://schemas.microsoft.com/office/drawing/2014/main" id="{EE672F9A-6A20-4623-92B8-B0437E03C40A}"/>
               </a:ext>
             </a:extLst>
           </p:cNvPr>
@@ -18408,7 +18313,7 @@
                   <a:srgbClr val="25242B"/>
                 </a:solidFill>
               </a:rPr>
-              <a:t>三个 Tab 覆盖当前产品范围</a:t>
+              <a:t>四个 iPhone Tab 与 Web Workspace</a:t>
             </a:r>
           </a:p>
         </p:txBody>
@@ -18418,7 +18323,7 @@
           <p:cNvPr id="3" name="">
             <a:extLst xmlns:a="http://schemas.openxmlformats.org/drawingml/2006/main">
               <a:ext uri="{FF2B5EF4-FFF2-40B4-BE49-F238E27FC236}">
-                <a16:creationId xmlns:a16="http://schemas.microsoft.com/office/drawing/2014/main" id="{0F4B5E93-6E63-4994-9797-A476FB29BF5B}"/>
+                <a16:creationId xmlns:a16="http://schemas.microsoft.com/office/drawing/2014/main" id="{835BB662-820B-47AF-AECB-68945D80FF5C}"/>
               </a:ext>
             </a:extLst>
           </p:cNvPr>
@@ -18449,7 +18354,7 @@
           <p:cNvPr id="4" name="">
             <a:extLst xmlns:a="http://schemas.openxmlformats.org/drawingml/2006/main">
               <a:ext uri="{FF2B5EF4-FFF2-40B4-BE49-F238E27FC236}">
-                <a16:creationId xmlns:a16="http://schemas.microsoft.com/office/drawing/2014/main" id="{BFCC4A18-FD90-4094-8BAC-87802A2F5705}"/>
+                <a16:creationId xmlns:a16="http://schemas.microsoft.com/office/drawing/2014/main" id="{F14B1156-8439-4E88-B6C2-B7AD8DD41B3C}"/>
               </a:ext>
             </a:extLst>
           </p:cNvPr>
@@ -18499,7 +18404,7 @@
           <p:cNvPr id="5" name="">
             <a:extLst xmlns:a="http://schemas.openxmlformats.org/drawingml/2006/main">
               <a:ext uri="{FF2B5EF4-FFF2-40B4-BE49-F238E27FC236}">
-                <a16:creationId xmlns:a16="http://schemas.microsoft.com/office/drawing/2014/main" id="{BBDDF8C5-6C9E-4911-AC90-0C001CE228DD}"/>
+                <a16:creationId xmlns:a16="http://schemas.microsoft.com/office/drawing/2014/main" id="{E6C9319A-7FE9-4103-A9F1-4E97FD40314F}"/>
               </a:ext>
             </a:extLst>
           </p:cNvPr>
@@ -18538,13 +18443,13 @@
           <p:nvPr/>
         </p:nvPicPr>
         <p:blipFill>
-          <a:blip xmlns:r="http://schemas.openxmlformats.org/officeDocument/2006/relationships" xmlns:a="http://schemas.openxmlformats.org/drawingml/2006/main" r:embed="R8bec7d3b2c15479a"/>
+          <a:blip xmlns:r="http://schemas.openxmlformats.org/officeDocument/2006/relationships" xmlns:a="http://schemas.openxmlformats.org/drawingml/2006/main" r:embed="R00efef84b5784e92"/>
           <a:stretch xmlns:a="http://schemas.openxmlformats.org/drawingml/2006/main"/>
         </p:blipFill>
         <p:spPr>
           <a:xfrm xmlns:a="http://schemas.openxmlformats.org/drawingml/2006/main">
-            <a:off x="781050" y="3466504"/>
-            <a:ext cx="6000750" cy="3430192"/>
+            <a:off x="781050" y="4185960"/>
+            <a:ext cx="6000750" cy="1991280"/>
           </a:xfrm>
           <a:prstGeom xmlns:a="http://schemas.openxmlformats.org/drawingml/2006/main" prst="rect">
             <a:avLst/>
@@ -18556,7 +18461,7 @@
           <p:cNvPr id="7" name="">
             <a:extLst xmlns:a="http://schemas.openxmlformats.org/drawingml/2006/main">
               <a:ext uri="{FF2B5EF4-FFF2-40B4-BE49-F238E27FC236}">
-                <a16:creationId xmlns:a16="http://schemas.microsoft.com/office/drawing/2014/main" id="{3CBA2023-F901-4A5E-A057-45A51F39F333}"/>
+                <a16:creationId xmlns:a16="http://schemas.microsoft.com/office/drawing/2014/main" id="{430E9457-2D75-440E-B617-2F056A7540E6}"/>
               </a:ext>
             </a:extLst>
           </p:cNvPr>
@@ -18596,7 +18501,7 @@
                   <a:srgbClr val="6F6C76"/>
                 </a:solidFill>
               </a:rPr>
-              <a:t>Review 和 AI Settings 是条件性入口；Calendar、Course Plan、Cloud Sync 尚未进入导航。</a:t>
+              <a:t>Calendar 是第四个 iPhone Tab；Learning Plan、Cloud Sync 与 Web Sync &amp; Conflicts 从上下文进入。</a:t>
             </a:r>
           </a:p>
         </p:txBody>
@@ -18604,7 +18509,7 @@
     </p:spTree>
     <p:extLst>
       <p:ext uri="{BB962C8B-B14F-4D97-AF65-F5344CB8AC3E}">
-        <p14:creationId xmlns:p14="http://schemas.microsoft.com/office/powerpoint/2010/main" val="2058835658"/>
+        <p14:creationId xmlns:p14="http://schemas.microsoft.com/office/powerpoint/2010/main" val="1521989038"/>
       </p:ext>
     </p:extLst>
   </p:cSld>
@@ -18632,10 +18537,10 @@
       </p:grpSpPr>
       <p:sp>
         <p:nvSpPr>
-          <p:cNvPr id="1" name="">
-            <a:extLst xmlns:a="http://schemas.openxmlformats.org/drawingml/2006/main">
-              <a:ext uri="{FF2B5EF4-FFF2-40B4-BE49-F238E27FC236}">
-                <a16:creationId xmlns:a16="http://schemas.microsoft.com/office/drawing/2014/main" id="{AC8B8E75-910C-43DD-AF57-F7AC1693A0EB}"/>
+          <p:cNvPr id="8" name="">
+            <a:extLst xmlns:a="http://schemas.openxmlformats.org/drawingml/2006/main">
+              <a:ext uri="{FF2B5EF4-FFF2-40B4-BE49-F238E27FC236}">
+                <a16:creationId xmlns:a16="http://schemas.microsoft.com/office/drawing/2014/main" id="{1F5A9A79-5152-4C76-8FCF-D5C0D20DF1FF}"/>
               </a:ext>
             </a:extLst>
           </p:cNvPr>
@@ -18685,7 +18590,7 @@
           <p:cNvPr id="2" name="a4-title-8">
             <a:extLst xmlns:a="http://schemas.openxmlformats.org/drawingml/2006/main">
               <a:ext uri="{FF2B5EF4-FFF2-40B4-BE49-F238E27FC236}">
-                <a16:creationId xmlns:a16="http://schemas.microsoft.com/office/drawing/2014/main" id="{2FF9710C-1BD1-4A0E-93A1-C9EFD4059B37}"/>
+                <a16:creationId xmlns:a16="http://schemas.microsoft.com/office/drawing/2014/main" id="{1C793F5E-B533-4BE5-A9DC-2F4330B34CA6}"/>
               </a:ext>
             </a:extLst>
           </p:cNvPr>
@@ -18725,7 +18630,7 @@
                   <a:srgbClr val="25242B"/>
                 </a:solidFill>
               </a:rPr>
-              <a:t>界面、业务规则与存储边界清晰分层</a:t>
+              <a:t>界面、业务规则与跨端存储边界清晰分层</a:t>
             </a:r>
           </a:p>
         </p:txBody>
@@ -18735,7 +18640,7 @@
           <p:cNvPr id="3" name="">
             <a:extLst xmlns:a="http://schemas.openxmlformats.org/drawingml/2006/main">
               <a:ext uri="{FF2B5EF4-FFF2-40B4-BE49-F238E27FC236}">
-                <a16:creationId xmlns:a16="http://schemas.microsoft.com/office/drawing/2014/main" id="{57F78796-5AA6-4A07-BEF3-06E9733844FC}"/>
+                <a16:creationId xmlns:a16="http://schemas.microsoft.com/office/drawing/2014/main" id="{AC9D8C37-9988-4F32-99C4-69F17BB6222D}"/>
               </a:ext>
             </a:extLst>
           </p:cNvPr>
@@ -18766,7 +18671,7 @@
           <p:cNvPr id="4" name="">
             <a:extLst xmlns:a="http://schemas.openxmlformats.org/drawingml/2006/main">
               <a:ext uri="{FF2B5EF4-FFF2-40B4-BE49-F238E27FC236}">
-                <a16:creationId xmlns:a16="http://schemas.microsoft.com/office/drawing/2014/main" id="{DD8CD8D7-5808-4E7B-A761-815779BD6678}"/>
+                <a16:creationId xmlns:a16="http://schemas.microsoft.com/office/drawing/2014/main" id="{28E0B41F-A1D9-47D4-9048-724DE6A7DCC1}"/>
               </a:ext>
             </a:extLst>
           </p:cNvPr>
@@ -18816,7 +18721,7 @@
           <p:cNvPr id="5" name="">
             <a:extLst xmlns:a="http://schemas.openxmlformats.org/drawingml/2006/main">
               <a:ext uri="{FF2B5EF4-FFF2-40B4-BE49-F238E27FC236}">
-                <a16:creationId xmlns:a16="http://schemas.microsoft.com/office/drawing/2014/main" id="{3215E464-2D90-4C9D-8B74-E70E36229BF3}"/>
+                <a16:creationId xmlns:a16="http://schemas.microsoft.com/office/drawing/2014/main" id="{DC2E4151-DFC0-4BF9-979A-C35A0EEF0E59}"/>
               </a:ext>
             </a:extLst>
           </p:cNvPr>
@@ -18855,13 +18760,13 @@
           <p:nvPr/>
         </p:nvPicPr>
         <p:blipFill>
-          <a:blip xmlns:r="http://schemas.openxmlformats.org/officeDocument/2006/relationships" xmlns:a="http://schemas.openxmlformats.org/drawingml/2006/main" r:embed="R8033e4012e084bda"/>
+          <a:blip xmlns:r="http://schemas.openxmlformats.org/officeDocument/2006/relationships" xmlns:a="http://schemas.openxmlformats.org/drawingml/2006/main" r:embed="Rda539d6eca0d41b3"/>
           <a:stretch xmlns:a="http://schemas.openxmlformats.org/drawingml/2006/main"/>
         </p:blipFill>
         <p:spPr>
           <a:xfrm xmlns:a="http://schemas.openxmlformats.org/drawingml/2006/main">
-            <a:off x="781050" y="3325964"/>
-            <a:ext cx="6000750" cy="3711273"/>
+            <a:off x="781050" y="4206142"/>
+            <a:ext cx="6000750" cy="1950916"/>
           </a:xfrm>
           <a:prstGeom xmlns:a="http://schemas.openxmlformats.org/drawingml/2006/main" prst="rect">
             <a:avLst/>
@@ -18873,7 +18778,7 @@
           <p:cNvPr id="7" name="">
             <a:extLst xmlns:a="http://schemas.openxmlformats.org/drawingml/2006/main">
               <a:ext uri="{FF2B5EF4-FFF2-40B4-BE49-F238E27FC236}">
-                <a16:creationId xmlns:a16="http://schemas.microsoft.com/office/drawing/2014/main" id="{86D1FC86-75FA-4929-BB4D-05354253F614}"/>
+                <a16:creationId xmlns:a16="http://schemas.microsoft.com/office/drawing/2014/main" id="{51006589-1B86-43F8-B155-C0114D2A18F4}"/>
               </a:ext>
             </a:extLst>
           </p:cNvPr>
@@ -18913,7 +18818,7 @@
                   <a:srgbClr val="6F6C76"/>
                 </a:solidFill>
               </a:rPr>
-              <a:t>SwiftData 正常持久化；JSON Store 是初始化失败时的降级。</a:t>
+              <a:t>SwiftData/JSON Store、CloudKit private zone 与 Web recoverable draft storage 各自保持边界。</a:t>
             </a:r>
           </a:p>
         </p:txBody>
@@ -18921,7 +18826,7 @@
     </p:spTree>
     <p:extLst>
       <p:ext uri="{BB962C8B-B14F-4D97-AF65-F5344CB8AC3E}">
-        <p14:creationId xmlns:p14="http://schemas.microsoft.com/office/powerpoint/2010/main" val="1965206798"/>
+        <p14:creationId xmlns:p14="http://schemas.microsoft.com/office/powerpoint/2010/main" val="2089835357"/>
       </p:ext>
     </p:extLst>
   </p:cSld>
@@ -18949,10 +18854,10 @@
       </p:grpSpPr>
       <p:sp>
         <p:nvSpPr>
-          <p:cNvPr id="1" name="">
-            <a:extLst xmlns:a="http://schemas.openxmlformats.org/drawingml/2006/main">
-              <a:ext uri="{FF2B5EF4-FFF2-40B4-BE49-F238E27FC236}">
-                <a16:creationId xmlns:a16="http://schemas.microsoft.com/office/drawing/2014/main" id="{978748D0-DCF5-4DD0-A9E1-7A0F3450EE75}"/>
+          <p:cNvPr id="8" name="">
+            <a:extLst xmlns:a="http://schemas.openxmlformats.org/drawingml/2006/main">
+              <a:ext uri="{FF2B5EF4-FFF2-40B4-BE49-F238E27FC236}">
+                <a16:creationId xmlns:a16="http://schemas.microsoft.com/office/drawing/2014/main" id="{5EAE3076-0BE9-4106-BEF3-D5AAD4031755}"/>
               </a:ext>
             </a:extLst>
           </p:cNvPr>
@@ -19002,7 +18907,7 @@
           <p:cNvPr id="2" name="a4-title-9">
             <a:extLst xmlns:a="http://schemas.openxmlformats.org/drawingml/2006/main">
               <a:ext uri="{FF2B5EF4-FFF2-40B4-BE49-F238E27FC236}">
-                <a16:creationId xmlns:a16="http://schemas.microsoft.com/office/drawing/2014/main" id="{EE65FBE4-DC0C-4F12-A0CF-1ED2B7B3AEEC}"/>
+                <a16:creationId xmlns:a16="http://schemas.microsoft.com/office/drawing/2014/main" id="{5ADF322B-2971-4DD1-9354-696EC23959E8}"/>
               </a:ext>
             </a:extLst>
           </p:cNvPr>
@@ -19052,7 +18957,7 @@
           <p:cNvPr id="3" name="">
             <a:extLst xmlns:a="http://schemas.openxmlformats.org/drawingml/2006/main">
               <a:ext uri="{FF2B5EF4-FFF2-40B4-BE49-F238E27FC236}">
-                <a16:creationId xmlns:a16="http://schemas.microsoft.com/office/drawing/2014/main" id="{36CE6EBC-FE8A-4F90-97AE-B21E27EF71C4}"/>
+                <a16:creationId xmlns:a16="http://schemas.microsoft.com/office/drawing/2014/main" id="{1B8954B3-3A51-41C8-9585-290EE27A0460}"/>
               </a:ext>
             </a:extLst>
           </p:cNvPr>
@@ -19083,7 +18988,7 @@
           <p:cNvPr id="4" name="">
             <a:extLst xmlns:a="http://schemas.openxmlformats.org/drawingml/2006/main">
               <a:ext uri="{FF2B5EF4-FFF2-40B4-BE49-F238E27FC236}">
-                <a16:creationId xmlns:a16="http://schemas.microsoft.com/office/drawing/2014/main" id="{C2882D5C-8706-4FC9-9216-3FF0F834D409}"/>
+                <a16:creationId xmlns:a16="http://schemas.microsoft.com/office/drawing/2014/main" id="{968F3C74-2ED5-40F9-8C7A-ED8348BE4577}"/>
               </a:ext>
             </a:extLst>
           </p:cNvPr>
@@ -19133,7 +19038,7 @@
           <p:cNvPr id="5" name="">
             <a:extLst xmlns:a="http://schemas.openxmlformats.org/drawingml/2006/main">
               <a:ext uri="{FF2B5EF4-FFF2-40B4-BE49-F238E27FC236}">
-                <a16:creationId xmlns:a16="http://schemas.microsoft.com/office/drawing/2014/main" id="{1FAE5FA6-E9C6-4A77-9F32-EFD21E1FF669}"/>
+                <a16:creationId xmlns:a16="http://schemas.microsoft.com/office/drawing/2014/main" id="{E2A6767A-0682-4208-8821-E2733431E1CC}"/>
               </a:ext>
             </a:extLst>
           </p:cNvPr>
@@ -19172,13 +19077,13 @@
           <p:nvPr/>
         </p:nvPicPr>
         <p:blipFill>
-          <a:blip xmlns:r="http://schemas.openxmlformats.org/officeDocument/2006/relationships" xmlns:a="http://schemas.openxmlformats.org/drawingml/2006/main" r:embed="R1e3e3c3aee6a4c1d"/>
+          <a:blip xmlns:r="http://schemas.openxmlformats.org/officeDocument/2006/relationships" xmlns:a="http://schemas.openxmlformats.org/drawingml/2006/main" r:embed="Ra57219f448a64389"/>
           <a:stretch xmlns:a="http://schemas.openxmlformats.org/drawingml/2006/main"/>
         </p:blipFill>
         <p:spPr>
           <a:xfrm xmlns:a="http://schemas.openxmlformats.org/drawingml/2006/main">
-            <a:off x="2317827" y="1847850"/>
-            <a:ext cx="2927195" cy="6667500"/>
+            <a:off x="2451738" y="1847850"/>
+            <a:ext cx="2659375" cy="6667500"/>
           </a:xfrm>
           <a:prstGeom xmlns:a="http://schemas.openxmlformats.org/drawingml/2006/main" prst="rect">
             <a:avLst/>
@@ -19190,7 +19095,7 @@
           <p:cNvPr id="7" name="">
             <a:extLst xmlns:a="http://schemas.openxmlformats.org/drawingml/2006/main">
               <a:ext uri="{FF2B5EF4-FFF2-40B4-BE49-F238E27FC236}">
-                <a16:creationId xmlns:a16="http://schemas.microsoft.com/office/drawing/2014/main" id="{3D2B7909-BED0-4566-9A0A-5450B286EC48}"/>
+                <a16:creationId xmlns:a16="http://schemas.microsoft.com/office/drawing/2014/main" id="{BF155886-F5FC-41C9-8FCD-11B13EB70F16}"/>
               </a:ext>
             </a:extLst>
           </p:cNvPr>
@@ -19238,7 +19143,7 @@
     </p:spTree>
     <p:extLst>
       <p:ext uri="{BB962C8B-B14F-4D97-AF65-F5344CB8AC3E}">
-        <p14:creationId xmlns:p14="http://schemas.microsoft.com/office/powerpoint/2010/main" val="99512084"/>
+        <p14:creationId xmlns:p14="http://schemas.microsoft.com/office/powerpoint/2010/main" val="1710354054"/>
       </p:ext>
     </p:extLst>
   </p:cSld>
